--- a/aws_ai_governance_platform_gtm_deck.pptx
+++ b/aws_ai_governance_platform_gtm_deck.pptx
@@ -16,11 +16,9 @@
     <p:sldId id="264" r:id="rId10"/>
     <p:sldId id="265" r:id="rId11"/>
     <p:sldId id="266" r:id="rId12"/>
-    <p:sldId id="267" r:id="rId13"/>
     <p:sldId id="268" r:id="rId14"/>
     <p:sldId id="269" r:id="rId15"/>
     <p:sldId id="270" r:id="rId16"/>
-    <p:sldId id="271" r:id="rId17"/>
   </p:sldIdLst>
   <p:notesMasterIdLst>
     <p:notesMasterId r:id="rId18"/>
@@ -744,95 +742,6 @@
 </p:notes>
 </file>
 
-<file path=ppt/notesSlides/notesSlide12.xml><?xml version="1.0" encoding="utf-8"?>
-<p:notes xmlns:a="http://schemas.openxmlformats.org/drawingml/2006/main" xmlns:r="http://schemas.openxmlformats.org/officeDocument/2006/relationships" xmlns:p="http://schemas.openxmlformats.org/presentationml/2006/main">
-  <p:cSld>
-    <p:spTree>
-      <p:nvGrpSpPr>
-        <p:cNvPr id="1" name=""/>
-        <p:cNvGrpSpPr/>
-        <p:nvPr/>
-      </p:nvGrpSpPr>
-      <p:grpSpPr>
-        <a:xfrm>
-          <a:off x="0" y="0"/>
-          <a:ext cx="0" cy="0"/>
-          <a:chOff x="0" y="0"/>
-          <a:chExt cx="0" cy="0"/>
-        </a:xfrm>
-      </p:grpSpPr>
-      <p:sp>
-        <p:nvSpPr>
-          <p:cNvPr id="2" name="Slide Image Placeholder 1"/>
-          <p:cNvSpPr>
-            <a:spLocks noGrp="1" noRot="1" noChangeAspect="1"/>
-          </p:cNvSpPr>
-          <p:nvPr>
-            <p:ph type="sldImg"/>
-          </p:nvPr>
-        </p:nvSpPr>
-        <p:spPr/>
-      </p:sp>
-      <p:sp>
-        <p:nvSpPr>
-          <p:cNvPr id="3" name="Notes Placeholder 2"/>
-          <p:cNvSpPr>
-            <a:spLocks noGrp="1"/>
-          </p:cNvSpPr>
-          <p:nvPr>
-            <p:ph type="body" idx="1"/>
-          </p:nvPr>
-        </p:nvSpPr>
-        <p:spPr/>
-        <p:txBody>
-          <a:bodyPr/>
-          <a:lstStyle/>
-          <a:p>
-            <a:r>
-              <a:rPr lang="en-US" dirty="0"/>
-              <a:t>The current repo README states it is a production-shaped accelerator and explicitly names missing production work such as live connectors, ATO/GovRAMP, and security testing.
-IMPROVEMENTS-OVER-EDU-HCLS.md already lists next backlog items including live connectors, KB ingestion, axe-core CI, Cedar/OPA policy export, and deeper offerings.</a:t>
-            </a:r>
-            <a:endParaRPr lang="en-US" dirty="0"/>
-          </a:p>
-        </p:txBody>
-      </p:sp>
-      <p:sp>
-        <p:nvSpPr>
-          <p:cNvPr id="4" name="Slide Number Placeholder 3"/>
-          <p:cNvSpPr>
-            <a:spLocks noGrp="1"/>
-          </p:cNvSpPr>
-          <p:nvPr>
-            <p:ph type="sldNum" sz="quarter" idx="10"/>
-          </p:nvPr>
-        </p:nvSpPr>
-        <p:spPr/>
-        <p:txBody>
-          <a:bodyPr/>
-          <a:lstStyle/>
-          <a:p>
-            <a:fld id="{F7021451-1387-4CA6-816F-3879F97B5CBC}" type="slidenum">
-              <a:rPr lang="en-US"/>
-              <a:t>12</a:t>
-            </a:fld>
-            <a:endParaRPr lang="en-US"/>
-          </a:p>
-        </p:txBody>
-      </p:sp>
-    </p:spTree>
-    <p:extLst>
-      <p:ext uri="{BB962C8B-B14F-4D97-AF65-F5344CB8AC3E}">
-        <p14:creationId xmlns:p14="http://schemas.microsoft.com/office/powerpoint/2010/main" val="1024086991"/>
-      </p:ext>
-    </p:extLst>
-  </p:cSld>
-  <p:clrMapOvr>
-    <a:masterClrMapping/>
-  </p:clrMapOvr>
-</p:notes>
-</file>
-
 <file path=ppt/notesSlides/notesSlide13.xml><?xml version="1.0" encoding="utf-8"?>
 <p:notes xmlns:a="http://schemas.openxmlformats.org/drawingml/2006/main" xmlns:r="http://schemas.openxmlformats.org/officeDocument/2006/relationships" xmlns:p="http://schemas.openxmlformats.org/presentationml/2006/main">
   <p:cSld>
@@ -1086,95 +995,6 @@
             <a:fld id="{F7021451-1387-4CA6-816F-3879F97B5CBC}" type="slidenum">
               <a:rPr lang="en-US"/>
               <a:t>15</a:t>
-            </a:fld>
-            <a:endParaRPr lang="en-US"/>
-          </a:p>
-        </p:txBody>
-      </p:sp>
-    </p:spTree>
-    <p:extLst>
-      <p:ext uri="{BB962C8B-B14F-4D97-AF65-F5344CB8AC3E}">
-        <p14:creationId xmlns:p14="http://schemas.microsoft.com/office/powerpoint/2010/main" val="1024086991"/>
-      </p:ext>
-    </p:extLst>
-  </p:cSld>
-  <p:clrMapOvr>
-    <a:masterClrMapping/>
-  </p:clrMapOvr>
-</p:notes>
-</file>
-
-<file path=ppt/notesSlides/notesSlide16.xml><?xml version="1.0" encoding="utf-8"?>
-<p:notes xmlns:a="http://schemas.openxmlformats.org/drawingml/2006/main" xmlns:r="http://schemas.openxmlformats.org/officeDocument/2006/relationships" xmlns:p="http://schemas.openxmlformats.org/presentationml/2006/main">
-  <p:cSld>
-    <p:spTree>
-      <p:nvGrpSpPr>
-        <p:cNvPr id="1" name=""/>
-        <p:cNvGrpSpPr/>
-        <p:nvPr/>
-      </p:nvGrpSpPr>
-      <p:grpSpPr>
-        <a:xfrm>
-          <a:off x="0" y="0"/>
-          <a:ext cx="0" cy="0"/>
-          <a:chOff x="0" y="0"/>
-          <a:chExt cx="0" cy="0"/>
-        </a:xfrm>
-      </p:grpSpPr>
-      <p:sp>
-        <p:nvSpPr>
-          <p:cNvPr id="2" name="Slide Image Placeholder 1"/>
-          <p:cNvSpPr>
-            <a:spLocks noGrp="1" noRot="1" noChangeAspect="1"/>
-          </p:cNvSpPr>
-          <p:nvPr>
-            <p:ph type="sldImg"/>
-          </p:nvPr>
-        </p:nvSpPr>
-        <p:spPr/>
-      </p:sp>
-      <p:sp>
-        <p:nvSpPr>
-          <p:cNvPr id="3" name="Notes Placeholder 2"/>
-          <p:cNvSpPr>
-            <a:spLocks noGrp="1"/>
-          </p:cNvSpPr>
-          <p:nvPr>
-            <p:ph type="body" idx="1"/>
-          </p:nvPr>
-        </p:nvSpPr>
-        <p:spPr/>
-        <p:txBody>
-          <a:bodyPr/>
-          <a:lstStyle/>
-          <a:p>
-            <a:r>
-              <a:rPr lang="en-US" dirty="0"/>
-              <a:t>This slide is intentionally formatted as a Claude Code brief. Use it as the repo build prompt.
-Deliverables: code contracts, IaC modules, runtime services, tests, docs, and GTM package.</a:t>
-            </a:r>
-            <a:endParaRPr lang="en-US" dirty="0"/>
-          </a:p>
-        </p:txBody>
-      </p:sp>
-      <p:sp>
-        <p:nvSpPr>
-          <p:cNvPr id="4" name="Slide Number Placeholder 3"/>
-          <p:cNvSpPr>
-            <a:spLocks noGrp="1"/>
-          </p:cNvSpPr>
-          <p:nvPr>
-            <p:ph type="sldNum" sz="quarter" idx="10"/>
-          </p:nvPr>
-        </p:nvSpPr>
-        <p:spPr/>
-        <p:txBody>
-          <a:bodyPr/>
-          <a:lstStyle/>
-          <a:p>
-            <a:fld id="{F7021451-1387-4CA6-816F-3879F97B5CBC}" type="slidenum">
-              <a:rPr lang="en-US"/>
-              <a:t>16</a:t>
             </a:fld>
             <a:endParaRPr lang="en-US"/>
           </a:p>
@@ -2222,7 +2042,7 @@
     <p:bg>
       <p:bgPr>
         <a:solidFill>
-          <a:srgbClr val="0B1020"/>
+          <a:srgbClr val="232F3E"/>
         </a:solidFill>
       </p:bgPr>
     </p:bg>
@@ -2255,11 +2075,11 @@
             <a:avLst/>
           </a:prstGeom>
           <a:solidFill>
-            <a:srgbClr val="0B1020"/>
+            <a:srgbClr val="232F3E"/>
           </a:solidFill>
           <a:ln w="12700">
             <a:solidFill>
-              <a:srgbClr val="0B1020"/>
+              <a:srgbClr val="232F3E"/>
             </a:solidFill>
             <a:prstDash val="solid"/>
           </a:ln>
@@ -2280,7 +2100,7 @@
             <a:avLst/>
           </a:prstGeom>
           <a:solidFill>
-            <a:srgbClr val="0B1020">
+            <a:srgbClr val="232F3E">
               <a:alpha val="0"/>
             </a:srgbClr>
           </a:solidFill>
@@ -2309,7 +2129,7 @@
             <a:avLst/>
           </a:prstGeom>
           <a:solidFill>
-            <a:srgbClr val="0B1020">
+            <a:srgbClr val="232F3E">
               <a:alpha val="0"/>
             </a:srgbClr>
           </a:solidFill>
@@ -2472,11 +2292,11 @@
             <a:avLst/>
           </a:prstGeom>
           <a:solidFill>
-            <a:srgbClr val="2563EB"/>
+            <a:srgbClr val="FF9900"/>
           </a:solidFill>
           <a:ln>
             <a:solidFill>
-              <a:srgbClr val="2563EB"/>
+              <a:srgbClr val="FF9900"/>
             </a:solidFill>
           </a:ln>
         </p:spPr>
@@ -2700,7 +2520,7 @@
             <a:r>
               <a:rPr lang="en-US" sz="2500" b="1" dirty="0">
                 <a:solidFill>
-                  <a:srgbClr val="0B1020"/>
+                  <a:srgbClr val="232F3E"/>
                 </a:solidFill>
                 <a:latin typeface="Aptos Display" pitchFamily="34" charset="0"/>
                 <a:ea typeface="Aptos Display" pitchFamily="34" charset="-122"/>
@@ -2791,7 +2611,7 @@
             <a:r>
               <a:rPr lang="en-US" sz="1070" dirty="0">
                 <a:solidFill>
-                  <a:srgbClr val="0B1020"/>
+                  <a:srgbClr val="232F3E"/>
                 </a:solidFill>
               </a:rPr>
               <a:t>department · agent · user · purpose · model tier</a:t>
@@ -2840,11 +2660,11 @@
             <a:avLst/>
           </a:prstGeom>
           <a:solidFill>
-            <a:srgbClr val="2563EB"/>
+            <a:srgbClr val="FF9900"/>
           </a:solidFill>
           <a:ln w="12700">
             <a:solidFill>
-              <a:srgbClr val="2563EB"/>
+              <a:srgbClr val="FF9900"/>
             </a:solidFill>
           </a:ln>
         </p:spPr>
@@ -2904,7 +2724,7 @@
             <a:r>
               <a:rPr lang="en-US" sz="1070" dirty="0">
                 <a:solidFill>
-                  <a:srgbClr val="0B1020"/>
+                  <a:srgbClr val="232F3E"/>
                 </a:solidFill>
               </a:rPr>
               <a:t>max_tokens · TPM/RPM quota · rate limits · caching</a:t>
@@ -2953,11 +2773,11 @@
             <a:avLst/>
           </a:prstGeom>
           <a:solidFill>
-            <a:srgbClr val="2563EB"/>
+            <a:srgbClr val="FF9900"/>
           </a:solidFill>
           <a:ln w="12700">
             <a:solidFill>
-              <a:srgbClr val="2563EB"/>
+              <a:srgbClr val="FF9900"/>
             </a:solidFill>
           </a:ln>
         </p:spPr>
@@ -3017,7 +2837,7 @@
             <a:r>
               <a:rPr lang="en-US" sz="1070" dirty="0">
                 <a:solidFill>
-                  <a:srgbClr val="0B1020"/>
+                  <a:srgbClr val="232F3E"/>
                 </a:solidFill>
               </a:rPr>
               <a:t>application inference profiles + tags + CUR</a:t>
@@ -3066,11 +2886,11 @@
             <a:avLst/>
           </a:prstGeom>
           <a:solidFill>
-            <a:srgbClr val="2563EB"/>
+            <a:srgbClr val="FF9900"/>
           </a:solidFill>
           <a:ln w="12700">
             <a:solidFill>
-              <a:srgbClr val="2563EB"/>
+              <a:srgbClr val="FF9900"/>
             </a:solidFill>
           </a:ln>
         </p:spPr>
@@ -3130,7 +2950,7 @@
             <a:r>
               <a:rPr lang="en-US" sz="1070" dirty="0">
                 <a:solidFill>
-                  <a:srgbClr val="0B1020"/>
+                  <a:srgbClr val="232F3E"/>
                 </a:solidFill>
               </a:rPr>
               <a:t>QuickSight dashboards · monthly ledger · anomaly alerts</a:t>
@@ -3166,7 +2986,7 @@
             <a:r>
               <a:rPr lang="en-US" sz="1500" b="1" dirty="0">
                 <a:solidFill>
-                  <a:srgbClr val="0B1020"/>
+                  <a:srgbClr val="232F3E"/>
                 </a:solidFill>
               </a:rPr>
               <a:t>Required platform table: usage_ledger</a:t>
@@ -3240,7 +3060,7 @@
             <a:r>
               <a:rPr lang="en-US" sz="1400" b="1" dirty="0">
                 <a:solidFill>
-                  <a:srgbClr val="0B1020"/>
+                  <a:srgbClr val="232F3E"/>
                 </a:solidFill>
               </a:rPr>
               <a:t>Why customers care: nobody wants an unbounded AI bill; governance must make usage explainable by department and controllable before the call is made.</a:t>
@@ -3444,7 +3264,7 @@
             <a:r>
               <a:rPr lang="en-US" sz="2500" b="1" dirty="0">
                 <a:solidFill>
-                  <a:srgbClr val="0B1020"/>
+                  <a:srgbClr val="232F3E"/>
                 </a:solidFill>
                 <a:latin typeface="Aptos Display" pitchFamily="34" charset="0"/>
                 <a:ea typeface="Aptos Display" pitchFamily="34" charset="-122"/>
@@ -3510,7 +3330,7 @@
             <a:r>
               <a:rPr lang="en-US" sz="1400" b="1" dirty="0">
                 <a:solidFill>
-                  <a:srgbClr val="0B1020"/>
+                  <a:srgbClr val="232F3E"/>
                 </a:solidFill>
               </a:rPr>
               <a:t>Public sector</a:t>
@@ -3639,7 +3459,7 @@
             <a:r>
               <a:rPr lang="en-US" sz="1400" b="1" dirty="0">
                 <a:solidFill>
-                  <a:srgbClr val="0B1020"/>
+                  <a:srgbClr val="232F3E"/>
                 </a:solidFill>
               </a:rPr>
               <a:t>Healthcare</a:t>
@@ -3768,7 +3588,7 @@
             <a:r>
               <a:rPr lang="en-US" sz="1400" b="1" dirty="0">
                 <a:solidFill>
-                  <a:srgbClr val="0B1020"/>
+                  <a:srgbClr val="232F3E"/>
                 </a:solidFill>
               </a:rPr>
               <a:t>Life sciences</a:t>
@@ -3897,7 +3717,7 @@
             <a:r>
               <a:rPr lang="en-US" sz="1400" b="1" dirty="0">
                 <a:solidFill>
-                  <a:srgbClr val="0B1020"/>
+                  <a:srgbClr val="232F3E"/>
                 </a:solidFill>
               </a:rPr>
               <a:t>Education</a:t>
@@ -4026,7 +3846,7 @@
             <a:r>
               <a:rPr lang="en-US" sz="1400" b="1" dirty="0">
                 <a:solidFill>
-                  <a:srgbClr val="0B1020"/>
+                  <a:srgbClr val="232F3E"/>
                 </a:solidFill>
               </a:rPr>
               <a:t>Enterprise</a:t>
@@ -4116,11 +3936,11 @@
             <a:avLst/>
           </a:prstGeom>
           <a:solidFill>
-            <a:srgbClr val="0B1020"/>
+            <a:srgbClr val="232F3E"/>
           </a:solidFill>
           <a:ln>
             <a:solidFill>
-              <a:srgbClr val="0B1020"/>
+              <a:srgbClr val="232F3E"/>
             </a:solidFill>
           </a:ln>
         </p:spPr>
@@ -4172,7 +3992,7 @@
             <a:r>
               <a:rPr lang="en-US" sz="1350" b="1" dirty="0">
                 <a:solidFill>
-                  <a:srgbClr val="0B1020"/>
+                  <a:srgbClr val="232F3E"/>
                 </a:solidFill>
               </a:rPr>
               <a:t>Important: the platform supports compliance; the customer still owns authorization, validation, procedures, risk acceptance, and operations.</a:t>
@@ -4220,866 +4040,6 @@
       <p:sp>
         <p:nvSpPr>
           <p:cNvPr id="23" name="Text 21"/>
-          <p:cNvSpPr/>
-          <p:nvPr/>
-        </p:nvSpPr>
-        <p:spPr>
-          <a:xfrm>
-            <a:off x="9418320" y="6537960"/>
-            <a:ext cx="2240280" cy="146304"/>
-          </a:xfrm>
-          <a:prstGeom prst="rect">
-            <a:avLst/>
-          </a:prstGeom>
-          <a:noFill/>
-          <a:ln/>
-        </p:spPr>
-        <p:txBody>
-          <a:bodyPr wrap="square" lIns="0" tIns="0" rIns="0" bIns="0" rtlCol="0" anchor="ctr"/>
-          <a:lstStyle/>
-          <a:p>
-            <a:pPr algn="r" indent="0" marL="0">
-              <a:buNone/>
-            </a:pPr>
-            <a:r>
-              <a:rPr lang="en-US" sz="650" dirty="0">
-                <a:solidFill>
-                  <a:srgbClr val="64748B"/>
-                </a:solidFill>
-              </a:rPr>
-              <a:t>AWS AI Governance Platform concept</a:t>
-            </a:r>
-            <a:endParaRPr lang="en-US" sz="650" dirty="0"/>
-          </a:p>
-        </p:txBody>
-      </p:sp>
-    </p:spTree>
-  </p:cSld>
-  <p:clrMapOvr>
-    <a:masterClrMapping/>
-  </p:clrMapOvr>
-</p:sld>
-</file>
-
-<file path=ppt/slides/slide12.xml><?xml version="1.0" encoding="utf-8"?>
-<p:sld xmlns:a="http://schemas.openxmlformats.org/drawingml/2006/main" xmlns:r="http://schemas.openxmlformats.org/officeDocument/2006/relationships" xmlns:p="http://schemas.openxmlformats.org/presentationml/2006/main">
-  <p:cSld name="Slide 12">
-    <p:bg>
-      <p:bgPr>
-        <a:solidFill>
-          <a:srgbClr val="F8FAFC"/>
-        </a:solidFill>
-      </p:bgPr>
-    </p:bg>
-    <p:spTree>
-      <p:nvGrpSpPr>
-        <p:cNvPr id="1" name=""/>
-        <p:cNvGrpSpPr/>
-        <p:nvPr/>
-      </p:nvGrpSpPr>
-      <p:grpSpPr>
-        <a:xfrm>
-          <a:off x="0" y="0"/>
-          <a:ext cx="0" cy="0"/>
-          <a:chOff x="0" y="0"/>
-          <a:chExt cx="0" cy="0"/>
-        </a:xfrm>
-      </p:grpSpPr>
-      <p:sp>
-        <p:nvSpPr>
-          <p:cNvPr id="2" name="Shape 0"/>
-          <p:cNvSpPr/>
-          <p:nvPr/>
-        </p:nvSpPr>
-        <p:spPr>
-          <a:xfrm>
-            <a:off x="0" y="0"/>
-            <a:ext cx="12191695" cy="146304"/>
-          </a:xfrm>
-          <a:prstGeom prst="rect">
-            <a:avLst/>
-          </a:prstGeom>
-          <a:solidFill>
-            <a:srgbClr val="FF9900"/>
-          </a:solidFill>
-          <a:ln w="12700">
-            <a:solidFill>
-              <a:srgbClr val="FF9900"/>
-            </a:solidFill>
-            <a:prstDash val="solid"/>
-          </a:ln>
-        </p:spPr>
-      </p:sp>
-      <p:sp>
-        <p:nvSpPr>
-          <p:cNvPr id="3" name="Text 1"/>
-          <p:cNvSpPr/>
-          <p:nvPr/>
-        </p:nvSpPr>
-        <p:spPr>
-          <a:xfrm>
-            <a:off x="502920" y="256032"/>
-            <a:ext cx="10515600" cy="201168"/>
-          </a:xfrm>
-          <a:prstGeom prst="rect">
-            <a:avLst/>
-          </a:prstGeom>
-          <a:noFill/>
-          <a:ln/>
-        </p:spPr>
-        <p:txBody>
-          <a:bodyPr wrap="square" rtlCol="0" anchor="ctr"/>
-          <a:lstStyle/>
-          <a:p>
-            <a:pPr indent="0" marL="0">
-              <a:buNone/>
-            </a:pPr>
-            <a:r>
-              <a:rPr lang="en-US" sz="850" b="1" dirty="0">
-                <a:solidFill>
-                  <a:srgbClr val="64748B"/>
-                </a:solidFill>
-                <a:latin typeface="Aptos" pitchFamily="34" charset="0"/>
-                <a:ea typeface="Aptos" pitchFamily="34" charset="-122"/>
-                <a:cs typeface="Aptos" pitchFamily="34" charset="-120"/>
-              </a:rPr>
-              <a:t>REPOSITORY STRATEGY</a:t>
-            </a:r>
-            <a:endParaRPr lang="en-US" sz="850" dirty="0"/>
-          </a:p>
-        </p:txBody>
-      </p:sp>
-      <p:sp>
-        <p:nvSpPr>
-          <p:cNvPr id="4" name="Text 2"/>
-          <p:cNvSpPr/>
-          <p:nvPr/>
-        </p:nvSpPr>
-        <p:spPr>
-          <a:xfrm>
-            <a:off x="502920" y="512064"/>
-            <a:ext cx="11064240" cy="438912"/>
-          </a:xfrm>
-          <a:prstGeom prst="rect">
-            <a:avLst/>
-          </a:prstGeom>
-          <a:noFill/>
-          <a:ln/>
-        </p:spPr>
-        <p:txBody>
-          <a:bodyPr wrap="square" lIns="0" tIns="0" rIns="0" bIns="0" rtlCol="0" anchor="ctr"/>
-          <a:lstStyle/>
-          <a:p>
-            <a:pPr indent="0" marL="0">
-              <a:buNone/>
-            </a:pPr>
-            <a:r>
-              <a:rPr lang="en-US" sz="2500" b="1" dirty="0">
-                <a:solidFill>
-                  <a:srgbClr val="0B1020"/>
-                </a:solidFill>
-                <a:latin typeface="Aptos Display" pitchFamily="34" charset="0"/>
-                <a:ea typeface="Aptos Display" pitchFamily="34" charset="-122"/>
-                <a:cs typeface="Aptos Display" pitchFamily="34" charset="-120"/>
-              </a:rPr>
-              <a:t>How to improve the current slg-ai-agents repo</a:t>
-            </a:r>
-            <a:endParaRPr lang="en-US" sz="2500" dirty="0"/>
-          </a:p>
-        </p:txBody>
-      </p:sp>
-      <p:sp>
-        <p:nvSpPr>
-          <p:cNvPr id="5" name="Text 3"/>
-          <p:cNvSpPr/>
-          <p:nvPr/>
-        </p:nvSpPr>
-        <p:spPr>
-          <a:xfrm>
-            <a:off x="1005840" y="1234440"/>
-            <a:ext cx="2286000" cy="228600"/>
-          </a:xfrm>
-          <a:prstGeom prst="rect">
-            <a:avLst/>
-          </a:prstGeom>
-          <a:noFill/>
-          <a:ln/>
-        </p:spPr>
-        <p:txBody>
-          <a:bodyPr wrap="square" lIns="0" tIns="0" rIns="0" bIns="0" rtlCol="0" anchor="ctr"/>
-          <a:lstStyle/>
-          <a:p>
-            <a:pPr indent="0" marL="0">
-              <a:buNone/>
-            </a:pPr>
-            <a:r>
-              <a:rPr lang="en-US" sz="1800" b="1" dirty="0">
-                <a:solidFill>
-                  <a:srgbClr val="10B981"/>
-                </a:solidFill>
-              </a:rPr>
-              <a:t>Keep</a:t>
-            </a:r>
-            <a:endParaRPr lang="en-US" sz="1800" dirty="0"/>
-          </a:p>
-        </p:txBody>
-      </p:sp>
-      <p:sp>
-        <p:nvSpPr>
-          <p:cNvPr id="6" name="Text 4"/>
-          <p:cNvSpPr/>
-          <p:nvPr/>
-        </p:nvSpPr>
-        <p:spPr>
-          <a:xfrm>
-            <a:off x="6446520" y="1234440"/>
-            <a:ext cx="2377440" cy="228600"/>
-          </a:xfrm>
-          <a:prstGeom prst="rect">
-            <a:avLst/>
-          </a:prstGeom>
-          <a:noFill/>
-          <a:ln/>
-        </p:spPr>
-        <p:txBody>
-          <a:bodyPr wrap="square" lIns="0" tIns="0" rIns="0" bIns="0" rtlCol="0" anchor="ctr"/>
-          <a:lstStyle/>
-          <a:p>
-            <a:pPr indent="0" marL="0">
-              <a:buNone/>
-            </a:pPr>
-            <a:r>
-              <a:rPr lang="en-US" sz="1800" b="1" dirty="0">
-                <a:solidFill>
-                  <a:srgbClr val="FF9900"/>
-                </a:solidFill>
-              </a:rPr>
-              <a:t>Change / add</a:t>
-            </a:r>
-            <a:endParaRPr lang="en-US" sz="1800" dirty="0"/>
-          </a:p>
-        </p:txBody>
-      </p:sp>
-      <p:sp>
-        <p:nvSpPr>
-          <p:cNvPr id="7" name="Text 5"/>
-          <p:cNvSpPr/>
-          <p:nvPr/>
-        </p:nvSpPr>
-        <p:spPr>
-          <a:xfrm>
-            <a:off x="914400" y="1691640"/>
-            <a:ext cx="4434840" cy="365760"/>
-          </a:xfrm>
-          <a:prstGeom prst="roundRect">
-            <a:avLst/>
-          </a:prstGeom>
-          <a:solidFill>
-            <a:srgbClr val="ECFDF5"/>
-          </a:solidFill>
-          <a:ln w="12700">
-            <a:solidFill>
-              <a:srgbClr val="A7F3D0"/>
-            </a:solidFill>
-          </a:ln>
-        </p:spPr>
-        <p:txBody>
-          <a:bodyPr wrap="square" lIns="1016" tIns="1016" rIns="1016" bIns="1016" rtlCol="0" anchor="ctr">
-            <a:normAutofit/>
-          </a:bodyPr>
-          <a:lstStyle/>
-          <a:p>
-            <a:pPr algn="l" indent="0" marL="0">
-              <a:buNone/>
-            </a:pPr>
-            <a:r>
-              <a:rPr lang="en-US" sz="1120" dirty="0">
-                <a:solidFill>
-                  <a:srgbClr val="0B1020"/>
-                </a:solidFill>
-              </a:rPr>
-              <a:t>Strong thesis: governance is the product</a:t>
-            </a:r>
-            <a:endParaRPr lang="en-US" sz="1120" dirty="0"/>
-          </a:p>
-        </p:txBody>
-      </p:sp>
-      <p:sp>
-        <p:nvSpPr>
-          <p:cNvPr id="8" name="Text 6"/>
-          <p:cNvSpPr/>
-          <p:nvPr/>
-        </p:nvSpPr>
-        <p:spPr>
-          <a:xfrm>
-            <a:off x="914400" y="2258568"/>
-            <a:ext cx="4434840" cy="365760"/>
-          </a:xfrm>
-          <a:prstGeom prst="roundRect">
-            <a:avLst/>
-          </a:prstGeom>
-          <a:solidFill>
-            <a:srgbClr val="ECFDF5"/>
-          </a:solidFill>
-          <a:ln w="12700">
-            <a:solidFill>
-              <a:srgbClr val="A7F3D0"/>
-            </a:solidFill>
-          </a:ln>
-        </p:spPr>
-        <p:txBody>
-          <a:bodyPr wrap="square" lIns="1016" tIns="1016" rIns="1016" bIns="1016" rtlCol="0" anchor="ctr">
-            <a:normAutofit/>
-          </a:bodyPr>
-          <a:lstStyle/>
-          <a:p>
-            <a:pPr algn="l" indent="0" marL="0">
-              <a:buNone/>
-            </a:pPr>
-            <a:r>
-              <a:rPr lang="en-US" sz="1120" dirty="0">
-                <a:solidFill>
-                  <a:srgbClr val="0B1020"/>
-                </a:solidFill>
-              </a:rPr>
-              <a:t>8 SLG agents + WoG orchestration story</a:t>
-            </a:r>
-            <a:endParaRPr lang="en-US" sz="1120" dirty="0"/>
-          </a:p>
-        </p:txBody>
-      </p:sp>
-      <p:sp>
-        <p:nvSpPr>
-          <p:cNvPr id="9" name="Text 7"/>
-          <p:cNvSpPr/>
-          <p:nvPr/>
-        </p:nvSpPr>
-        <p:spPr>
-          <a:xfrm>
-            <a:off x="914400" y="2825496"/>
-            <a:ext cx="4434840" cy="365760"/>
-          </a:xfrm>
-          <a:prstGeom prst="roundRect">
-            <a:avLst/>
-          </a:prstGeom>
-          <a:solidFill>
-            <a:srgbClr val="ECFDF5"/>
-          </a:solidFill>
-          <a:ln w="12700">
-            <a:solidFill>
-              <a:srgbClr val="A7F3D0"/>
-            </a:solidFill>
-          </a:ln>
-        </p:spPr>
-        <p:txBody>
-          <a:bodyPr wrap="square" lIns="1016" tIns="1016" rIns="1016" bIns="1016" rtlCol="0" anchor="ctr">
-            <a:normAutofit/>
-          </a:bodyPr>
-          <a:lstStyle/>
-          <a:p>
-            <a:pPr algn="l" indent="0" marL="0">
-              <a:buNone/>
-            </a:pPr>
-            <a:r>
-              <a:rPr lang="en-US" sz="1120" dirty="0">
-                <a:solidFill>
-                  <a:srgbClr val="0B1020"/>
-                </a:solidFill>
-              </a:rPr>
-              <a:t>Control mappings and shared responsibility</a:t>
-            </a:r>
-            <a:endParaRPr lang="en-US" sz="1120" dirty="0"/>
-          </a:p>
-        </p:txBody>
-      </p:sp>
-      <p:sp>
-        <p:nvSpPr>
-          <p:cNvPr id="10" name="Text 8"/>
-          <p:cNvSpPr/>
-          <p:nvPr/>
-        </p:nvSpPr>
-        <p:spPr>
-          <a:xfrm>
-            <a:off x="914400" y="3392424"/>
-            <a:ext cx="4434840" cy="365760"/>
-          </a:xfrm>
-          <a:prstGeom prst="roundRect">
-            <a:avLst/>
-          </a:prstGeom>
-          <a:solidFill>
-            <a:srgbClr val="ECFDF5"/>
-          </a:solidFill>
-          <a:ln w="12700">
-            <a:solidFill>
-              <a:srgbClr val="A7F3D0"/>
-            </a:solidFill>
-          </a:ln>
-        </p:spPr>
-        <p:txBody>
-          <a:bodyPr wrap="square" lIns="1016" tIns="1016" rIns="1016" bIns="1016" rtlCol="0" anchor="ctr">
-            <a:normAutofit/>
-          </a:bodyPr>
-          <a:lstStyle/>
-          <a:p>
-            <a:pPr algn="l" indent="0" marL="0">
-              <a:buNone/>
-            </a:pPr>
-            <a:r>
-              <a:rPr lang="en-US" sz="1120" dirty="0">
-                <a:solidFill>
-                  <a:srgbClr val="0B1020"/>
-                </a:solidFill>
-              </a:rPr>
-              <a:t>Withheld consequential actions</a:t>
-            </a:r>
-            <a:endParaRPr lang="en-US" sz="1120" dirty="0"/>
-          </a:p>
-        </p:txBody>
-      </p:sp>
-      <p:sp>
-        <p:nvSpPr>
-          <p:cNvPr id="11" name="Text 9"/>
-          <p:cNvSpPr/>
-          <p:nvPr/>
-        </p:nvSpPr>
-        <p:spPr>
-          <a:xfrm>
-            <a:off x="914400" y="3959352"/>
-            <a:ext cx="4434840" cy="365760"/>
-          </a:xfrm>
-          <a:prstGeom prst="roundRect">
-            <a:avLst/>
-          </a:prstGeom>
-          <a:solidFill>
-            <a:srgbClr val="ECFDF5"/>
-          </a:solidFill>
-          <a:ln w="12700">
-            <a:solidFill>
-              <a:srgbClr val="A7F3D0"/>
-            </a:solidFill>
-          </a:ln>
-        </p:spPr>
-        <p:txBody>
-          <a:bodyPr wrap="square" lIns="1016" tIns="1016" rIns="1016" bIns="1016" rtlCol="0" anchor="ctr">
-            <a:normAutofit/>
-          </a:bodyPr>
-          <a:lstStyle/>
-          <a:p>
-            <a:pPr algn="l" indent="0" marL="0">
-              <a:buNone/>
-            </a:pPr>
-            <a:r>
-              <a:rPr lang="en-US" sz="1120" dirty="0">
-                <a:solidFill>
-                  <a:srgbClr val="0B1020"/>
-                </a:solidFill>
-              </a:rPr>
-              <a:t>Accessibility, fairness, masking concepts</a:t>
-            </a:r>
-            <a:endParaRPr lang="en-US" sz="1120" dirty="0"/>
-          </a:p>
-        </p:txBody>
-      </p:sp>
-      <p:sp>
-        <p:nvSpPr>
-          <p:cNvPr id="12" name="Text 10"/>
-          <p:cNvSpPr/>
-          <p:nvPr/>
-        </p:nvSpPr>
-        <p:spPr>
-          <a:xfrm>
-            <a:off x="6400800" y="1691640"/>
-            <a:ext cx="4526280" cy="310896"/>
-          </a:xfrm>
-          <a:prstGeom prst="roundRect">
-            <a:avLst/>
-          </a:prstGeom>
-          <a:solidFill>
-            <a:srgbClr val="FFF7ED"/>
-          </a:solidFill>
-          <a:ln w="12700">
-            <a:solidFill>
-              <a:srgbClr val="FDBA74"/>
-            </a:solidFill>
-          </a:ln>
-        </p:spPr>
-        <p:txBody>
-          <a:bodyPr wrap="square" lIns="1016" tIns="1016" rIns="1016" bIns="1016" rtlCol="0" anchor="ctr">
-            <a:normAutofit/>
-          </a:bodyPr>
-          <a:lstStyle/>
-          <a:p>
-            <a:pPr algn="l" indent="0" marL="0">
-              <a:buNone/>
-            </a:pPr>
-            <a:r>
-              <a:rPr lang="en-US" sz="1050" dirty="0">
-                <a:solidFill>
-                  <a:srgbClr val="0B1020"/>
-                </a:solidFill>
-              </a:rPr>
-              <a:t>Extract platform into standalone repo</a:t>
-            </a:r>
-            <a:endParaRPr lang="en-US" sz="1050" dirty="0"/>
-          </a:p>
-        </p:txBody>
-      </p:sp>
-      <p:sp>
-        <p:nvSpPr>
-          <p:cNvPr id="13" name="Text 11"/>
-          <p:cNvSpPr/>
-          <p:nvPr/>
-        </p:nvSpPr>
-        <p:spPr>
-          <a:xfrm>
-            <a:off x="6400800" y="2167128"/>
-            <a:ext cx="4526280" cy="310896"/>
-          </a:xfrm>
-          <a:prstGeom prst="roundRect">
-            <a:avLst/>
-          </a:prstGeom>
-          <a:solidFill>
-            <a:srgbClr val="FFF7ED"/>
-          </a:solidFill>
-          <a:ln w="12700">
-            <a:solidFill>
-              <a:srgbClr val="FDBA74"/>
-            </a:solidFill>
-          </a:ln>
-        </p:spPr>
-        <p:txBody>
-          <a:bodyPr wrap="square" lIns="1016" tIns="1016" rIns="1016" bIns="1016" rtlCol="0" anchor="ctr">
-            <a:normAutofit/>
-          </a:bodyPr>
-          <a:lstStyle/>
-          <a:p>
-            <a:pPr algn="l" indent="0" marL="0">
-              <a:buNone/>
-            </a:pPr>
-            <a:r>
-              <a:rPr lang="en-US" sz="1050" dirty="0">
-                <a:solidFill>
-                  <a:srgbClr val="0B1020"/>
-                </a:solidFill>
-              </a:rPr>
-              <a:t>Make AgentCore Gateway/AVP the canonical path</a:t>
-            </a:r>
-            <a:endParaRPr lang="en-US" sz="1050" dirty="0"/>
-          </a:p>
-        </p:txBody>
-      </p:sp>
-      <p:sp>
-        <p:nvSpPr>
-          <p:cNvPr id="14" name="Text 12"/>
-          <p:cNvSpPr/>
-          <p:nvPr/>
-        </p:nvSpPr>
-        <p:spPr>
-          <a:xfrm>
-            <a:off x="6400800" y="2642616"/>
-            <a:ext cx="4526280" cy="310896"/>
-          </a:xfrm>
-          <a:prstGeom prst="roundRect">
-            <a:avLst/>
-          </a:prstGeom>
-          <a:solidFill>
-            <a:srgbClr val="FFF7ED"/>
-          </a:solidFill>
-          <a:ln w="12700">
-            <a:solidFill>
-              <a:srgbClr val="FDBA74"/>
-            </a:solidFill>
-          </a:ln>
-        </p:spPr>
-        <p:txBody>
-          <a:bodyPr wrap="square" lIns="1016" tIns="1016" rIns="1016" bIns="1016" rtlCol="0" anchor="ctr">
-            <a:normAutofit/>
-          </a:bodyPr>
-          <a:lstStyle/>
-          <a:p>
-            <a:pPr algn="l" indent="0" marL="0">
-              <a:buNone/>
-            </a:pPr>
-            <a:r>
-              <a:rPr lang="en-US" sz="1050" dirty="0">
-                <a:solidFill>
-                  <a:srgbClr val="0B1020"/>
-                </a:solidFill>
-              </a:rPr>
-              <a:t>Compile agent policy → Cedar + MCP schema</a:t>
-            </a:r>
-            <a:endParaRPr lang="en-US" sz="1050" dirty="0"/>
-          </a:p>
-        </p:txBody>
-      </p:sp>
-      <p:sp>
-        <p:nvSpPr>
-          <p:cNvPr id="15" name="Text 13"/>
-          <p:cNvSpPr/>
-          <p:nvPr/>
-        </p:nvSpPr>
-        <p:spPr>
-          <a:xfrm>
-            <a:off x="6400800" y="3118104"/>
-            <a:ext cx="4526280" cy="310896"/>
-          </a:xfrm>
-          <a:prstGeom prst="roundRect">
-            <a:avLst/>
-          </a:prstGeom>
-          <a:solidFill>
-            <a:srgbClr val="FFF7ED"/>
-          </a:solidFill>
-          <a:ln w="12700">
-            <a:solidFill>
-              <a:srgbClr val="FDBA74"/>
-            </a:solidFill>
-          </a:ln>
-        </p:spPr>
-        <p:txBody>
-          <a:bodyPr wrap="square" lIns="1016" tIns="1016" rIns="1016" bIns="1016" rtlCol="0" anchor="ctr">
-            <a:normAutofit/>
-          </a:bodyPr>
-          <a:lstStyle/>
-          <a:p>
-            <a:pPr algn="l" indent="0" marL="0">
-              <a:buNone/>
-            </a:pPr>
-            <a:r>
-              <a:rPr lang="en-US" sz="1050" dirty="0">
-                <a:solidFill>
-                  <a:srgbClr val="0B1020"/>
-                </a:solidFill>
-              </a:rPr>
-              <a:t>Add live connector SDK + acceptance tests</a:t>
-            </a:r>
-            <a:endParaRPr lang="en-US" sz="1050" dirty="0"/>
-          </a:p>
-        </p:txBody>
-      </p:sp>
-      <p:sp>
-        <p:nvSpPr>
-          <p:cNvPr id="16" name="Text 14"/>
-          <p:cNvSpPr/>
-          <p:nvPr/>
-        </p:nvSpPr>
-        <p:spPr>
-          <a:xfrm>
-            <a:off x="6400800" y="3593592"/>
-            <a:ext cx="4526280" cy="310896"/>
-          </a:xfrm>
-          <a:prstGeom prst="roundRect">
-            <a:avLst/>
-          </a:prstGeom>
-          <a:solidFill>
-            <a:srgbClr val="FFF7ED"/>
-          </a:solidFill>
-          <a:ln w="12700">
-            <a:solidFill>
-              <a:srgbClr val="FDBA74"/>
-            </a:solidFill>
-          </a:ln>
-        </p:spPr>
-        <p:txBody>
-          <a:bodyPr wrap="square" lIns="1016" tIns="1016" rIns="1016" bIns="1016" rtlCol="0" anchor="ctr">
-            <a:normAutofit/>
-          </a:bodyPr>
-          <a:lstStyle/>
-          <a:p>
-            <a:pPr algn="l" indent="0" marL="0">
-              <a:buNone/>
-            </a:pPr>
-            <a:r>
-              <a:rPr lang="en-US" sz="1050" dirty="0">
-                <a:solidFill>
-                  <a:srgbClr val="0B1020"/>
-                </a:solidFill>
-              </a:rPr>
-              <a:t>Add FinOps/token budget service</a:t>
-            </a:r>
-            <a:endParaRPr lang="en-US" sz="1050" dirty="0"/>
-          </a:p>
-        </p:txBody>
-      </p:sp>
-      <p:sp>
-        <p:nvSpPr>
-          <p:cNvPr id="17" name="Text 15"/>
-          <p:cNvSpPr/>
-          <p:nvPr/>
-        </p:nvSpPr>
-        <p:spPr>
-          <a:xfrm>
-            <a:off x="6400800" y="4069080"/>
-            <a:ext cx="4526280" cy="310896"/>
-          </a:xfrm>
-          <a:prstGeom prst="roundRect">
-            <a:avLst/>
-          </a:prstGeom>
-          <a:solidFill>
-            <a:srgbClr val="FFF7ED"/>
-          </a:solidFill>
-          <a:ln w="12700">
-            <a:solidFill>
-              <a:srgbClr val="FDBA74"/>
-            </a:solidFill>
-          </a:ln>
-        </p:spPr>
-        <p:txBody>
-          <a:bodyPr wrap="square" lIns="1016" tIns="1016" rIns="1016" bIns="1016" rtlCol="0" anchor="ctr">
-            <a:normAutofit/>
-          </a:bodyPr>
-          <a:lstStyle/>
-          <a:p>
-            <a:pPr algn="l" indent="0" marL="0">
-              <a:buNone/>
-            </a:pPr>
-            <a:r>
-              <a:rPr lang="en-US" sz="1050" dirty="0">
-                <a:solidFill>
-                  <a:srgbClr val="0B1020"/>
-                </a:solidFill>
-              </a:rPr>
-              <a:t>Add evidence/ATO package generator</a:t>
-            </a:r>
-            <a:endParaRPr lang="en-US" sz="1050" dirty="0"/>
-          </a:p>
-        </p:txBody>
-      </p:sp>
-      <p:sp>
-        <p:nvSpPr>
-          <p:cNvPr id="18" name="Shape 16"/>
-          <p:cNvSpPr/>
-          <p:nvPr/>
-        </p:nvSpPr>
-        <p:spPr>
-          <a:xfrm>
-            <a:off x="5532120" y="3154680"/>
-            <a:ext cx="731520" cy="0"/>
-          </a:xfrm>
-          <a:prstGeom prst="line">
-            <a:avLst/>
-          </a:prstGeom>
-          <a:noFill/>
-          <a:ln w="17780">
-            <a:solidFill>
-              <a:srgbClr val="64748B"/>
-            </a:solidFill>
-            <a:prstDash val="solid"/>
-            <a:headEnd type="none"/>
-            <a:tailEnd type="triangle"/>
-          </a:ln>
-        </p:spPr>
-      </p:sp>
-      <p:sp>
-        <p:nvSpPr>
-          <p:cNvPr id="19" name="Text 17"/>
-          <p:cNvSpPr/>
-          <p:nvPr/>
-        </p:nvSpPr>
-        <p:spPr>
-          <a:xfrm>
-            <a:off x="960120" y="5257800"/>
-            <a:ext cx="2926080" cy="182880"/>
-          </a:xfrm>
-          <a:prstGeom prst="rect">
-            <a:avLst/>
-          </a:prstGeom>
-          <a:noFill/>
-          <a:ln/>
-        </p:spPr>
-        <p:txBody>
-          <a:bodyPr wrap="square" lIns="0" tIns="0" rIns="0" bIns="0" rtlCol="0" anchor="ctr"/>
-          <a:lstStyle/>
-          <a:p>
-            <a:pPr indent="0" marL="0">
-              <a:buNone/>
-            </a:pPr>
-            <a:r>
-              <a:rPr lang="en-US" sz="1400" b="1" dirty="0">
-                <a:solidFill>
-                  <a:srgbClr val="0B1020"/>
-                </a:solidFill>
-              </a:rPr>
-              <a:t>Recommended repo split</a:t>
-            </a:r>
-            <a:endParaRPr lang="en-US" sz="1400" dirty="0"/>
-          </a:p>
-        </p:txBody>
-      </p:sp>
-      <p:sp>
-        <p:nvSpPr>
-          <p:cNvPr id="20" name="Text 18"/>
-          <p:cNvSpPr/>
-          <p:nvPr/>
-        </p:nvSpPr>
-        <p:spPr>
-          <a:xfrm>
-            <a:off x="960120" y="5596128"/>
-            <a:ext cx="10424160" cy="228600"/>
-          </a:xfrm>
-          <a:prstGeom prst="rect">
-            <a:avLst/>
-          </a:prstGeom>
-          <a:noFill/>
-          <a:ln/>
-        </p:spPr>
-        <p:txBody>
-          <a:bodyPr wrap="square" lIns="0" tIns="0" rIns="0" bIns="0" rtlCol="0" anchor="ctr"/>
-          <a:lstStyle/>
-          <a:p>
-            <a:pPr indent="0" marL="0">
-              <a:buNone/>
-            </a:pPr>
-            <a:r>
-              <a:rPr lang="en-US" sz="1350" dirty="0">
-                <a:solidFill>
-                  <a:srgbClr val="334155"/>
-                </a:solidFill>
-              </a:rPr>
-              <a:t>ai-governance-platform/ = core substrate  |  slg-ai-agents/ hcls-ai-agents/ edu-ai-agents/ = add-on agent catalogs</a:t>
-            </a:r>
-            <a:endParaRPr lang="en-US" sz="1350" dirty="0"/>
-          </a:p>
-        </p:txBody>
-      </p:sp>
-      <p:sp>
-        <p:nvSpPr>
-          <p:cNvPr id="21" name="Text 19"/>
-          <p:cNvSpPr/>
-          <p:nvPr/>
-        </p:nvSpPr>
-        <p:spPr>
-          <a:xfrm>
-            <a:off x="502920" y="6537960"/>
-            <a:ext cx="7772400" cy="146304"/>
-          </a:xfrm>
-          <a:prstGeom prst="rect">
-            <a:avLst/>
-          </a:prstGeom>
-          <a:noFill/>
-          <a:ln/>
-        </p:spPr>
-        <p:txBody>
-          <a:bodyPr wrap="square" lIns="0" tIns="0" rIns="0" bIns="0" rtlCol="0" anchor="ctr"/>
-          <a:lstStyle/>
-          <a:p>
-            <a:pPr indent="0" marL="0">
-              <a:buNone/>
-            </a:pPr>
-            <a:r>
-              <a:rPr lang="en-US" sz="650" dirty="0">
-                <a:solidFill>
-                  <a:srgbClr val="64748B"/>
-                </a:solidFill>
-              </a:rPr>
-              <a:t>Sources in speaker notes</a:t>
-            </a:r>
-            <a:endParaRPr lang="en-US" sz="650" dirty="0"/>
-          </a:p>
-        </p:txBody>
-      </p:sp>
-      <p:sp>
-        <p:nvSpPr>
-          <p:cNvPr id="22" name="Text 20"/>
           <p:cNvSpPr/>
           <p:nvPr/>
         </p:nvSpPr>
@@ -5236,7 +4196,7 @@
             <a:r>
               <a:rPr lang="en-US" sz="2500" b="1" dirty="0">
                 <a:solidFill>
-                  <a:srgbClr val="0B1020"/>
+                  <a:srgbClr val="232F3E"/>
                 </a:solidFill>
                 <a:latin typeface="Aptos Display" pitchFamily="34" charset="0"/>
                 <a:ea typeface="Aptos Display" pitchFamily="34" charset="-122"/>
@@ -5361,7 +4321,7 @@
             <a:r>
               <a:rPr lang="en-US" sz="1250" b="1" dirty="0">
                 <a:solidFill>
-                  <a:srgbClr val="0B1020"/>
+                  <a:srgbClr val="232F3E"/>
                 </a:solidFill>
               </a:rPr>
               <a:t>Foundation</a:t>
@@ -5521,7 +4481,7 @@
             <a:r>
               <a:rPr lang="en-US" sz="1250" b="1" dirty="0">
                 <a:solidFill>
-                  <a:srgbClr val="0B1020"/>
+                  <a:srgbClr val="232F3E"/>
                 </a:solidFill>
               </a:rPr>
               <a:t>Core runtime</a:t>
@@ -5583,11 +4543,11 @@
             <a:avLst/>
           </a:prstGeom>
           <a:solidFill>
-            <a:srgbClr val="2563EB"/>
+            <a:srgbClr val="FF9900"/>
           </a:solidFill>
           <a:ln w="12700">
             <a:solidFill>
-              <a:srgbClr val="2563EB"/>
+              <a:srgbClr val="FF9900"/>
             </a:solidFill>
             <a:prstDash val="solid"/>
           </a:ln>
@@ -5681,7 +4641,7 @@
             <a:r>
               <a:rPr lang="en-US" sz="1250" b="1" dirty="0">
                 <a:solidFill>
-                  <a:srgbClr val="0B1020"/>
+                  <a:srgbClr val="232F3E"/>
                 </a:solidFill>
               </a:rPr>
               <a:t>Evidence</a:t>
@@ -5743,11 +4703,11 @@
             <a:avLst/>
           </a:prstGeom>
           <a:solidFill>
-            <a:srgbClr val="2563EB"/>
+            <a:srgbClr val="FF9900"/>
           </a:solidFill>
           <a:ln w="12700">
             <a:solidFill>
-              <a:srgbClr val="2563EB"/>
+              <a:srgbClr val="FF9900"/>
             </a:solidFill>
             <a:prstDash val="solid"/>
           </a:ln>
@@ -5841,7 +4801,7 @@
             <a:r>
               <a:rPr lang="en-US" sz="1250" b="1" dirty="0">
                 <a:solidFill>
-                  <a:srgbClr val="0B1020"/>
+                  <a:srgbClr val="232F3E"/>
                 </a:solidFill>
               </a:rPr>
               <a:t>FinOps</a:t>
@@ -5903,11 +4863,11 @@
             <a:avLst/>
           </a:prstGeom>
           <a:solidFill>
-            <a:srgbClr val="2563EB"/>
+            <a:srgbClr val="FF9900"/>
           </a:solidFill>
           <a:ln w="12700">
             <a:solidFill>
-              <a:srgbClr val="2563EB"/>
+              <a:srgbClr val="FF9900"/>
             </a:solidFill>
             <a:prstDash val="solid"/>
           </a:ln>
@@ -6001,7 +4961,7 @@
             <a:r>
               <a:rPr lang="en-US" sz="1250" b="1" dirty="0">
                 <a:solidFill>
-                  <a:srgbClr val="0B1020"/>
+                  <a:srgbClr val="232F3E"/>
                 </a:solidFill>
               </a:rPr>
               <a:t>Pilot agent</a:t>
@@ -6063,11 +5023,11 @@
             <a:avLst/>
           </a:prstGeom>
           <a:solidFill>
-            <a:srgbClr val="2563EB"/>
+            <a:srgbClr val="FF9900"/>
           </a:solidFill>
           <a:ln w="12700">
             <a:solidFill>
-              <a:srgbClr val="2563EB"/>
+              <a:srgbClr val="FF9900"/>
             </a:solidFill>
             <a:prstDash val="solid"/>
           </a:ln>
@@ -6136,7 +5096,7 @@
             <a:r>
               <a:rPr lang="en-US" sz="1250" b="1" dirty="0">
                 <a:solidFill>
-                  <a:srgbClr val="0B1020"/>
+                  <a:srgbClr val="232F3E"/>
                 </a:solidFill>
               </a:rPr>
               <a:t>Scale</a:t>
@@ -6218,7 +5178,7 @@
             <a:r>
               <a:rPr lang="en-US" sz="1300" b="1" dirty="0">
                 <a:solidFill>
-                  <a:srgbClr val="0B1020"/>
+                  <a:srgbClr val="232F3E"/>
                 </a:solidFill>
               </a:rPr>
               <a:t>First customer: choose one low-blast-radius, measurable workflow</a:t>
@@ -6232,7 +5192,7 @@
             <a:r>
               <a:rPr lang="en-US" sz="1300" b="1" dirty="0">
                 <a:solidFill>
-                  <a:srgbClr val="0B1020"/>
+                  <a:srgbClr val="232F3E"/>
                 </a:solidFill>
               </a:rPr>
               <a:t>For SLG: resident services / 311 or IT service desk. For healthcare: revenue-cycle appeal drafting. For EDU: service desk or student-form intake.</a:t>
@@ -6436,7 +5396,7 @@
             <a:r>
               <a:rPr lang="en-US" sz="2500" b="1" dirty="0">
                 <a:solidFill>
-                  <a:srgbClr val="0B1020"/>
+                  <a:srgbClr val="232F3E"/>
                 </a:solidFill>
                 <a:latin typeface="Aptos Display" pitchFamily="34" charset="0"/>
                 <a:ea typeface="Aptos Display" pitchFamily="34" charset="-122"/>
@@ -6527,7 +5487,7 @@
             <a:r>
               <a:rPr lang="en-US" sz="1050" dirty="0">
                 <a:solidFill>
-                  <a:srgbClr val="0B1020"/>
+                  <a:srgbClr val="232F3E"/>
                 </a:solidFill>
               </a:rPr>
               <a:t>AI pilots, data classes, systems, authority boundaries, backlog, budget owner</a:t>
@@ -6576,11 +5536,11 @@
             <a:avLst/>
           </a:prstGeom>
           <a:solidFill>
-            <a:srgbClr val="0B1020"/>
+            <a:srgbClr val="232F3E"/>
           </a:solidFill>
           <a:ln w="12700">
             <a:solidFill>
-              <a:srgbClr val="0B1020"/>
+              <a:srgbClr val="232F3E"/>
             </a:solidFill>
           </a:ln>
         </p:spPr>
@@ -6640,7 +5600,7 @@
             <a:r>
               <a:rPr lang="en-US" sz="1050" dirty="0">
                 <a:solidFill>
-                  <a:srgbClr val="0B1020"/>
+                  <a:srgbClr val="232F3E"/>
                 </a:solidFill>
               </a:rPr>
               <a:t>one workflow in customer AWS account with synthetic + one live connector</a:t>
@@ -6689,11 +5649,11 @@
             <a:avLst/>
           </a:prstGeom>
           <a:solidFill>
-            <a:srgbClr val="0B1020"/>
+            <a:srgbClr val="232F3E"/>
           </a:solidFill>
           <a:ln w="12700">
             <a:solidFill>
-              <a:srgbClr val="0B1020"/>
+              <a:srgbClr val="232F3E"/>
             </a:solidFill>
           </a:ln>
         </p:spPr>
@@ -6753,7 +5713,7 @@
             <a:r>
               <a:rPr lang="en-US" sz="1050" dirty="0">
                 <a:solidFill>
-                  <a:srgbClr val="0B1020"/>
+                  <a:srgbClr val="232F3E"/>
                 </a:solidFill>
               </a:rPr>
               <a:t>cycle-time, cost, quality, audit evidence, CISO review, accessibility</a:t>
@@ -6802,11 +5762,11 @@
             <a:avLst/>
           </a:prstGeom>
           <a:solidFill>
-            <a:srgbClr val="0B1020"/>
+            <a:srgbClr val="232F3E"/>
           </a:solidFill>
           <a:ln w="12700">
             <a:solidFill>
-              <a:srgbClr val="0B1020"/>
+              <a:srgbClr val="232F3E"/>
             </a:solidFill>
           </a:ln>
         </p:spPr>
@@ -6866,7 +5826,7 @@
             <a:r>
               <a:rPr lang="en-US" sz="1050" dirty="0">
                 <a:solidFill>
-                  <a:srgbClr val="0B1020"/>
+                  <a:srgbClr val="232F3E"/>
                 </a:solidFill>
               </a:rPr>
               <a:t>new agents inherit registry, policy, audit, chargeback, and onboarding standard</a:t>
@@ -6890,11 +5850,11 @@
             <a:avLst/>
           </a:prstGeom>
           <a:solidFill>
-            <a:srgbClr val="0B1020"/>
+            <a:srgbClr val="232F3E"/>
           </a:solidFill>
           <a:ln>
             <a:solidFill>
-              <a:srgbClr val="0B1020"/>
+              <a:srgbClr val="232F3E"/>
             </a:solidFill>
           </a:ln>
         </p:spPr>
@@ -6960,7 +5920,7 @@
             <a:r>
               <a:rPr lang="en-US" sz="1230" b="1" dirty="0">
                 <a:solidFill>
-                  <a:srgbClr val="0B1020"/>
+                  <a:srgbClr val="232F3E"/>
                 </a:solidFill>
               </a:rPr>
               <a:t>Sales asset package: exec deck · CISO briefing · architecture deep-dive · control matrix · ROI/TCO worksheet · SOW template · deployment runbook · acceptance test.</a:t>
@@ -7164,7 +6124,7 @@
             <a:r>
               <a:rPr lang="en-US" sz="2500" b="1" dirty="0">
                 <a:solidFill>
-                  <a:srgbClr val="0B1020"/>
+                  <a:srgbClr val="232F3E"/>
                 </a:solidFill>
                 <a:latin typeface="Aptos Display" pitchFamily="34" charset="0"/>
                 <a:ea typeface="Aptos Display" pitchFamily="34" charset="-122"/>
@@ -7255,7 +6215,7 @@
             <a:r>
               <a:rPr lang="en-US" sz="1020" dirty="0">
                 <a:solidFill>
-                  <a:srgbClr val="0B1020"/>
+                  <a:srgbClr val="232F3E"/>
                 </a:solidFill>
               </a:rPr>
               <a:t>Bedrock AgentCore Runtime, Gateway, Identity, Observability</a:t>
@@ -7343,7 +6303,7 @@
             <a:r>
               <a:rPr lang="en-US" sz="1020" dirty="0">
                 <a:solidFill>
-                  <a:srgbClr val="0B1020"/>
+                  <a:srgbClr val="232F3E"/>
                 </a:solidFill>
               </a:rPr>
               <a:t>Amazon Bedrock, Guardrails, Knowledge Bases, PrivateLink</a:t>
@@ -7431,7 +6391,7 @@
             <a:r>
               <a:rPr lang="en-US" sz="1020" dirty="0">
                 <a:solidFill>
-                  <a:srgbClr val="0B1020"/>
+                  <a:srgbClr val="232F3E"/>
                 </a:solidFill>
               </a:rPr>
               <a:t>Verified Permissions, IAM Identity Center, Organizations, Control Tower</a:t>
@@ -7519,7 +6479,7 @@
             <a:r>
               <a:rPr lang="en-US" sz="1020" dirty="0">
                 <a:solidFill>
-                  <a:srgbClr val="0B1020"/>
+                  <a:srgbClr val="232F3E"/>
                 </a:solidFill>
               </a:rPr>
               <a:t>CloudTrail, Security Lake, DynamoDB, S3 Object Lock, KMS</a:t>
@@ -7607,7 +6567,7 @@
             <a:r>
               <a:rPr lang="en-US" sz="1020" dirty="0">
                 <a:solidFill>
-                  <a:srgbClr val="0B1020"/>
+                  <a:srgbClr val="232F3E"/>
                 </a:solidFill>
               </a:rPr>
               <a:t>CloudWatch, X-Ray, Service Quotas, CUR, Budgets, QuickSight</a:t>
@@ -7695,7 +6655,7 @@
             <a:r>
               <a:rPr lang="en-US" sz="1020" dirty="0">
                 <a:solidFill>
-                  <a:srgbClr val="0B1020"/>
+                  <a:srgbClr val="232F3E"/>
                 </a:solidFill>
               </a:rPr>
               <a:t>GovCloud, FedRAMP High / DoD IL authorizations, GovRAMP recognition</a:t>
@@ -7731,7 +6691,7 @@
             <a:r>
               <a:rPr lang="en-US" sz="1400" b="1" dirty="0">
                 <a:solidFill>
-                  <a:srgbClr val="0B1020"/>
+                  <a:srgbClr val="232F3E"/>
                 </a:solidFill>
               </a:rPr>
               <a:t>AWS field narrative: “This standardizes how customers deploy agents safely on AWS, turns governance into reusable infrastructure, and creates a repeatable land-and-expand motion for Bedrock and AgentCore.”</a:t>
@@ -7779,849 +6739,6 @@
       <p:sp>
         <p:nvSpPr>
           <p:cNvPr id="19" name="Text 17"/>
-          <p:cNvSpPr/>
-          <p:nvPr/>
-        </p:nvSpPr>
-        <p:spPr>
-          <a:xfrm>
-            <a:off x="9418320" y="6537960"/>
-            <a:ext cx="2240280" cy="146304"/>
-          </a:xfrm>
-          <a:prstGeom prst="rect">
-            <a:avLst/>
-          </a:prstGeom>
-          <a:noFill/>
-          <a:ln/>
-        </p:spPr>
-        <p:txBody>
-          <a:bodyPr wrap="square" lIns="0" tIns="0" rIns="0" bIns="0" rtlCol="0" anchor="ctr"/>
-          <a:lstStyle/>
-          <a:p>
-            <a:pPr algn="r" indent="0" marL="0">
-              <a:buNone/>
-            </a:pPr>
-            <a:r>
-              <a:rPr lang="en-US" sz="650" dirty="0">
-                <a:solidFill>
-                  <a:srgbClr val="64748B"/>
-                </a:solidFill>
-              </a:rPr>
-              <a:t>AWS AI Governance Platform concept</a:t>
-            </a:r>
-            <a:endParaRPr lang="en-US" sz="650" dirty="0"/>
-          </a:p>
-        </p:txBody>
-      </p:sp>
-    </p:spTree>
-  </p:cSld>
-  <p:clrMapOvr>
-    <a:masterClrMapping/>
-  </p:clrMapOvr>
-</p:sld>
-</file>
-
-<file path=ppt/slides/slide16.xml><?xml version="1.0" encoding="utf-8"?>
-<p:sld xmlns:a="http://schemas.openxmlformats.org/drawingml/2006/main" xmlns:r="http://schemas.openxmlformats.org/officeDocument/2006/relationships" xmlns:p="http://schemas.openxmlformats.org/presentationml/2006/main">
-  <p:cSld name="Slide 16">
-    <p:bg>
-      <p:bgPr>
-        <a:solidFill>
-          <a:srgbClr val="F8FAFC"/>
-        </a:solidFill>
-      </p:bgPr>
-    </p:bg>
-    <p:spTree>
-      <p:nvGrpSpPr>
-        <p:cNvPr id="1" name=""/>
-        <p:cNvGrpSpPr/>
-        <p:nvPr/>
-      </p:nvGrpSpPr>
-      <p:grpSpPr>
-        <a:xfrm>
-          <a:off x="0" y="0"/>
-          <a:ext cx="0" cy="0"/>
-          <a:chOff x="0" y="0"/>
-          <a:chExt cx="0" cy="0"/>
-        </a:xfrm>
-      </p:grpSpPr>
-      <p:sp>
-        <p:nvSpPr>
-          <p:cNvPr id="2" name="Shape 0"/>
-          <p:cNvSpPr/>
-          <p:nvPr/>
-        </p:nvSpPr>
-        <p:spPr>
-          <a:xfrm>
-            <a:off x="0" y="0"/>
-            <a:ext cx="12191695" cy="146304"/>
-          </a:xfrm>
-          <a:prstGeom prst="rect">
-            <a:avLst/>
-          </a:prstGeom>
-          <a:solidFill>
-            <a:srgbClr val="FF9900"/>
-          </a:solidFill>
-          <a:ln w="12700">
-            <a:solidFill>
-              <a:srgbClr val="FF9900"/>
-            </a:solidFill>
-            <a:prstDash val="solid"/>
-          </a:ln>
-        </p:spPr>
-      </p:sp>
-      <p:sp>
-        <p:nvSpPr>
-          <p:cNvPr id="3" name="Text 1"/>
-          <p:cNvSpPr/>
-          <p:nvPr/>
-        </p:nvSpPr>
-        <p:spPr>
-          <a:xfrm>
-            <a:off x="502920" y="256032"/>
-            <a:ext cx="10515600" cy="201168"/>
-          </a:xfrm>
-          <a:prstGeom prst="rect">
-            <a:avLst/>
-          </a:prstGeom>
-          <a:noFill/>
-          <a:ln/>
-        </p:spPr>
-        <p:txBody>
-          <a:bodyPr wrap="square" rtlCol="0" anchor="ctr"/>
-          <a:lstStyle/>
-          <a:p>
-            <a:pPr indent="0" marL="0">
-              <a:buNone/>
-            </a:pPr>
-            <a:r>
-              <a:rPr lang="en-US" sz="850" b="1" dirty="0">
-                <a:solidFill>
-                  <a:srgbClr val="64748B"/>
-                </a:solidFill>
-                <a:latin typeface="Aptos" pitchFamily="34" charset="0"/>
-                <a:ea typeface="Aptos" pitchFamily="34" charset="-122"/>
-                <a:cs typeface="Aptos" pitchFamily="34" charset="-120"/>
-              </a:rPr>
-              <a:t>NEXT ACTION</a:t>
-            </a:r>
-            <a:endParaRPr lang="en-US" sz="850" dirty="0"/>
-          </a:p>
-        </p:txBody>
-      </p:sp>
-      <p:sp>
-        <p:nvSpPr>
-          <p:cNvPr id="4" name="Text 2"/>
-          <p:cNvSpPr/>
-          <p:nvPr/>
-        </p:nvSpPr>
-        <p:spPr>
-          <a:xfrm>
-            <a:off x="502920" y="512064"/>
-            <a:ext cx="11064240" cy="438912"/>
-          </a:xfrm>
-          <a:prstGeom prst="rect">
-            <a:avLst/>
-          </a:prstGeom>
-          <a:noFill/>
-          <a:ln/>
-        </p:spPr>
-        <p:txBody>
-          <a:bodyPr wrap="square" lIns="0" tIns="0" rIns="0" bIns="0" rtlCol="0" anchor="ctr"/>
-          <a:lstStyle/>
-          <a:p>
-            <a:pPr indent="0" marL="0">
-              <a:buNone/>
-            </a:pPr>
-            <a:r>
-              <a:rPr lang="en-US" sz="2500" b="1" dirty="0">
-                <a:solidFill>
-                  <a:srgbClr val="0B1020"/>
-                </a:solidFill>
-                <a:latin typeface="Aptos Display" pitchFamily="34" charset="0"/>
-                <a:ea typeface="Aptos Display" pitchFamily="34" charset="-122"/>
-                <a:cs typeface="Aptos Display" pitchFamily="34" charset="-120"/>
-              </a:rPr>
-              <a:t>Claude Code build brief: create the standalone platform repo</a:t>
-            </a:r>
-            <a:endParaRPr lang="en-US" sz="2500" dirty="0"/>
-          </a:p>
-        </p:txBody>
-      </p:sp>
-      <p:sp>
-        <p:nvSpPr>
-          <p:cNvPr id="5" name="Text 3"/>
-          <p:cNvSpPr/>
-          <p:nvPr/>
-        </p:nvSpPr>
-        <p:spPr>
-          <a:xfrm>
-            <a:off x="822960" y="1234440"/>
-            <a:ext cx="914400" cy="201168"/>
-          </a:xfrm>
-          <a:prstGeom prst="rect">
-            <a:avLst/>
-          </a:prstGeom>
-          <a:noFill/>
-          <a:ln/>
-        </p:spPr>
-        <p:txBody>
-          <a:bodyPr wrap="square" lIns="0" tIns="0" rIns="0" bIns="0" rtlCol="0" anchor="ctr"/>
-          <a:lstStyle/>
-          <a:p>
-            <a:pPr indent="0" marL="0">
-              <a:buNone/>
-            </a:pPr>
-            <a:r>
-              <a:rPr lang="en-US" sz="1200" b="1" dirty="0">
-                <a:solidFill>
-                  <a:srgbClr val="64748B"/>
-                </a:solidFill>
-              </a:rPr>
-              <a:t>Repo name</a:t>
-            </a:r>
-            <a:endParaRPr lang="en-US" sz="1200" dirty="0"/>
-          </a:p>
-        </p:txBody>
-      </p:sp>
-      <p:sp>
-        <p:nvSpPr>
-          <p:cNvPr id="6" name="Text 4"/>
-          <p:cNvSpPr/>
-          <p:nvPr/>
-        </p:nvSpPr>
-        <p:spPr>
-          <a:xfrm>
-            <a:off x="2194560" y="1234440"/>
-            <a:ext cx="4754880" cy="228600"/>
-          </a:xfrm>
-          <a:prstGeom prst="rect">
-            <a:avLst/>
-          </a:prstGeom>
-          <a:noFill/>
-          <a:ln/>
-        </p:spPr>
-        <p:txBody>
-          <a:bodyPr wrap="square" lIns="0" tIns="0" rIns="0" bIns="0" rtlCol="0" anchor="ctr"/>
-          <a:lstStyle/>
-          <a:p>
-            <a:pPr indent="0" marL="0">
-              <a:buNone/>
-            </a:pPr>
-            <a:r>
-              <a:rPr lang="en-US" sz="1800" b="1" dirty="0">
-                <a:solidFill>
-                  <a:srgbClr val="0B1020"/>
-                </a:solidFill>
-              </a:rPr>
-              <a:t>aws-ai-governance-platform</a:t>
-            </a:r>
-            <a:endParaRPr lang="en-US" sz="1800" dirty="0"/>
-          </a:p>
-        </p:txBody>
-      </p:sp>
-      <p:sp>
-        <p:nvSpPr>
-          <p:cNvPr id="7" name="Text 5"/>
-          <p:cNvSpPr/>
-          <p:nvPr/>
-        </p:nvSpPr>
-        <p:spPr>
-          <a:xfrm>
-            <a:off x="868680" y="1828800"/>
-            <a:ext cx="2057400" cy="347472"/>
-          </a:xfrm>
-          <a:prstGeom prst="roundRect">
-            <a:avLst/>
-          </a:prstGeom>
-          <a:solidFill>
-            <a:srgbClr val="0B1020"/>
-          </a:solidFill>
-          <a:ln w="12700">
-            <a:solidFill>
-              <a:srgbClr val="0B1020"/>
-            </a:solidFill>
-          </a:ln>
-        </p:spPr>
-        <p:txBody>
-          <a:bodyPr wrap="square" lIns="1016" tIns="1016" rIns="1016" bIns="1016" rtlCol="0" anchor="ctr">
-            <a:normAutofit/>
-          </a:bodyPr>
-          <a:lstStyle/>
-          <a:p>
-            <a:pPr algn="l" indent="0" marL="0">
-              <a:buNone/>
-            </a:pPr>
-            <a:r>
-              <a:rPr lang="en-US" sz="1020" b="1" dirty="0">
-                <a:solidFill>
-                  <a:srgbClr val="FFFFFF"/>
-                </a:solidFill>
-              </a:rPr>
-              <a:t>Core contracts</a:t>
-            </a:r>
-            <a:endParaRPr lang="en-US" sz="1020" dirty="0"/>
-          </a:p>
-        </p:txBody>
-      </p:sp>
-      <p:sp>
-        <p:nvSpPr>
-          <p:cNvPr id="8" name="Text 6"/>
-          <p:cNvSpPr/>
-          <p:nvPr/>
-        </p:nvSpPr>
-        <p:spPr>
-          <a:xfrm>
-            <a:off x="3108960" y="1828800"/>
-            <a:ext cx="8001000" cy="347472"/>
-          </a:xfrm>
-          <a:prstGeom prst="roundRect">
-            <a:avLst/>
-          </a:prstGeom>
-          <a:solidFill>
-            <a:srgbClr val="FFFFFF"/>
-          </a:solidFill>
-          <a:ln w="12700">
-            <a:solidFill>
-              <a:srgbClr val="CBD5E1"/>
-            </a:solidFill>
-          </a:ln>
-        </p:spPr>
-        <p:txBody>
-          <a:bodyPr wrap="square" lIns="1016" tIns="1016" rIns="1016" bIns="1016" rtlCol="0" anchor="ctr">
-            <a:normAutofit/>
-          </a:bodyPr>
-          <a:lstStyle/>
-          <a:p>
-            <a:pPr algn="l" indent="0" marL="0">
-              <a:buNone/>
-            </a:pPr>
-            <a:r>
-              <a:rPr lang="en-US" sz="980" dirty="0">
-                <a:solidFill>
-                  <a:srgbClr val="0B1020"/>
-                </a:solidFill>
-              </a:rPr>
-              <a:t>agent.yaml · tool.yaml · model_profile.yaml · data_class.yaml · control_mapping.yaml</a:t>
-            </a:r>
-            <a:endParaRPr lang="en-US" sz="980" dirty="0"/>
-          </a:p>
-        </p:txBody>
-      </p:sp>
-      <p:sp>
-        <p:nvSpPr>
-          <p:cNvPr id="9" name="Text 7"/>
-          <p:cNvSpPr/>
-          <p:nvPr/>
-        </p:nvSpPr>
-        <p:spPr>
-          <a:xfrm>
-            <a:off x="868680" y="2395728"/>
-            <a:ext cx="2057400" cy="347472"/>
-          </a:xfrm>
-          <a:prstGeom prst="roundRect">
-            <a:avLst/>
-          </a:prstGeom>
-          <a:solidFill>
-            <a:srgbClr val="0B1020"/>
-          </a:solidFill>
-          <a:ln w="12700">
-            <a:solidFill>
-              <a:srgbClr val="0B1020"/>
-            </a:solidFill>
-          </a:ln>
-        </p:spPr>
-        <p:txBody>
-          <a:bodyPr wrap="square" lIns="1016" tIns="1016" rIns="1016" bIns="1016" rtlCol="0" anchor="ctr">
-            <a:normAutofit/>
-          </a:bodyPr>
-          <a:lstStyle/>
-          <a:p>
-            <a:pPr algn="l" indent="0" marL="0">
-              <a:buNone/>
-            </a:pPr>
-            <a:r>
-              <a:rPr lang="en-US" sz="1020" b="1" dirty="0">
-                <a:solidFill>
-                  <a:srgbClr val="FFFFFF"/>
-                </a:solidFill>
-              </a:rPr>
-              <a:t>Governance runtime</a:t>
-            </a:r>
-            <a:endParaRPr lang="en-US" sz="1020" dirty="0"/>
-          </a:p>
-        </p:txBody>
-      </p:sp>
-      <p:sp>
-        <p:nvSpPr>
-          <p:cNvPr id="10" name="Text 8"/>
-          <p:cNvSpPr/>
-          <p:nvPr/>
-        </p:nvSpPr>
-        <p:spPr>
-          <a:xfrm>
-            <a:off x="3108960" y="2395728"/>
-            <a:ext cx="8001000" cy="347472"/>
-          </a:xfrm>
-          <a:prstGeom prst="roundRect">
-            <a:avLst/>
-          </a:prstGeom>
-          <a:solidFill>
-            <a:srgbClr val="FFFFFF"/>
-          </a:solidFill>
-          <a:ln w="12700">
-            <a:solidFill>
-              <a:srgbClr val="CBD5E1"/>
-            </a:solidFill>
-          </a:ln>
-        </p:spPr>
-        <p:txBody>
-          <a:bodyPr wrap="square" lIns="1016" tIns="1016" rIns="1016" bIns="1016" rtlCol="0" anchor="ctr">
-            <a:normAutofit/>
-          </a:bodyPr>
-          <a:lstStyle/>
-          <a:p>
-            <a:pPr algn="l" indent="0" marL="0">
-              <a:buNone/>
-            </a:pPr>
-            <a:r>
-              <a:rPr lang="en-US" sz="980" dirty="0">
-                <a:solidFill>
-                  <a:srgbClr val="0B1020"/>
-                </a:solidFill>
-              </a:rPr>
-              <a:t>Agent Registry · Tool Registry · AVP/Cedar compiler · approval service · evidence ledger</a:t>
-            </a:r>
-            <a:endParaRPr lang="en-US" sz="980" dirty="0"/>
-          </a:p>
-        </p:txBody>
-      </p:sp>
-      <p:sp>
-        <p:nvSpPr>
-          <p:cNvPr id="11" name="Text 9"/>
-          <p:cNvSpPr/>
-          <p:nvPr/>
-        </p:nvSpPr>
-        <p:spPr>
-          <a:xfrm>
-            <a:off x="868680" y="2962656"/>
-            <a:ext cx="2057400" cy="347472"/>
-          </a:xfrm>
-          <a:prstGeom prst="roundRect">
-            <a:avLst/>
-          </a:prstGeom>
-          <a:solidFill>
-            <a:srgbClr val="0B1020"/>
-          </a:solidFill>
-          <a:ln w="12700">
-            <a:solidFill>
-              <a:srgbClr val="0B1020"/>
-            </a:solidFill>
-          </a:ln>
-        </p:spPr>
-        <p:txBody>
-          <a:bodyPr wrap="square" lIns="1016" tIns="1016" rIns="1016" bIns="1016" rtlCol="0" anchor="ctr">
-            <a:normAutofit/>
-          </a:bodyPr>
-          <a:lstStyle/>
-          <a:p>
-            <a:pPr algn="l" indent="0" marL="0">
-              <a:buNone/>
-            </a:pPr>
-            <a:r>
-              <a:rPr lang="en-US" sz="1020" b="1" dirty="0">
-                <a:solidFill>
-                  <a:srgbClr val="FFFFFF"/>
-                </a:solidFill>
-              </a:rPr>
-              <a:t>AWS IaC</a:t>
-            </a:r>
-            <a:endParaRPr lang="en-US" sz="1020" dirty="0"/>
-          </a:p>
-        </p:txBody>
-      </p:sp>
-      <p:sp>
-        <p:nvSpPr>
-          <p:cNvPr id="12" name="Text 10"/>
-          <p:cNvSpPr/>
-          <p:nvPr/>
-        </p:nvSpPr>
-        <p:spPr>
-          <a:xfrm>
-            <a:off x="3108960" y="2962656"/>
-            <a:ext cx="8001000" cy="347472"/>
-          </a:xfrm>
-          <a:prstGeom prst="roundRect">
-            <a:avLst/>
-          </a:prstGeom>
-          <a:solidFill>
-            <a:srgbClr val="FFFFFF"/>
-          </a:solidFill>
-          <a:ln w="12700">
-            <a:solidFill>
-              <a:srgbClr val="CBD5E1"/>
-            </a:solidFill>
-          </a:ln>
-        </p:spPr>
-        <p:txBody>
-          <a:bodyPr wrap="square" lIns="1016" tIns="1016" rIns="1016" bIns="1016" rtlCol="0" anchor="ctr">
-            <a:normAutofit/>
-          </a:bodyPr>
-          <a:lstStyle/>
-          <a:p>
-            <a:pPr algn="l" indent="0" marL="0">
-              <a:buNone/>
-            </a:pPr>
-            <a:r>
-              <a:rPr lang="en-US" sz="980" dirty="0">
-                <a:solidFill>
-                  <a:srgbClr val="0B1020"/>
-                </a:solidFill>
-              </a:rPr>
-              <a:t>Control Tower module · VPC endpoint mode · AgentCore Gateway · Bedrock logging · S3 Object Lock</a:t>
-            </a:r>
-            <a:endParaRPr lang="en-US" sz="980" dirty="0"/>
-          </a:p>
-        </p:txBody>
-      </p:sp>
-      <p:sp>
-        <p:nvSpPr>
-          <p:cNvPr id="13" name="Text 11"/>
-          <p:cNvSpPr/>
-          <p:nvPr/>
-        </p:nvSpPr>
-        <p:spPr>
-          <a:xfrm>
-            <a:off x="868680" y="3529584"/>
-            <a:ext cx="2057400" cy="347472"/>
-          </a:xfrm>
-          <a:prstGeom prst="roundRect">
-            <a:avLst/>
-          </a:prstGeom>
-          <a:solidFill>
-            <a:srgbClr val="0B1020"/>
-          </a:solidFill>
-          <a:ln w="12700">
-            <a:solidFill>
-              <a:srgbClr val="0B1020"/>
-            </a:solidFill>
-          </a:ln>
-        </p:spPr>
-        <p:txBody>
-          <a:bodyPr wrap="square" lIns="1016" tIns="1016" rIns="1016" bIns="1016" rtlCol="0" anchor="ctr">
-            <a:normAutofit/>
-          </a:bodyPr>
-          <a:lstStyle/>
-          <a:p>
-            <a:pPr algn="l" indent="0" marL="0">
-              <a:buNone/>
-            </a:pPr>
-            <a:r>
-              <a:rPr lang="en-US" sz="1020" b="1" dirty="0">
-                <a:solidFill>
-                  <a:srgbClr val="FFFFFF"/>
-                </a:solidFill>
-              </a:rPr>
-              <a:t>CI gates</a:t>
-            </a:r>
-            <a:endParaRPr lang="en-US" sz="1020" dirty="0"/>
-          </a:p>
-        </p:txBody>
-      </p:sp>
-      <p:sp>
-        <p:nvSpPr>
-          <p:cNvPr id="14" name="Text 12"/>
-          <p:cNvSpPr/>
-          <p:nvPr/>
-        </p:nvSpPr>
-        <p:spPr>
-          <a:xfrm>
-            <a:off x="3108960" y="3529584"/>
-            <a:ext cx="8001000" cy="347472"/>
-          </a:xfrm>
-          <a:prstGeom prst="roundRect">
-            <a:avLst/>
-          </a:prstGeom>
-          <a:solidFill>
-            <a:srgbClr val="FFFFFF"/>
-          </a:solidFill>
-          <a:ln w="12700">
-            <a:solidFill>
-              <a:srgbClr val="CBD5E1"/>
-            </a:solidFill>
-          </a:ln>
-        </p:spPr>
-        <p:txBody>
-          <a:bodyPr wrap="square" lIns="1016" tIns="1016" rIns="1016" bIns="1016" rtlCol="0" anchor="ctr">
-            <a:normAutofit/>
-          </a:bodyPr>
-          <a:lstStyle/>
-          <a:p>
-            <a:pPr algn="l" indent="0" marL="0">
-              <a:buNone/>
-            </a:pPr>
-            <a:r>
-              <a:rPr lang="en-US" sz="980" dirty="0">
-                <a:solidFill>
-                  <a:srgbClr val="0B1020"/>
-                </a:solidFill>
-              </a:rPr>
-              <a:t>unit · integration · policy simulation · hallucination evals · secrets/SBOM/IaC scan · clean-account deploy</a:t>
-            </a:r>
-            <a:endParaRPr lang="en-US" sz="980" dirty="0"/>
-          </a:p>
-        </p:txBody>
-      </p:sp>
-      <p:sp>
-        <p:nvSpPr>
-          <p:cNvPr id="15" name="Text 13"/>
-          <p:cNvSpPr/>
-          <p:nvPr/>
-        </p:nvSpPr>
-        <p:spPr>
-          <a:xfrm>
-            <a:off x="868680" y="4096512"/>
-            <a:ext cx="2057400" cy="347472"/>
-          </a:xfrm>
-          <a:prstGeom prst="roundRect">
-            <a:avLst/>
-          </a:prstGeom>
-          <a:solidFill>
-            <a:srgbClr val="0B1020"/>
-          </a:solidFill>
-          <a:ln w="12700">
-            <a:solidFill>
-              <a:srgbClr val="0B1020"/>
-            </a:solidFill>
-          </a:ln>
-        </p:spPr>
-        <p:txBody>
-          <a:bodyPr wrap="square" lIns="1016" tIns="1016" rIns="1016" bIns="1016" rtlCol="0" anchor="ctr">
-            <a:normAutofit/>
-          </a:bodyPr>
-          <a:lstStyle/>
-          <a:p>
-            <a:pPr algn="l" indent="0" marL="0">
-              <a:buNone/>
-            </a:pPr>
-            <a:r>
-              <a:rPr lang="en-US" sz="1020" b="1" dirty="0">
-                <a:solidFill>
-                  <a:srgbClr val="FFFFFF"/>
-                </a:solidFill>
-              </a:rPr>
-              <a:t>Industry packs</a:t>
-            </a:r>
-            <a:endParaRPr lang="en-US" sz="1020" dirty="0"/>
-          </a:p>
-        </p:txBody>
-      </p:sp>
-      <p:sp>
-        <p:nvSpPr>
-          <p:cNvPr id="16" name="Text 14"/>
-          <p:cNvSpPr/>
-          <p:nvPr/>
-        </p:nvSpPr>
-        <p:spPr>
-          <a:xfrm>
-            <a:off x="3108960" y="4096512"/>
-            <a:ext cx="8001000" cy="347472"/>
-          </a:xfrm>
-          <a:prstGeom prst="roundRect">
-            <a:avLst/>
-          </a:prstGeom>
-          <a:solidFill>
-            <a:srgbClr val="FFFFFF"/>
-          </a:solidFill>
-          <a:ln w="12700">
-            <a:solidFill>
-              <a:srgbClr val="CBD5E1"/>
-            </a:solidFill>
-          </a:ln>
-        </p:spPr>
-        <p:txBody>
-          <a:bodyPr wrap="square" lIns="1016" tIns="1016" rIns="1016" bIns="1016" rtlCol="0" anchor="ctr">
-            <a:normAutofit/>
-          </a:bodyPr>
-          <a:lstStyle/>
-          <a:p>
-            <a:pPr algn="l" indent="0" marL="0">
-              <a:buNone/>
-            </a:pPr>
-            <a:r>
-              <a:rPr lang="en-US" sz="980" dirty="0">
-                <a:solidFill>
-                  <a:srgbClr val="0B1020"/>
-                </a:solidFill>
-              </a:rPr>
-              <a:t>SLG · HCLS · EDU · enterprise control overlays and data-class defaults</a:t>
-            </a:r>
-            <a:endParaRPr lang="en-US" sz="980" dirty="0"/>
-          </a:p>
-        </p:txBody>
-      </p:sp>
-      <p:sp>
-        <p:nvSpPr>
-          <p:cNvPr id="17" name="Text 15"/>
-          <p:cNvSpPr/>
-          <p:nvPr/>
-        </p:nvSpPr>
-        <p:spPr>
-          <a:xfrm>
-            <a:off x="868680" y="4663440"/>
-            <a:ext cx="2057400" cy="347472"/>
-          </a:xfrm>
-          <a:prstGeom prst="roundRect">
-            <a:avLst/>
-          </a:prstGeom>
-          <a:solidFill>
-            <a:srgbClr val="0B1020"/>
-          </a:solidFill>
-          <a:ln w="12700">
-            <a:solidFill>
-              <a:srgbClr val="0B1020"/>
-            </a:solidFill>
-          </a:ln>
-        </p:spPr>
-        <p:txBody>
-          <a:bodyPr wrap="square" lIns="1016" tIns="1016" rIns="1016" bIns="1016" rtlCol="0" anchor="ctr">
-            <a:normAutofit/>
-          </a:bodyPr>
-          <a:lstStyle/>
-          <a:p>
-            <a:pPr algn="l" indent="0" marL="0">
-              <a:buNone/>
-            </a:pPr>
-            <a:r>
-              <a:rPr lang="en-US" sz="1020" b="1" dirty="0">
-                <a:solidFill>
-                  <a:srgbClr val="FFFFFF"/>
-                </a:solidFill>
-              </a:rPr>
-              <a:t>Agent catalogs</a:t>
-            </a:r>
-            <a:endParaRPr lang="en-US" sz="1020" dirty="0"/>
-          </a:p>
-        </p:txBody>
-      </p:sp>
-      <p:sp>
-        <p:nvSpPr>
-          <p:cNvPr id="18" name="Text 16"/>
-          <p:cNvSpPr/>
-          <p:nvPr/>
-        </p:nvSpPr>
-        <p:spPr>
-          <a:xfrm>
-            <a:off x="3108960" y="4663440"/>
-            <a:ext cx="8001000" cy="347472"/>
-          </a:xfrm>
-          <a:prstGeom prst="roundRect">
-            <a:avLst/>
-          </a:prstGeom>
-          <a:solidFill>
-            <a:srgbClr val="FFFFFF"/>
-          </a:solidFill>
-          <a:ln w="12700">
-            <a:solidFill>
-              <a:srgbClr val="CBD5E1"/>
-            </a:solidFill>
-          </a:ln>
-        </p:spPr>
-        <p:txBody>
-          <a:bodyPr wrap="square" lIns="1016" tIns="1016" rIns="1016" bIns="1016" rtlCol="0" anchor="ctr">
-            <a:normAutofit/>
-          </a:bodyPr>
-          <a:lstStyle/>
-          <a:p>
-            <a:pPr algn="l" indent="0" marL="0">
-              <a:buNone/>
-            </a:pPr>
-            <a:r>
-              <a:rPr lang="en-US" sz="980" dirty="0">
-                <a:solidFill>
-                  <a:srgbClr val="0B1020"/>
-                </a:solidFill>
-              </a:rPr>
-              <a:t>SLG/HCLS/EDU agents become add-ons that must pass onboarding tests</a:t>
-            </a:r>
-            <a:endParaRPr lang="en-US" sz="980" dirty="0"/>
-          </a:p>
-        </p:txBody>
-      </p:sp>
-      <p:sp>
-        <p:nvSpPr>
-          <p:cNvPr id="19" name="Text 17"/>
-          <p:cNvSpPr/>
-          <p:nvPr/>
-        </p:nvSpPr>
-        <p:spPr>
-          <a:xfrm>
-            <a:off x="914400" y="5806440"/>
-            <a:ext cx="10332720" cy="310896"/>
-          </a:xfrm>
-          <a:prstGeom prst="rect">
-            <a:avLst/>
-          </a:prstGeom>
-          <a:noFill/>
-          <a:ln/>
-        </p:spPr>
-        <p:txBody>
-          <a:bodyPr wrap="square" lIns="0" tIns="0" rIns="0" bIns="0" rtlCol="0" anchor="ctr"/>
-          <a:lstStyle/>
-          <a:p>
-            <a:pPr algn="ctr" indent="0" marL="0">
-              <a:buNone/>
-            </a:pPr>
-            <a:r>
-              <a:rPr lang="en-US" sz="1330" b="1" dirty="0">
-                <a:solidFill>
-                  <a:srgbClr val="0B1020"/>
-                </a:solidFill>
-              </a:rPr>
-              <a:t>Acceptance bar: the platform cannot call itself deployable until a clean account test proves identity, policy denial, approval, model call, tool call, masking, audit, WORM export, chargeback, and teardown.</a:t>
-            </a:r>
-            <a:endParaRPr lang="en-US" sz="1330" dirty="0"/>
-          </a:p>
-        </p:txBody>
-      </p:sp>
-      <p:sp>
-        <p:nvSpPr>
-          <p:cNvPr id="20" name="Text 18"/>
-          <p:cNvSpPr/>
-          <p:nvPr/>
-        </p:nvSpPr>
-        <p:spPr>
-          <a:xfrm>
-            <a:off x="502920" y="6537960"/>
-            <a:ext cx="7772400" cy="146304"/>
-          </a:xfrm>
-          <a:prstGeom prst="rect">
-            <a:avLst/>
-          </a:prstGeom>
-          <a:noFill/>
-          <a:ln/>
-        </p:spPr>
-        <p:txBody>
-          <a:bodyPr wrap="square" lIns="0" tIns="0" rIns="0" bIns="0" rtlCol="0" anchor="ctr"/>
-          <a:lstStyle/>
-          <a:p>
-            <a:pPr indent="0" marL="0">
-              <a:buNone/>
-            </a:pPr>
-            <a:r>
-              <a:rPr lang="en-US" sz="650" dirty="0">
-                <a:solidFill>
-                  <a:srgbClr val="64748B"/>
-                </a:solidFill>
-              </a:rPr>
-              <a:t>Sources in speaker notes</a:t>
-            </a:r>
-            <a:endParaRPr lang="en-US" sz="650" dirty="0"/>
-          </a:p>
-        </p:txBody>
-      </p:sp>
-      <p:sp>
-        <p:nvSpPr>
-          <p:cNvPr id="21" name="Text 19"/>
           <p:cNvSpPr/>
           <p:nvPr/>
         </p:nvSpPr>
@@ -8778,7 +6895,7 @@
             <a:r>
               <a:rPr lang="en-US" sz="2500" b="1" dirty="0">
                 <a:solidFill>
-                  <a:srgbClr val="0B1020"/>
+                  <a:srgbClr val="232F3E"/>
                 </a:solidFill>
                 <a:latin typeface="Aptos Display" pitchFamily="34" charset="0"/>
                 <a:ea typeface="Aptos Display" pitchFamily="34" charset="-122"/>
@@ -8805,11 +6922,11 @@
             <a:avLst/>
           </a:prstGeom>
           <a:solidFill>
-            <a:srgbClr val="0B1020"/>
+            <a:srgbClr val="232F3E"/>
           </a:solidFill>
           <a:ln w="12700">
             <a:solidFill>
-              <a:srgbClr val="0B1020"/>
+              <a:srgbClr val="232F3E"/>
             </a:solidFill>
           </a:ln>
         </p:spPr>
@@ -8869,7 +6986,7 @@
             <a:r>
               <a:rPr lang="en-US" sz="1150" dirty="0">
                 <a:solidFill>
-                  <a:srgbClr val="0B1020"/>
+                  <a:srgbClr val="232F3E"/>
                 </a:solidFill>
               </a:rPr>
               <a:t>Pressure to move from pilots to measurable outcomes without creating dozens of disconnected AI projects.</a:t>
@@ -8893,11 +7010,11 @@
             <a:avLst/>
           </a:prstGeom>
           <a:solidFill>
-            <a:srgbClr val="0B1020"/>
+            <a:srgbClr val="232F3E"/>
           </a:solidFill>
           <a:ln w="12700">
             <a:solidFill>
-              <a:srgbClr val="0B1020"/>
+              <a:srgbClr val="232F3E"/>
             </a:solidFill>
           </a:ln>
         </p:spPr>
@@ -8957,7 +7074,7 @@
             <a:r>
               <a:rPr lang="en-US" sz="1150" dirty="0">
                 <a:solidFill>
-                  <a:srgbClr val="0B1020"/>
+                  <a:srgbClr val="232F3E"/>
                 </a:solidFill>
               </a:rPr>
               <a:t>Needs provable identity, authorization, audit, data isolation, retention, and incident evidence.</a:t>
@@ -8981,11 +7098,11 @@
             <a:avLst/>
           </a:prstGeom>
           <a:solidFill>
-            <a:srgbClr val="0B1020"/>
+            <a:srgbClr val="232F3E"/>
           </a:solidFill>
           <a:ln w="12700">
             <a:solidFill>
-              <a:srgbClr val="0B1020"/>
+              <a:srgbClr val="232F3E"/>
             </a:solidFill>
           </a:ln>
         </p:spPr>
@@ -9045,7 +7162,7 @@
             <a:r>
               <a:rPr lang="en-US" sz="1150" dirty="0">
                 <a:solidFill>
-                  <a:srgbClr val="0B1020"/>
+                  <a:srgbClr val="232F3E"/>
                 </a:solidFill>
               </a:rPr>
               <a:t>Needs one reusable pattern for agents, tools, models, data, approvals, and observability.</a:t>
@@ -9069,11 +7186,11 @@
             <a:avLst/>
           </a:prstGeom>
           <a:solidFill>
-            <a:srgbClr val="0B1020"/>
+            <a:srgbClr val="232F3E"/>
           </a:solidFill>
           <a:ln w="12700">
             <a:solidFill>
-              <a:srgbClr val="0B1020"/>
+              <a:srgbClr val="232F3E"/>
             </a:solidFill>
           </a:ln>
         </p:spPr>
@@ -9133,7 +7250,7 @@
             <a:r>
               <a:rPr lang="en-US" sz="1150" dirty="0">
                 <a:solidFill>
-                  <a:srgbClr val="0B1020"/>
+                  <a:srgbClr val="232F3E"/>
                 </a:solidFill>
               </a:rPr>
               <a:t>Need faster service delivery without letting AI make legally consequential decisions.</a:t>
@@ -9415,7 +7532,7 @@
             <a:r>
               <a:rPr lang="en-US" sz="2500" b="1" dirty="0">
                 <a:solidFill>
-                  <a:srgbClr val="0B1020"/>
+                  <a:srgbClr val="232F3E"/>
                 </a:solidFill>
                 <a:latin typeface="Aptos Display" pitchFamily="34" charset="0"/>
                 <a:ea typeface="Aptos Display" pitchFamily="34" charset="-122"/>
@@ -9523,7 +7640,7 @@
             <a:r>
               <a:rPr lang="en-US" sz="1100" dirty="0">
                 <a:solidFill>
-                  <a:srgbClr val="0B1020"/>
+                  <a:srgbClr val="232F3E"/>
                 </a:solidFill>
               </a:rPr>
               <a:t>Different identity model</a:t>
@@ -9567,7 +7684,7 @@
             <a:r>
               <a:rPr lang="en-US" sz="1100" dirty="0">
                 <a:solidFill>
-                  <a:srgbClr val="0B1020"/>
+                  <a:srgbClr val="232F3E"/>
                 </a:solidFill>
               </a:rPr>
               <a:t>Different tool connectors</a:t>
@@ -9611,7 +7728,7 @@
             <a:r>
               <a:rPr lang="en-US" sz="1100" dirty="0">
                 <a:solidFill>
-                  <a:srgbClr val="0B1020"/>
+                  <a:srgbClr val="232F3E"/>
                 </a:solidFill>
               </a:rPr>
               <a:t>Different audit trail</a:t>
@@ -9655,7 +7772,7 @@
             <a:r>
               <a:rPr lang="en-US" sz="1100" dirty="0">
                 <a:solidFill>
-                  <a:srgbClr val="0B1020"/>
+                  <a:srgbClr val="232F3E"/>
                 </a:solidFill>
               </a:rPr>
               <a:t>Different security review</a:t>
@@ -9699,7 +7816,7 @@
             <a:r>
               <a:rPr lang="en-US" sz="1100" dirty="0">
                 <a:solidFill>
-                  <a:srgbClr val="0B1020"/>
+                  <a:srgbClr val="232F3E"/>
                 </a:solidFill>
               </a:rPr>
               <a:t>Different cost model</a:t>
@@ -9723,11 +7840,11 @@
             <a:avLst/>
           </a:prstGeom>
           <a:solidFill>
-            <a:srgbClr val="0B1020"/>
+            <a:srgbClr val="232F3E"/>
           </a:solidFill>
           <a:ln w="12700">
             <a:solidFill>
-              <a:srgbClr val="0B1020"/>
+              <a:srgbClr val="232F3E"/>
             </a:solidFill>
             <a:prstDash val="solid"/>
           </a:ln>
@@ -9804,7 +7921,7 @@
             <a:r>
               <a:rPr lang="en-US" sz="1100" dirty="0">
                 <a:solidFill>
-                  <a:srgbClr val="0B1020"/>
+                  <a:srgbClr val="232F3E"/>
                 </a:solidFill>
               </a:rPr>
               <a:t>Common identity + consent</a:t>
@@ -9848,7 +7965,7 @@
             <a:r>
               <a:rPr lang="en-US" sz="1100" dirty="0">
                 <a:solidFill>
-                  <a:srgbClr val="0B1020"/>
+                  <a:srgbClr val="232F3E"/>
                 </a:solidFill>
               </a:rPr>
               <a:t>Central policy + tool gateway</a:t>
@@ -9892,7 +8009,7 @@
             <a:r>
               <a:rPr lang="en-US" sz="1100" dirty="0">
                 <a:solidFill>
-                  <a:srgbClr val="0B1020"/>
+                  <a:srgbClr val="232F3E"/>
                 </a:solidFill>
               </a:rPr>
               <a:t>Immutable evidence package</a:t>
@@ -9936,7 +8053,7 @@
             <a:r>
               <a:rPr lang="en-US" sz="1100" dirty="0">
                 <a:solidFill>
-                  <a:srgbClr val="0B1020"/>
+                  <a:srgbClr val="232F3E"/>
                 </a:solidFill>
               </a:rPr>
               <a:t>Inherited control baseline</a:t>
@@ -9980,7 +8097,7 @@
             <a:r>
               <a:rPr lang="en-US" sz="1100" dirty="0">
                 <a:solidFill>
-                  <a:srgbClr val="0B1020"/>
+                  <a:srgbClr val="232F3E"/>
                 </a:solidFill>
               </a:rPr>
               <a:t>Chargeback + token governance</a:t>
@@ -10041,7 +8158,7 @@
             <a:r>
               <a:rPr lang="en-US" sz="1800" b="1" dirty="0">
                 <a:solidFill>
-                  <a:srgbClr val="0B1020"/>
+                  <a:srgbClr val="232F3E"/>
                 </a:solidFill>
               </a:rPr>
               <a:t>Land one agent. Approve the substrate. Expand by configuration.</a:t>
@@ -10245,7 +8362,7 @@
             <a:r>
               <a:rPr lang="en-US" sz="2500" b="1" dirty="0">
                 <a:solidFill>
-                  <a:srgbClr val="0B1020"/>
+                  <a:srgbClr val="232F3E"/>
                 </a:solidFill>
                 <a:latin typeface="Aptos Display" pitchFamily="34" charset="0"/>
                 <a:ea typeface="Aptos Display" pitchFamily="34" charset="-122"/>
@@ -10311,7 +8428,7 @@
             <a:r>
               <a:rPr lang="en-US" sz="1300" b="1" dirty="0">
                 <a:solidFill>
-                  <a:srgbClr val="0B1020"/>
+                  <a:srgbClr val="232F3E"/>
                 </a:solidFill>
               </a:rPr>
               <a:t>AWS Organizations / Control Tower landing zone</a:t>
@@ -10355,7 +8472,7 @@
             <a:r>
               <a:rPr lang="en-US" sz="1050" dirty="0">
                 <a:solidFill>
-                  <a:srgbClr val="0B1020"/>
+                  <a:srgbClr val="232F3E"/>
                 </a:solidFill>
               </a:rPr>
               <a:t>Security</a:t>
@@ -10369,7 +8486,7 @@
             <a:r>
               <a:rPr lang="en-US" sz="1050" dirty="0">
                 <a:solidFill>
-                  <a:srgbClr val="0B1020"/>
+                  <a:srgbClr val="232F3E"/>
                 </a:solidFill>
               </a:rPr>
               <a:t>GuardDuty</a:t>
@@ -10383,7 +8500,7 @@
             <a:r>
               <a:rPr lang="en-US" sz="1050" dirty="0">
                 <a:solidFill>
-                  <a:srgbClr val="0B1020"/>
+                  <a:srgbClr val="232F3E"/>
                 </a:solidFill>
               </a:rPr>
               <a:t>Security Hub</a:t>
@@ -10397,7 +8514,7 @@
             <a:r>
               <a:rPr lang="en-US" sz="1050" dirty="0">
                 <a:solidFill>
-                  <a:srgbClr val="0B1020"/>
+                  <a:srgbClr val="232F3E"/>
                 </a:solidFill>
               </a:rPr>
               <a:t>Config</a:t>
@@ -10441,7 +8558,7 @@
             <a:r>
               <a:rPr lang="en-US" sz="1050" dirty="0">
                 <a:solidFill>
-                  <a:srgbClr val="0B1020"/>
+                  <a:srgbClr val="232F3E"/>
                 </a:solidFill>
               </a:rPr>
               <a:t>Log Archive</a:t>
@@ -10455,7 +8572,7 @@
             <a:r>
               <a:rPr lang="en-US" sz="1050" dirty="0">
                 <a:solidFill>
-                  <a:srgbClr val="0B1020"/>
+                  <a:srgbClr val="232F3E"/>
                 </a:solidFill>
               </a:rPr>
               <a:t>CloudTrail</a:t>
@@ -10469,7 +8586,7 @@
             <a:r>
               <a:rPr lang="en-US" sz="1050" dirty="0">
                 <a:solidFill>
-                  <a:srgbClr val="0B1020"/>
+                  <a:srgbClr val="232F3E"/>
                 </a:solidFill>
               </a:rPr>
               <a:t>Security Lake</a:t>
@@ -10483,7 +8600,7 @@
             <a:r>
               <a:rPr lang="en-US" sz="1050" dirty="0">
                 <a:solidFill>
-                  <a:srgbClr val="0B1020"/>
+                  <a:srgbClr val="232F3E"/>
                 </a:solidFill>
               </a:rPr>
               <a:t>S3 Object Lock</a:t>
@@ -10527,7 +8644,7 @@
             <a:r>
               <a:rPr lang="en-US" sz="1050" dirty="0">
                 <a:solidFill>
-                  <a:srgbClr val="0B1020"/>
+                  <a:srgbClr val="232F3E"/>
                 </a:solidFill>
               </a:rPr>
               <a:t>Network</a:t>
@@ -10541,7 +8658,7 @@
             <a:r>
               <a:rPr lang="en-US" sz="1050" dirty="0">
                 <a:solidFill>
-                  <a:srgbClr val="0B1020"/>
+                  <a:srgbClr val="232F3E"/>
                 </a:solidFill>
               </a:rPr>
               <a:t>Transit Gateway</a:t>
@@ -10555,7 +8672,7 @@
             <a:r>
               <a:rPr lang="en-US" sz="1050" dirty="0">
                 <a:solidFill>
-                  <a:srgbClr val="0B1020"/>
+                  <a:srgbClr val="232F3E"/>
                 </a:solidFill>
               </a:rPr>
               <a:t>VPC endpoints</a:t>
@@ -10569,7 +8686,7 @@
             <a:r>
               <a:rPr lang="en-US" sz="1050" dirty="0">
                 <a:solidFill>
-                  <a:srgbClr val="0B1020"/>
+                  <a:srgbClr val="232F3E"/>
                 </a:solidFill>
               </a:rPr>
               <a:t>DNS / egress</a:t>
@@ -10613,7 +8730,7 @@
             <a:r>
               <a:rPr lang="en-US" sz="1050" b="1" dirty="0">
                 <a:solidFill>
-                  <a:srgbClr val="0B1020"/>
+                  <a:srgbClr val="232F3E"/>
                 </a:solidFill>
               </a:rPr>
               <a:t>AI Governance</a:t>
@@ -10627,7 +8744,7 @@
             <a:r>
               <a:rPr lang="en-US" sz="1050" b="1" dirty="0">
                 <a:solidFill>
-                  <a:srgbClr val="0B1020"/>
+                  <a:srgbClr val="232F3E"/>
                 </a:solidFill>
               </a:rPr>
               <a:t>Registry</a:t>
@@ -10641,7 +8758,7 @@
             <a:r>
               <a:rPr lang="en-US" sz="1050" b="1" dirty="0">
                 <a:solidFill>
-                  <a:srgbClr val="0B1020"/>
+                  <a:srgbClr val="232F3E"/>
                 </a:solidFill>
               </a:rPr>
               <a:t>Policy</a:t>
@@ -10655,7 +8772,7 @@
             <a:r>
               <a:rPr lang="en-US" sz="1050" b="1" dirty="0">
                 <a:solidFill>
-                  <a:srgbClr val="0B1020"/>
+                  <a:srgbClr val="232F3E"/>
                 </a:solidFill>
               </a:rPr>
               <a:t>Evals</a:t>
@@ -10669,7 +8786,7 @@
             <a:r>
               <a:rPr lang="en-US" sz="1050" b="1" dirty="0">
                 <a:solidFill>
-                  <a:srgbClr val="0B1020"/>
+                  <a:srgbClr val="232F3E"/>
                 </a:solidFill>
               </a:rPr>
               <a:t>Chargeback</a:t>
@@ -10732,7 +8849,7 @@
             <a:r>
               <a:rPr lang="en-US" sz="1200" b="1" dirty="0">
                 <a:solidFill>
-                  <a:srgbClr val="0B1020"/>
+                  <a:srgbClr val="232F3E"/>
                 </a:solidFill>
               </a:rPr>
               <a:t>Public / Low-risk</a:t>
@@ -10798,7 +8915,7 @@
           </a:solidFill>
           <a:ln w="17780">
             <a:solidFill>
-              <a:srgbClr val="2563EB"/>
+              <a:srgbClr val="FF9900"/>
             </a:solidFill>
             <a:prstDash val="solid"/>
           </a:ln>
@@ -10831,7 +8948,7 @@
             <a:r>
               <a:rPr lang="en-US" sz="1200" b="1" dirty="0">
                 <a:solidFill>
-                  <a:srgbClr val="0B1020"/>
+                  <a:srgbClr val="232F3E"/>
                 </a:solidFill>
               </a:rPr>
               <a:t>PII / Enterprise</a:t>
@@ -10930,7 +9047,7 @@
             <a:r>
               <a:rPr lang="en-US" sz="1200" b="1" dirty="0">
                 <a:solidFill>
-                  <a:srgbClr val="0B1020"/>
+                  <a:srgbClr val="232F3E"/>
                 </a:solidFill>
               </a:rPr>
               <a:t>PHI / HIPAA</a:t>
@@ -11029,7 +9146,7 @@
             <a:r>
               <a:rPr lang="en-US" sz="1200" b="1" dirty="0">
                 <a:solidFill>
-                  <a:srgbClr val="0B1020"/>
+                  <a:srgbClr val="232F3E"/>
                 </a:solidFill>
               </a:rPr>
               <a:t>CJI / CJIS</a:t>
@@ -11128,7 +9245,7 @@
             <a:r>
               <a:rPr lang="en-US" sz="1200" b="1" dirty="0">
                 <a:solidFill>
-                  <a:srgbClr val="0B1020"/>
+                  <a:srgbClr val="232F3E"/>
                 </a:solidFill>
               </a:rPr>
               <a:t>FTI / IRS 1075</a:t>
@@ -11227,7 +9344,7 @@
             <a:r>
               <a:rPr lang="en-US" sz="1200" b="1" dirty="0">
                 <a:solidFill>
-                  <a:srgbClr val="0B1020"/>
+                  <a:srgbClr val="232F3E"/>
                 </a:solidFill>
               </a:rPr>
               <a:t>EDU / FERPA</a:t>
@@ -11299,7 +9416,7 @@
             <a:r>
               <a:rPr lang="en-US" sz="1450" b="1" dirty="0">
                 <a:solidFill>
-                  <a:srgbClr val="0B1020"/>
+                  <a:srgbClr val="232F3E"/>
                 </a:solidFill>
               </a:rPr>
               <a:t>Pattern: central governance plane; isolated runtime/data planes by regulatory boundary.</a:t>
@@ -11503,7 +9620,7 @@
             <a:r>
               <a:rPr lang="en-US" sz="2500" b="1" dirty="0">
                 <a:solidFill>
-                  <a:srgbClr val="0B1020"/>
+                  <a:srgbClr val="232F3E"/>
                 </a:solidFill>
                 <a:latin typeface="Aptos Display" pitchFamily="34" charset="0"/>
                 <a:ea typeface="Aptos Display" pitchFamily="34" charset="-122"/>
@@ -11550,7 +9667,7 @@
             <a:r>
               <a:rPr lang="en-US" sz="1020" b="1" dirty="0">
                 <a:solidFill>
-                  <a:srgbClr val="0B1020"/>
+                  <a:srgbClr val="232F3E"/>
                 </a:solidFill>
               </a:rPr>
               <a:t>User / app</a:t>
@@ -11564,7 +9681,7 @@
             <a:r>
               <a:rPr lang="en-US" sz="1020" b="1" dirty="0">
                 <a:solidFill>
-                  <a:srgbClr val="0B1020"/>
+                  <a:srgbClr val="232F3E"/>
                 </a:solidFill>
               </a:rPr>
               <a:t>Federated identity</a:t>
@@ -11578,7 +9695,7 @@
             <a:r>
               <a:rPr lang="en-US" sz="1020" b="1" dirty="0">
                 <a:solidFill>
-                  <a:srgbClr val="0B1020"/>
+                  <a:srgbClr val="232F3E"/>
                 </a:solidFill>
               </a:rPr>
               <a:t>role + purpose</a:t>
@@ -11647,7 +9764,7 @@
             <a:r>
               <a:rPr lang="en-US" sz="1020" b="1" dirty="0">
                 <a:solidFill>
-                  <a:srgbClr val="0B1020"/>
+                  <a:srgbClr val="232F3E"/>
                 </a:solidFill>
               </a:rPr>
               <a:t>Agent runtime</a:t>
@@ -11661,7 +9778,7 @@
             <a:r>
               <a:rPr lang="en-US" sz="1020" b="1" dirty="0">
                 <a:solidFill>
-                  <a:srgbClr val="0B1020"/>
+                  <a:srgbClr val="232F3E"/>
                 </a:solidFill>
               </a:rPr>
               <a:t>Step Functions /</a:t>
@@ -11675,7 +9792,7 @@
             <a:r>
               <a:rPr lang="en-US" sz="1020" b="1" dirty="0">
                 <a:solidFill>
-                  <a:srgbClr val="0B1020"/>
+                  <a:srgbClr val="232F3E"/>
                 </a:solidFill>
               </a:rPr>
               <a:t>AgentCore Runtime</a:t>
@@ -11744,7 +9861,7 @@
             <a:r>
               <a:rPr lang="en-US" sz="1020" b="1" dirty="0">
                 <a:solidFill>
-                  <a:srgbClr val="0B1020"/>
+                  <a:srgbClr val="232F3E"/>
                 </a:solidFill>
               </a:rPr>
               <a:t>Policy decision</a:t>
@@ -11758,7 +9875,7 @@
             <a:r>
               <a:rPr lang="en-US" sz="1020" b="1" dirty="0">
                 <a:solidFill>
-                  <a:srgbClr val="0B1020"/>
+                  <a:srgbClr val="232F3E"/>
                 </a:solidFill>
               </a:rPr>
               <a:t>Verified Permissions</a:t>
@@ -11772,7 +9889,7 @@
             <a:r>
               <a:rPr lang="en-US" sz="1020" b="1" dirty="0">
                 <a:solidFill>
-                  <a:srgbClr val="0B1020"/>
+                  <a:srgbClr val="232F3E"/>
                 </a:solidFill>
               </a:rPr>
               <a:t>Cedar + context</a:t>
@@ -11841,7 +9958,7 @@
             <a:r>
               <a:rPr lang="en-US" sz="1020" b="1" dirty="0">
                 <a:solidFill>
-                  <a:srgbClr val="0B1020"/>
+                  <a:srgbClr val="232F3E"/>
                 </a:solidFill>
               </a:rPr>
               <a:t>Model gateway</a:t>
@@ -11855,7 +9972,7 @@
             <a:r>
               <a:rPr lang="en-US" sz="1020" b="1" dirty="0">
                 <a:solidFill>
-                  <a:srgbClr val="0B1020"/>
+                  <a:srgbClr val="232F3E"/>
                 </a:solidFill>
               </a:rPr>
               <a:t>Bedrock + Guardrails</a:t>
@@ -11869,7 +9986,7 @@
             <a:r>
               <a:rPr lang="en-US" sz="1020" b="1" dirty="0">
                 <a:solidFill>
-                  <a:srgbClr val="0B1020"/>
+                  <a:srgbClr val="232F3E"/>
                 </a:solidFill>
               </a:rPr>
               <a:t>KB + prompt registry</a:t>
@@ -11938,7 +10055,7 @@
             <a:r>
               <a:rPr lang="en-US" sz="1020" b="1" dirty="0">
                 <a:solidFill>
-                  <a:srgbClr val="0B1020"/>
+                  <a:srgbClr val="232F3E"/>
                 </a:solidFill>
               </a:rPr>
               <a:t>Tool gateway</a:t>
@@ -11952,7 +10069,7 @@
             <a:r>
               <a:rPr lang="en-US" sz="1020" b="1" dirty="0">
                 <a:solidFill>
-                  <a:srgbClr val="0B1020"/>
+                  <a:srgbClr val="232F3E"/>
                 </a:solidFill>
               </a:rPr>
               <a:t>AgentCore Gateway</a:t>
@@ -11966,7 +10083,7 @@
             <a:r>
               <a:rPr lang="en-US" sz="1020" b="1" dirty="0">
                 <a:solidFill>
-                  <a:srgbClr val="0B1020"/>
+                  <a:srgbClr val="232F3E"/>
                 </a:solidFill>
               </a:rPr>
               <a:t>MCP targets</a:t>
@@ -12035,7 +10152,7 @@
             <a:r>
               <a:rPr lang="en-US" sz="1020" b="1" dirty="0">
                 <a:solidFill>
-                  <a:srgbClr val="0B1020"/>
+                  <a:srgbClr val="232F3E"/>
                 </a:solidFill>
               </a:rPr>
               <a:t>Systems</a:t>
@@ -12049,7 +10166,7 @@
             <a:r>
               <a:rPr lang="en-US" sz="1020" b="1" dirty="0">
                 <a:solidFill>
-                  <a:srgbClr val="0B1020"/>
+                  <a:srgbClr val="232F3E"/>
                 </a:solidFill>
               </a:rPr>
               <a:t>EHR / SIS / CRM</a:t>
@@ -12063,7 +10180,7 @@
             <a:r>
               <a:rPr lang="en-US" sz="1020" b="1" dirty="0">
                 <a:solidFill>
-                  <a:srgbClr val="0B1020"/>
+                  <a:srgbClr val="232F3E"/>
                 </a:solidFill>
               </a:rPr>
               <a:t>ERP / permits</a:t>
@@ -12087,11 +10204,11 @@
             <a:avLst/>
           </a:prstGeom>
           <a:solidFill>
-            <a:srgbClr val="0B1020"/>
+            <a:srgbClr val="232F3E"/>
           </a:solidFill>
           <a:ln>
             <a:solidFill>
-              <a:srgbClr val="0B1020"/>
+              <a:srgbClr val="232F3E"/>
             </a:solidFill>
           </a:ln>
         </p:spPr>
@@ -12141,7 +10258,7 @@
             <a:r>
               <a:rPr lang="en-US" sz="1800" b="1" dirty="0">
                 <a:solidFill>
-                  <a:srgbClr val="0B1020"/>
+                  <a:srgbClr val="232F3E"/>
                 </a:solidFill>
               </a:rPr>
               <a:t>Invariant: the agent can never exceed the authenticated user, declared purpose, data class, approved tools, token budget, or human authority boundary.</a:t>
@@ -12345,7 +10462,7 @@
             <a:r>
               <a:rPr lang="en-US" sz="2500" b="1" dirty="0">
                 <a:solidFill>
-                  <a:srgbClr val="0B1020"/>
+                  <a:srgbClr val="232F3E"/>
                 </a:solidFill>
                 <a:latin typeface="Aptos Display" pitchFamily="34" charset="0"/>
                 <a:ea typeface="Aptos Display" pitchFamily="34" charset="-122"/>
@@ -12372,11 +10489,11 @@
             <a:avLst/>
           </a:prstGeom>
           <a:solidFill>
-            <a:srgbClr val="0B1020"/>
+            <a:srgbClr val="232F3E"/>
           </a:solidFill>
           <a:ln w="12700">
             <a:solidFill>
-              <a:srgbClr val="0B1020"/>
+              <a:srgbClr val="232F3E"/>
             </a:solidFill>
           </a:ln>
         </p:spPr>
@@ -12436,7 +10553,7 @@
             <a:r>
               <a:rPr lang="en-US" sz="950" dirty="0">
                 <a:solidFill>
-                  <a:srgbClr val="0B1020"/>
+                  <a:srgbClr val="232F3E"/>
                 </a:solidFill>
               </a:rPr>
               <a:t>owner · purpose · risk tier · data class · model · evals · cost center</a:t>
@@ -12460,11 +10577,11 @@
             <a:avLst/>
           </a:prstGeom>
           <a:solidFill>
-            <a:srgbClr val="0B1020"/>
+            <a:srgbClr val="232F3E"/>
           </a:solidFill>
           <a:ln w="12700">
             <a:solidFill>
-              <a:srgbClr val="0B1020"/>
+              <a:srgbClr val="232F3E"/>
             </a:solidFill>
           </a:ln>
         </p:spPr>
@@ -12524,7 +10641,7 @@
             <a:r>
               <a:rPr lang="en-US" sz="950" dirty="0">
                 <a:solidFill>
-                  <a:srgbClr val="0B1020"/>
+                  <a:srgbClr val="232F3E"/>
                 </a:solidFill>
               </a:rPr>
               <a:t>MCP schema · system owner · CRUD · rollback · approval · idempotency</a:t>
@@ -12548,11 +10665,11 @@
             <a:avLst/>
           </a:prstGeom>
           <a:solidFill>
-            <a:srgbClr val="0B1020"/>
+            <a:srgbClr val="232F3E"/>
           </a:solidFill>
           <a:ln w="12700">
             <a:solidFill>
-              <a:srgbClr val="0B1020"/>
+              <a:srgbClr val="232F3E"/>
             </a:solidFill>
           </a:ln>
         </p:spPr>
@@ -12612,7 +10729,7 @@
             <a:r>
               <a:rPr lang="en-US" sz="950" dirty="0">
                 <a:solidFill>
-                  <a:srgbClr val="0B1020"/>
+                  <a:srgbClr val="232F3E"/>
                 </a:solidFill>
               </a:rPr>
               <a:t>user entitlement ∩ agent grant ∩ purpose ∩ consent ∩ residency</a:t>
@@ -12636,11 +10753,11 @@
             <a:avLst/>
           </a:prstGeom>
           <a:solidFill>
-            <a:srgbClr val="0B1020"/>
+            <a:srgbClr val="232F3E"/>
           </a:solidFill>
           <a:ln w="12700">
             <a:solidFill>
-              <a:srgbClr val="0B1020"/>
+              <a:srgbClr val="232F3E"/>
             </a:solidFill>
           </a:ln>
         </p:spPr>
@@ -12700,7 +10817,7 @@
             <a:r>
               <a:rPr lang="en-US" sz="950" dirty="0">
                 <a:solidFill>
-                  <a:srgbClr val="0B1020"/>
+                  <a:srgbClr val="232F3E"/>
                 </a:solidFill>
               </a:rPr>
               <a:t>HITL queue · e-signature · separation of duties · task-token workflow</a:t>
@@ -12724,11 +10841,11 @@
             <a:avLst/>
           </a:prstGeom>
           <a:solidFill>
-            <a:srgbClr val="0B1020"/>
+            <a:srgbClr val="232F3E"/>
           </a:solidFill>
           <a:ln w="12700">
             <a:solidFill>
-              <a:srgbClr val="0B1020"/>
+              <a:srgbClr val="232F3E"/>
             </a:solidFill>
           </a:ln>
         </p:spPr>
@@ -12788,7 +10905,7 @@
             <a:r>
               <a:rPr lang="en-US" sz="950" dirty="0">
                 <a:solidFill>
-                  <a:srgbClr val="0B1020"/>
+                  <a:srgbClr val="232F3E"/>
                 </a:solidFill>
               </a:rPr>
               <a:t>Bedrock routing · max_tokens · Guardrails · prompt pinning · fallbacks</a:t>
@@ -12812,11 +10929,11 @@
             <a:avLst/>
           </a:prstGeom>
           <a:solidFill>
-            <a:srgbClr val="0B1020"/>
+            <a:srgbClr val="232F3E"/>
           </a:solidFill>
           <a:ln w="12700">
             <a:solidFill>
-              <a:srgbClr val="0B1020"/>
+              <a:srgbClr val="232F3E"/>
             </a:solidFill>
           </a:ln>
         </p:spPr>
@@ -12876,7 +10993,7 @@
             <a:r>
               <a:rPr lang="en-US" sz="950" dirty="0">
                 <a:solidFill>
-                  <a:srgbClr val="0B1020"/>
+                  <a:srgbClr val="232F3E"/>
                 </a:solidFill>
               </a:rPr>
               <a:t>masked events · immutable audit · WORM export · control evidence</a:t>
@@ -12900,11 +11017,11 @@
             <a:avLst/>
           </a:prstGeom>
           <a:solidFill>
-            <a:srgbClr val="0B1020"/>
+            <a:srgbClr val="232F3E"/>
           </a:solidFill>
           <a:ln w="12700">
             <a:solidFill>
-              <a:srgbClr val="0B1020"/>
+              <a:srgbClr val="232F3E"/>
             </a:solidFill>
           </a:ln>
         </p:spPr>
@@ -12964,7 +11081,7 @@
             <a:r>
               <a:rPr lang="en-US" sz="950" dirty="0">
                 <a:solidFill>
-                  <a:srgbClr val="0B1020"/>
+                  <a:srgbClr val="232F3E"/>
                 </a:solidFill>
               </a:rPr>
               <a:t>PII/PHI/FTI/CJI masking · tokenization · retrieval security trimming</a:t>
@@ -12988,11 +11105,11 @@
             <a:avLst/>
           </a:prstGeom>
           <a:solidFill>
-            <a:srgbClr val="0B1020"/>
+            <a:srgbClr val="232F3E"/>
           </a:solidFill>
           <a:ln w="12700">
             <a:solidFill>
-              <a:srgbClr val="0B1020"/>
+              <a:srgbClr val="232F3E"/>
             </a:solidFill>
           </a:ln>
         </p:spPr>
@@ -13052,7 +11169,7 @@
             <a:r>
               <a:rPr lang="en-US" sz="950" dirty="0">
                 <a:solidFill>
-                  <a:srgbClr val="0B1020"/>
+                  <a:srgbClr val="232F3E"/>
                 </a:solidFill>
               </a:rPr>
               <a:t>token budgets · application inference profiles · chargeback dashboards</a:t>
@@ -13088,7 +11205,7 @@
             <a:r>
               <a:rPr lang="en-US" sz="1500" b="1" dirty="0">
                 <a:solidFill>
-                  <a:srgbClr val="0B1020"/>
+                  <a:srgbClr val="232F3E"/>
                 </a:solidFill>
               </a:rPr>
               <a:t>Build these once, then publish every agent as a policy-bounded package against the same contracts.</a:t>
@@ -13292,7 +11409,7 @@
             <a:r>
               <a:rPr lang="en-US" sz="2500" b="1" dirty="0">
                 <a:solidFill>
-                  <a:srgbClr val="0B1020"/>
+                  <a:srgbClr val="232F3E"/>
                 </a:solidFill>
                 <a:latin typeface="Aptos Display" pitchFamily="34" charset="0"/>
                 <a:ea typeface="Aptos Display" pitchFamily="34" charset="-122"/>
@@ -13319,11 +11436,11 @@
             <a:avLst/>
           </a:prstGeom>
           <a:solidFill>
-            <a:srgbClr val="2563EB"/>
+            <a:srgbClr val="FF9900"/>
           </a:solidFill>
           <a:ln w="12700">
             <a:solidFill>
-              <a:srgbClr val="2563EB"/>
+              <a:srgbClr val="FF9900"/>
             </a:solidFill>
             <a:prstDash val="solid"/>
           </a:ln>
@@ -13455,11 +11572,11 @@
             <a:avLst/>
           </a:prstGeom>
           <a:solidFill>
-            <a:srgbClr val="2563EB"/>
+            <a:srgbClr val="FF9900"/>
           </a:solidFill>
           <a:ln w="12700">
             <a:solidFill>
-              <a:srgbClr val="2563EB"/>
+              <a:srgbClr val="FF9900"/>
             </a:solidFill>
             <a:prstDash val="solid"/>
           </a:ln>
@@ -13591,11 +11708,11 @@
             <a:avLst/>
           </a:prstGeom>
           <a:solidFill>
-            <a:srgbClr val="2563EB"/>
+            <a:srgbClr val="FF9900"/>
           </a:solidFill>
           <a:ln w="12700">
             <a:solidFill>
-              <a:srgbClr val="2563EB"/>
+              <a:srgbClr val="FF9900"/>
             </a:solidFill>
             <a:prstDash val="solid"/>
           </a:ln>
@@ -13727,11 +11844,11 @@
             <a:avLst/>
           </a:prstGeom>
           <a:solidFill>
-            <a:srgbClr val="2563EB"/>
+            <a:srgbClr val="FF9900"/>
           </a:solidFill>
           <a:ln w="12700">
             <a:solidFill>
-              <a:srgbClr val="2563EB"/>
+              <a:srgbClr val="FF9900"/>
             </a:solidFill>
             <a:prstDash val="solid"/>
           </a:ln>
@@ -14122,7 +12239,7 @@
             <a:r>
               <a:rPr lang="en-US" sz="1700" b="1" dirty="0">
                 <a:solidFill>
-                  <a:srgbClr val="0B1020"/>
+                  <a:srgbClr val="232F3E"/>
                 </a:solidFill>
               </a:rPr>
               <a:t>Minimum package per agent</a:t>
@@ -14160,7 +12277,7 @@
             <a:r>
               <a:rPr lang="en-US" sz="1500" dirty="0">
                 <a:solidFill>
-                  <a:srgbClr val="0B1020"/>
+                  <a:srgbClr val="232F3E"/>
                 </a:solidFill>
               </a:rPr>
               <a:t>agent.yaml · policy.cedar · tools.mcp.json · prompts/ · evals/ · data_contracts/ · runbook.md · cost_model.yaml · threat_model.md · acceptance_tests/</a:t>
@@ -14221,7 +12338,7 @@
             <a:r>
               <a:rPr lang="en-US" sz="1420" b="1" dirty="0">
                 <a:solidFill>
-                  <a:srgbClr val="0B1020"/>
+                  <a:srgbClr val="232F3E"/>
                 </a:solidFill>
               </a:rPr>
               <a:t>Gate rule: no agent ships until it proves least privilege, grounding, masking, budget control, audit completeness, rollback/idempotency, and no unauthorized consequential action.</a:t>
@@ -14425,7 +12542,7 @@
             <a:r>
               <a:rPr lang="en-US" sz="2500" b="1" dirty="0">
                 <a:solidFill>
-                  <a:srgbClr val="0B1020"/>
+                  <a:srgbClr val="232F3E"/>
                 </a:solidFill>
                 <a:latin typeface="Aptos Display" pitchFamily="34" charset="0"/>
                 <a:ea typeface="Aptos Display" pitchFamily="34" charset="-122"/>
@@ -14488,11 +12605,11 @@
             <a:avLst/>
           </a:prstGeom>
           <a:solidFill>
-            <a:srgbClr val="0B1020"/>
+            <a:srgbClr val="232F3E"/>
           </a:solidFill>
           <a:ln w="12700">
             <a:solidFill>
-              <a:srgbClr val="0B1020"/>
+              <a:srgbClr val="232F3E"/>
             </a:solidFill>
           </a:ln>
         </p:spPr>
@@ -14552,7 +12669,7 @@
             <a:r>
               <a:rPr lang="en-US" sz="1100" dirty="0">
                 <a:solidFill>
-                  <a:srgbClr val="0B1020"/>
+                  <a:srgbClr val="232F3E"/>
                 </a:solidFill>
               </a:rPr>
               <a:t>authenticated user / workload identity / agency role</a:t>
@@ -14576,11 +12693,11 @@
             <a:avLst/>
           </a:prstGeom>
           <a:solidFill>
-            <a:srgbClr val="0B1020"/>
+            <a:srgbClr val="232F3E"/>
           </a:solidFill>
           <a:ln w="12700">
             <a:solidFill>
-              <a:srgbClr val="0B1020"/>
+              <a:srgbClr val="232F3E"/>
             </a:solidFill>
           </a:ln>
         </p:spPr>
@@ -14640,7 +12757,7 @@
             <a:r>
               <a:rPr lang="en-US" sz="1100" dirty="0">
                 <a:solidFill>
-                  <a:srgbClr val="0B1020"/>
+                  <a:srgbClr val="232F3E"/>
                 </a:solidFill>
               </a:rPr>
               <a:t>declared purpose, legal authority, consent, case context</a:t>
@@ -14664,11 +12781,11 @@
             <a:avLst/>
           </a:prstGeom>
           <a:solidFill>
-            <a:srgbClr val="0B1020"/>
+            <a:srgbClr val="232F3E"/>
           </a:solidFill>
           <a:ln w="12700">
             <a:solidFill>
-              <a:srgbClr val="0B1020"/>
+              <a:srgbClr val="232F3E"/>
             </a:solidFill>
           </a:ln>
         </p:spPr>
@@ -14728,7 +12845,7 @@
             <a:r>
               <a:rPr lang="en-US" sz="1100" dirty="0">
                 <a:solidFill>
-                  <a:srgbClr val="0B1020"/>
+                  <a:srgbClr val="232F3E"/>
                 </a:solidFill>
               </a:rPr>
               <a:t>agent grant, tool contract, data class, operation type</a:t>
@@ -14752,11 +12869,11 @@
             <a:avLst/>
           </a:prstGeom>
           <a:solidFill>
-            <a:srgbClr val="0B1020"/>
+            <a:srgbClr val="232F3E"/>
           </a:solidFill>
           <a:ln w="12700">
             <a:solidFill>
-              <a:srgbClr val="0B1020"/>
+              <a:srgbClr val="232F3E"/>
             </a:solidFill>
           </a:ln>
         </p:spPr>
@@ -14816,7 +12933,7 @@
             <a:r>
               <a:rPr lang="en-US" sz="1100" dirty="0">
                 <a:solidFill>
-                  <a:srgbClr val="0B1020"/>
+                  <a:srgbClr val="232F3E"/>
                 </a:solidFill>
               </a:rPr>
               <a:t>region, GovCloud/commercial boundary, VPC endpoint path</a:t>
@@ -14840,11 +12957,11 @@
             <a:avLst/>
           </a:prstGeom>
           <a:solidFill>
-            <a:srgbClr val="0B1020"/>
+            <a:srgbClr val="232F3E"/>
           </a:solidFill>
           <a:ln w="12700">
             <a:solidFill>
-              <a:srgbClr val="0B1020"/>
+              <a:srgbClr val="232F3E"/>
             </a:solidFill>
           </a:ln>
         </p:spPr>
@@ -14904,7 +13021,7 @@
             <a:r>
               <a:rPr lang="en-US" sz="1100" dirty="0">
                 <a:solidFill>
-                  <a:srgbClr val="0B1020"/>
+                  <a:srgbClr val="232F3E"/>
                 </a:solidFill>
               </a:rPr>
               <a:t>token budget, transaction threshold, rate limit, chargeback tag</a:t>
@@ -14928,11 +13045,11 @@
             <a:avLst/>
           </a:prstGeom>
           <a:solidFill>
-            <a:srgbClr val="0B1020"/>
+            <a:srgbClr val="232F3E"/>
           </a:solidFill>
           <a:ln w="12700">
             <a:solidFill>
-              <a:srgbClr val="0B1020"/>
+              <a:srgbClr val="232F3E"/>
             </a:solidFill>
           </a:ln>
         </p:spPr>
@@ -14992,7 +13109,7 @@
             <a:r>
               <a:rPr lang="en-US" sz="1100" dirty="0">
                 <a:solidFill>
-                  <a:srgbClr val="0B1020"/>
+                  <a:srgbClr val="232F3E"/>
                 </a:solidFill>
               </a:rPr>
               <a:t>HITL tier, separation of duties, e-signature requirement</a:t>
@@ -15053,7 +13170,7 @@
             <a:r>
               <a:rPr lang="en-US" sz="1900" b="1" dirty="0">
                 <a:solidFill>
-                  <a:srgbClr val="0B1020"/>
+                  <a:srgbClr val="232F3E"/>
                 </a:solidFill>
               </a:rPr>
               <a:t>ALLOW / DENY / APPROVE</a:t>
@@ -15125,7 +13242,7 @@
             <a:r>
               <a:rPr lang="en-US" sz="1380" b="1" dirty="0">
                 <a:solidFill>
-                  <a:srgbClr val="0B1020"/>
+                  <a:srgbClr val="232F3E"/>
                 </a:solidFill>
               </a:rPr>
               <a:t>Implementation: Verified Permissions + Cedar for externalized authorization, AgentCore Gateway for MCP tool access, STS/OBO tokens for scoped downstream calls.</a:t>
@@ -15329,7 +13446,7 @@
             <a:r>
               <a:rPr lang="en-US" sz="2500" b="1" dirty="0">
                 <a:solidFill>
-                  <a:srgbClr val="0B1020"/>
+                  <a:srgbClr val="232F3E"/>
                 </a:solidFill>
                 <a:latin typeface="Aptos Display" pitchFamily="34" charset="0"/>
                 <a:ea typeface="Aptos Display" pitchFamily="34" charset="-122"/>
@@ -15395,7 +13512,7 @@
             <a:r>
               <a:rPr lang="en-US" sz="1400" b="1" dirty="0">
                 <a:solidFill>
-                  <a:srgbClr val="0B1020"/>
+                  <a:srgbClr val="232F3E"/>
                 </a:solidFill>
               </a:rPr>
               <a:t>1. Source control</a:t>
@@ -15494,7 +13611,7 @@
             <a:r>
               <a:rPr lang="en-US" sz="1400" b="1" dirty="0">
                 <a:solidFill>
-                  <a:srgbClr val="0B1020"/>
+                  <a:srgbClr val="232F3E"/>
                 </a:solidFill>
               </a:rPr>
               <a:t>2. Prompt + schema</a:t>
@@ -15593,7 +13710,7 @@
             <a:r>
               <a:rPr lang="en-US" sz="1400" b="1" dirty="0">
                 <a:solidFill>
-                  <a:srgbClr val="0B1020"/>
+                  <a:srgbClr val="232F3E"/>
                 </a:solidFill>
               </a:rPr>
               <a:t>3. Guardrails</a:t>
@@ -15692,7 +13809,7 @@
             <a:r>
               <a:rPr lang="en-US" sz="1400" b="1" dirty="0">
                 <a:solidFill>
-                  <a:srgbClr val="0B1020"/>
+                  <a:srgbClr val="232F3E"/>
                 </a:solidFill>
               </a:rPr>
               <a:t>4. Cross-check</a:t>
@@ -15791,7 +13908,7 @@
             <a:r>
               <a:rPr lang="en-US" sz="1400" b="1" dirty="0">
                 <a:solidFill>
-                  <a:srgbClr val="0B1020"/>
+                  <a:srgbClr val="232F3E"/>
                 </a:solidFill>
               </a:rPr>
               <a:t>5. Human gate</a:t>
@@ -15890,7 +14007,7 @@
             <a:r>
               <a:rPr lang="en-US" sz="1400" b="1" dirty="0">
                 <a:solidFill>
-                  <a:srgbClr val="0B1020"/>
+                  <a:srgbClr val="232F3E"/>
                 </a:solidFill>
               </a:rPr>
               <a:t>6. Monitoring</a:t>
@@ -15950,11 +14067,11 @@
             <a:avLst/>
           </a:prstGeom>
           <a:solidFill>
-            <a:srgbClr val="0B1020"/>
+            <a:srgbClr val="232F3E"/>
           </a:solidFill>
           <a:ln>
             <a:solidFill>
-              <a:srgbClr val="0B1020"/>
+              <a:srgbClr val="232F3E"/>
             </a:solidFill>
           </a:ln>
         </p:spPr>
@@ -16068,28 +14185,28 @@
         <a:sysClr val="window" lastClr="FFFFFF"/>
       </a:lt1>
       <a:dk2>
-        <a:srgbClr val="44546A"/>
+        <a:srgbClr val="232F3E"/>
       </a:dk2>
       <a:lt2>
         <a:srgbClr val="E7E6E6"/>
       </a:lt2>
       <a:accent1>
-        <a:srgbClr val="4472C4"/>
+        <a:srgbClr val="FF9900"/>
       </a:accent1>
       <a:accent2>
-        <a:srgbClr val="ED7D31"/>
+        <a:srgbClr val="232F3E"/>
       </a:accent2>
       <a:accent3>
-        <a:srgbClr val="A5A5A5"/>
+        <a:srgbClr val="01A88D"/>
       </a:accent3>
       <a:accent4>
-        <a:srgbClr val="FFC000"/>
+        <a:srgbClr val="8C4FFF"/>
       </a:accent4>
       <a:accent5>
-        <a:srgbClr val="5B9BD5"/>
+        <a:srgbClr val="DD344C"/>
       </a:accent5>
       <a:accent6>
-        <a:srgbClr val="70AD47"/>
+        <a:srgbClr val="ED7100"/>
       </a:accent6>
       <a:hlink>
         <a:srgbClr val="0563C1"/>

--- a/aws_ai_governance_platform_gtm_deck.pptx
+++ b/aws_ai_governance_platform_gtm_deck.pptx
@@ -19,6 +19,7 @@
     <p:sldId id="268" r:id="rId14"/>
     <p:sldId id="269" r:id="rId15"/>
     <p:sldId id="270" r:id="rId16"/>
+    <p:sldId id="271" r:id="rId17"/>
   </p:sldIdLst>
   <p:notesMasterIdLst>
     <p:notesMasterId r:id="rId18"/>
@@ -2397,6 +2398,40 @@
           </a:p>
         </p:txBody>
       </p:sp>
+      <p:sp>
+        <p:nvSpPr>
+          <p:cNvPr id="11" name="TextBox 10"/>
+          <p:cNvSpPr txBox="1"/>
+          <p:nvPr/>
+        </p:nvSpPr>
+        <p:spPr>
+          <a:xfrm>
+            <a:off x="365760" y="6291072"/>
+            <a:ext cx="11460175" cy="457200"/>
+          </a:xfrm>
+          <a:prstGeom prst="rect">
+            <a:avLst/>
+          </a:prstGeom>
+          <a:noFill/>
+        </p:spPr>
+        <p:txBody>
+          <a:bodyPr wrap="square" tIns="0" bIns="0">
+            <a:spAutoFit/>
+          </a:bodyPr>
+          <a:lstStyle/>
+          <a:p>
+            <a:pPr algn="l"/>
+            <a:r>
+              <a:rPr sz="800" i="1">
+                <a:solidFill>
+                  <a:srgbClr val="879296"/>
+                </a:solidFill>
+              </a:rPr>
+              <a:t>Reference accelerator — not an AWS service, not AWS-supported software, not a compliance certification, and not production-ready for regulated data without customer-specific engineering, testing, authorization, and operational ownership.</a:t>
+            </a:r>
+          </a:p>
+        </p:txBody>
+      </p:sp>
     </p:spTree>
   </p:cSld>
   <p:clrMapOvr>
@@ -4081,7 +4116,7 @@
 </p:sld>
 </file>
 
-<file path=ppt/slides/slide13.xml><?xml version="1.0" encoding="utf-8"?>
+<file path=ppt/slides/slide12.xml><?xml version="1.0" encoding="utf-8"?>
 <p:sld xmlns:a="http://schemas.openxmlformats.org/drawingml/2006/main" xmlns:r="http://schemas.openxmlformats.org/officeDocument/2006/relationships" xmlns:p="http://schemas.openxmlformats.org/presentationml/2006/main">
   <p:cSld name="Slide 13">
     <p:bg>
@@ -5281,7 +5316,7 @@
 </p:sld>
 </file>
 
-<file path=ppt/slides/slide14.xml><?xml version="1.0" encoding="utf-8"?>
+<file path=ppt/slides/slide13.xml><?xml version="1.0" encoding="utf-8"?>
 <p:sld xmlns:a="http://schemas.openxmlformats.org/drawingml/2006/main" xmlns:r="http://schemas.openxmlformats.org/officeDocument/2006/relationships" xmlns:p="http://schemas.openxmlformats.org/presentationml/2006/main">
   <p:cSld name="Slide 14">
     <p:bg>
@@ -6009,7 +6044,7 @@
 </p:sld>
 </file>
 
-<file path=ppt/slides/slide15.xml><?xml version="1.0" encoding="utf-8"?>
+<file path=ppt/slides/slide14.xml><?xml version="1.0" encoding="utf-8"?>
 <p:sld xmlns:a="http://schemas.openxmlformats.org/drawingml/2006/main" xmlns:r="http://schemas.openxmlformats.org/officeDocument/2006/relationships" xmlns:p="http://schemas.openxmlformats.org/presentationml/2006/main">
   <p:cSld name="Slide 15">
     <p:bg>
@@ -6769,6 +6804,198 @@
               <a:t>AWS AI Governance Platform concept</a:t>
             </a:r>
             <a:endParaRPr lang="en-US" sz="650" dirty="0"/>
+          </a:p>
+        </p:txBody>
+      </p:sp>
+    </p:spTree>
+  </p:cSld>
+  <p:clrMapOvr>
+    <a:masterClrMapping/>
+  </p:clrMapOvr>
+</p:sld>
+</file>
+
+<file path=ppt/slides/slide15.xml><?xml version="1.0" encoding="utf-8"?>
+<p:sld xmlns:a="http://schemas.openxmlformats.org/drawingml/2006/main" xmlns:p="http://schemas.openxmlformats.org/presentationml/2006/main" xmlns:r="http://schemas.openxmlformats.org/officeDocument/2006/relationships">
+  <p:cSld>
+    <p:spTree>
+      <p:nvGrpSpPr>
+        <p:cNvPr id="1" name=""/>
+        <p:cNvGrpSpPr/>
+        <p:nvPr/>
+      </p:nvGrpSpPr>
+      <p:grpSpPr/>
+      <p:sp>
+        <p:nvSpPr>
+          <p:cNvPr id="2" name="Rectangle 1"/>
+          <p:cNvSpPr/>
+          <p:nvPr/>
+        </p:nvSpPr>
+        <p:spPr>
+          <a:xfrm>
+            <a:off x="0" y="0"/>
+            <a:ext cx="12191695" cy="6858000"/>
+          </a:xfrm>
+          <a:prstGeom prst="rect">
+            <a:avLst/>
+          </a:prstGeom>
+          <a:solidFill>
+            <a:srgbClr val="232F3E"/>
+          </a:solidFill>
+          <a:ln>
+            <a:noFill/>
+          </a:ln>
+          <a:effectLst/>
+        </p:spPr>
+        <p:style>
+          <a:lnRef idx="1">
+            <a:schemeClr val="accent1"/>
+          </a:lnRef>
+          <a:fillRef idx="3">
+            <a:schemeClr val="accent1"/>
+          </a:fillRef>
+          <a:effectRef idx="2">
+            <a:schemeClr val="accent1"/>
+          </a:effectRef>
+          <a:fontRef idx="minor">
+            <a:schemeClr val="lt1"/>
+          </a:fontRef>
+        </p:style>
+        <p:txBody>
+          <a:bodyPr rtlCol="0" anchor="ctr"/>
+          <a:lstStyle/>
+          <a:p>
+            <a:pPr algn="ctr"/>
+          </a:p>
+        </p:txBody>
+      </p:sp>
+      <p:sp>
+        <p:nvSpPr>
+          <p:cNvPr id="3" name="Rectangle 2"/>
+          <p:cNvSpPr/>
+          <p:nvPr/>
+        </p:nvSpPr>
+        <p:spPr>
+          <a:xfrm>
+            <a:off x="822960" y="1051560"/>
+            <a:ext cx="2011680" cy="82296"/>
+          </a:xfrm>
+          <a:prstGeom prst="rect">
+            <a:avLst/>
+          </a:prstGeom>
+          <a:solidFill>
+            <a:srgbClr val="FF9900"/>
+          </a:solidFill>
+          <a:ln>
+            <a:noFill/>
+          </a:ln>
+          <a:effectLst/>
+        </p:spPr>
+        <p:style>
+          <a:lnRef idx="1">
+            <a:schemeClr val="accent1"/>
+          </a:lnRef>
+          <a:fillRef idx="3">
+            <a:schemeClr val="accent1"/>
+          </a:fillRef>
+          <a:effectRef idx="2">
+            <a:schemeClr val="accent1"/>
+          </a:effectRef>
+          <a:fontRef idx="minor">
+            <a:schemeClr val="lt1"/>
+          </a:fontRef>
+        </p:style>
+        <p:txBody>
+          <a:bodyPr rtlCol="0" anchor="ctr"/>
+          <a:lstStyle/>
+          <a:p>
+            <a:pPr algn="ctr"/>
+          </a:p>
+        </p:txBody>
+      </p:sp>
+      <p:sp>
+        <p:nvSpPr>
+          <p:cNvPr id="4" name="TextBox 3"/>
+          <p:cNvSpPr txBox="1"/>
+          <p:nvPr/>
+        </p:nvSpPr>
+        <p:spPr>
+          <a:xfrm>
+            <a:off x="822960" y="1234440"/>
+            <a:ext cx="10545775" cy="914400"/>
+          </a:xfrm>
+          <a:prstGeom prst="rect">
+            <a:avLst/>
+          </a:prstGeom>
+          <a:noFill/>
+        </p:spPr>
+        <p:txBody>
+          <a:bodyPr wrap="square">
+            <a:spAutoFit/>
+          </a:bodyPr>
+          <a:lstStyle/>
+          <a:p>
+            <a:r>
+              <a:rPr sz="3400" b="1">
+                <a:solidFill>
+                  <a:srgbClr val="FFFFFF"/>
+                </a:solidFill>
+              </a:rPr>
+              <a:t>Disclaimer &amp; Shared Responsibility</a:t>
+            </a:r>
+          </a:p>
+        </p:txBody>
+      </p:sp>
+      <p:sp>
+        <p:nvSpPr>
+          <p:cNvPr id="5" name="TextBox 4"/>
+          <p:cNvSpPr txBox="1"/>
+          <p:nvPr/>
+        </p:nvSpPr>
+        <p:spPr>
+          <a:xfrm>
+            <a:off x="822960" y="2468880"/>
+            <a:ext cx="10545775" cy="3108960"/>
+          </a:xfrm>
+          <a:prstGeom prst="rect">
+            <a:avLst/>
+          </a:prstGeom>
+          <a:noFill/>
+        </p:spPr>
+        <p:txBody>
+          <a:bodyPr wrap="square">
+            <a:spAutoFit/>
+          </a:bodyPr>
+          <a:lstStyle/>
+          <a:p>
+            <a:pPr>
+              <a:spcAft>
+                <a:spcPts val="1200"/>
+              </a:spcAft>
+            </a:pPr>
+            <a:r>
+              <a:rPr sz="1600">
+                <a:solidFill>
+                  <a:srgbClr val="D5DBDB"/>
+                </a:solidFill>
+              </a:rPr>
+              <a:t>Reference accelerator — not an AWS service, not AWS-supported software, not a compliance certification, and not production-ready for regulated data without customer-specific engineering, testing, authorization, and operational ownership.</a:t>
+            </a:r>
+          </a:p>
+          <a:p>
+            <a:pPr>
+              <a:spcAft>
+                <a:spcPts val="1200"/>
+              </a:spcAft>
+            </a:pPr>
+            <a:r>
+              <a:rPr sz="1600">
+                <a:solidFill>
+                  <a:srgbClr val="D5DBDB"/>
+                </a:solidFill>
+              </a:rPr>
+              <a:t>Built on AWS; not affiliated with or endorsed by Amazon Web Services.</a:t>
+            </a:r>
           </a:p>
         </p:txBody>
       </p:sp>

--- a/aws_ai_governance_platform_gtm_deck.pptx
+++ b/aws_ai_governance_platform_gtm_deck.pptx
@@ -4,6 +4,9 @@
   <p:sldMasterIdLst>
     <p:sldMasterId id="2147483648" r:id="rId1"/>
   </p:sldMasterIdLst>
+  <p:notesMasterIdLst>
+    <p:notesMasterId r:id="rId17"/>
+  </p:notesMasterIdLst>
   <p:sldIdLst>
     <p:sldId id="256" r:id="rId2"/>
     <p:sldId id="257" r:id="rId3"/>
@@ -16,16 +19,13 @@
     <p:sldId id="264" r:id="rId10"/>
     <p:sldId id="265" r:id="rId11"/>
     <p:sldId id="266" r:id="rId12"/>
-    <p:sldId id="268" r:id="rId14"/>
-    <p:sldId id="269" r:id="rId15"/>
-    <p:sldId id="270" r:id="rId16"/>
-    <p:sldId id="271" r:id="rId17"/>
+    <p:sldId id="268" r:id="rId13"/>
+    <p:sldId id="269" r:id="rId14"/>
+    <p:sldId id="270" r:id="rId15"/>
+    <p:sldId id="271" r:id="rId16"/>
   </p:sldIdLst>
-  <p:notesMasterIdLst>
-    <p:notesMasterId r:id="rId18"/>
-  </p:notesMasterIdLst>
-  <p:sldSz cx="12191695" cy="6858000"/>
-  <p:notesSz cx="6858000" cy="12191695"/>
+  <p:sldSz cx="12192000" cy="6858000"/>
+  <p:notesSz cx="6858000" cy="12192000"/>
   <p:defaultTextStyle>
     <a:lvl1pPr marL="0" algn="l" defTabSz="914400" rtl="0" eaLnBrk="1" latinLnBrk="0" hangingPunct="1">
       <a:defRPr sz="1800" kern="1200">
@@ -118,6 +118,11 @@
       </a:defRPr>
     </a:lvl9pPr>
   </p:defaultTextStyle>
+  <p:extLst>
+    <p:ext uri="{EFAFB233-063F-42B5-8137-9DF3F51BA10A}">
+      <p15:sldGuideLst xmlns:p15="http://schemas.microsoft.com/office/powerpoint/2012/main"/>
+    </p:ext>
+  </p:extLst>
 </p:presentation>
 </file>
 
@@ -143,234 +148,10 @@
           <a:chExt cx="0" cy="0"/>
         </a:xfrm>
       </p:grpSpPr>
-      <p:sp>
-        <p:nvSpPr>
-          <p:cNvPr id="2" name="Header Placeholder 1"/>
-          <p:cNvSpPr>
-            <a:spLocks noGrp="1"/>
-          </p:cNvSpPr>
-          <p:nvPr>
-            <p:ph type="hdr" sz="quarter"/>
-          </p:nvPr>
-        </p:nvSpPr>
-        <p:spPr>
-          <a:xfrm>
-            <a:off x="0" y="0"/>
-            <a:ext cx="2971800" cy="458788"/>
-          </a:xfrm>
-          <a:prstGeom prst="rect">
-            <a:avLst/>
-          </a:prstGeom>
-        </p:spPr>
-        <p:txBody>
-          <a:bodyPr vert="horz" lIns="91440" tIns="45720" rIns="91440" bIns="45720" rtlCol="0"/>
-          <a:lstStyle>
-            <a:lvl1pPr algn="l">
-              <a:defRPr sz="1200"/>
-            </a:lvl1pPr>
-          </a:lstStyle>
-          <a:p>
-            <a:endParaRPr lang="en-US"/>
-          </a:p>
-        </p:txBody>
-      </p:sp>
-      <p:sp>
-        <p:nvSpPr>
-          <p:cNvPr id="3" name="Date Placeholder 2"/>
-          <p:cNvSpPr>
-            <a:spLocks noGrp="1"/>
-          </p:cNvSpPr>
-          <p:nvPr>
-            <p:ph type="dt" idx="1"/>
-          </p:nvPr>
-        </p:nvSpPr>
-        <p:spPr>
-          <a:xfrm>
-            <a:off x="3884613" y="0"/>
-            <a:ext cx="2971800" cy="458788"/>
-          </a:xfrm>
-          <a:prstGeom prst="rect">
-            <a:avLst/>
-          </a:prstGeom>
-        </p:spPr>
-        <p:txBody>
-          <a:bodyPr vert="horz" lIns="91440" tIns="45720" rIns="91440" bIns="45720" rtlCol="0"/>
-          <a:lstStyle>
-            <a:lvl1pPr algn="r">
-              <a:defRPr sz="1200"/>
-            </a:lvl1pPr>
-          </a:lstStyle>
-          <a:p>
-            <a:fld id="{5282F153-3F37-0F45-9E97-73ACFA13230C}" type="datetimeFigureOut">
-              <a:rPr lang="en-US"/>
-              <a:t>7/23/19</a:t>
-            </a:fld>
-            <a:endParaRPr lang="en-US"/>
-          </a:p>
-        </p:txBody>
-      </p:sp>
-      <p:sp>
-        <p:nvSpPr>
-          <p:cNvPr id="4" name="Slide Image Placeholder 3"/>
-          <p:cNvSpPr>
-            <a:spLocks noGrp="1" noRot="1" noChangeAspect="1"/>
-          </p:cNvSpPr>
-          <p:nvPr>
-            <p:ph type="sldImg" idx="2"/>
-          </p:nvPr>
-        </p:nvSpPr>
-        <p:spPr>
-          <a:xfrm>
-            <a:off x="685800" y="1143000"/>
-            <a:ext cx="5486400" cy="3086100"/>
-          </a:xfrm>
-          <a:prstGeom prst="rect">
-            <a:avLst/>
-          </a:prstGeom>
-          <a:noFill/>
-          <a:ln w="12700">
-            <a:solidFill>
-              <a:prstClr val="black"/>
-            </a:solidFill>
-          </a:ln>
-        </p:spPr>
-        <p:txBody>
-          <a:bodyPr vert="horz" lIns="91440" tIns="45720" rIns="91440" bIns="45720" rtlCol="0" anchor="ctr"/>
-          <a:lstStyle/>
-          <a:p>
-            <a:endParaRPr lang="en-US"/>
-          </a:p>
-        </p:txBody>
-      </p:sp>
-      <p:sp>
-        <p:nvSpPr>
-          <p:cNvPr id="5" name="Notes Placeholder 4"/>
-          <p:cNvSpPr>
-            <a:spLocks noGrp="1"/>
-          </p:cNvSpPr>
-          <p:nvPr>
-            <p:ph type="body" sz="quarter" idx="3"/>
-          </p:nvPr>
-        </p:nvSpPr>
-        <p:spPr>
-          <a:xfrm>
-            <a:off x="685800" y="4400550"/>
-            <a:ext cx="5486400" cy="3600450"/>
-          </a:xfrm>
-          <a:prstGeom prst="rect">
-            <a:avLst/>
-          </a:prstGeom>
-        </p:spPr>
-        <p:txBody>
-          <a:bodyPr vert="horz" lIns="91440" tIns="45720" rIns="91440" bIns="45720" rtlCol="0"/>
-          <a:lstStyle/>
-          <a:p>
-            <a:pPr lvl="0"/>
-            <a:r>
-              <a:rPr lang="en-US"/>
-              <a:t>Click to edit Master text styles</a:t>
-            </a:r>
-          </a:p>
-          <a:p>
-            <a:pPr lvl="1"/>
-            <a:r>
-              <a:rPr lang="en-US"/>
-              <a:t>Second level</a:t>
-            </a:r>
-          </a:p>
-          <a:p>
-            <a:pPr lvl="2"/>
-            <a:r>
-              <a:rPr lang="en-US"/>
-              <a:t>Third level</a:t>
-            </a:r>
-          </a:p>
-          <a:p>
-            <a:pPr lvl="3"/>
-            <a:r>
-              <a:rPr lang="en-US"/>
-              <a:t>Fourth level</a:t>
-            </a:r>
-          </a:p>
-          <a:p>
-            <a:pPr lvl="4"/>
-            <a:r>
-              <a:rPr lang="en-US"/>
-              <a:t>Fifth level</a:t>
-            </a:r>
-          </a:p>
-        </p:txBody>
-      </p:sp>
-      <p:sp>
-        <p:nvSpPr>
-          <p:cNvPr id="6" name="Footer Placeholder 5"/>
-          <p:cNvSpPr>
-            <a:spLocks noGrp="1"/>
-          </p:cNvSpPr>
-          <p:nvPr>
-            <p:ph type="ftr" sz="quarter" idx="4"/>
-          </p:nvPr>
-        </p:nvSpPr>
-        <p:spPr>
-          <a:xfrm>
-            <a:off x="0" y="8685213"/>
-            <a:ext cx="2971800" cy="458787"/>
-          </a:xfrm>
-          <a:prstGeom prst="rect">
-            <a:avLst/>
-          </a:prstGeom>
-        </p:spPr>
-        <p:txBody>
-          <a:bodyPr vert="horz" lIns="91440" tIns="45720" rIns="91440" bIns="45720" rtlCol="0" anchor="b"/>
-          <a:lstStyle>
-            <a:lvl1pPr algn="l">
-              <a:defRPr sz="1200"/>
-            </a:lvl1pPr>
-          </a:lstStyle>
-          <a:p>
-            <a:endParaRPr lang="en-US"/>
-          </a:p>
-        </p:txBody>
-      </p:sp>
-      <p:sp>
-        <p:nvSpPr>
-          <p:cNvPr id="7" name="Slide Number Placeholder 6"/>
-          <p:cNvSpPr>
-            <a:spLocks noGrp="1"/>
-          </p:cNvSpPr>
-          <p:nvPr>
-            <p:ph type="sldNum" sz="quarter" idx="5"/>
-          </p:nvPr>
-        </p:nvSpPr>
-        <p:spPr>
-          <a:xfrm>
-            <a:off x="3884613" y="8685213"/>
-            <a:ext cx="2971800" cy="458787"/>
-          </a:xfrm>
-          <a:prstGeom prst="rect">
-            <a:avLst/>
-          </a:prstGeom>
-        </p:spPr>
-        <p:txBody>
-          <a:bodyPr vert="horz" lIns="91440" tIns="45720" rIns="91440" bIns="45720" rtlCol="0" anchor="b"/>
-          <a:lstStyle>
-            <a:lvl1pPr algn="r">
-              <a:defRPr sz="1200"/>
-            </a:lvl1pPr>
-          </a:lstStyle>
-          <a:p>
-            <a:fld id="{CE5E9CC1-C706-0F49-92D6-E571CC5EEA8F}" type="slidenum">
-              <a:rPr lang="en-US"/>
-              <a:t>‹#›</a:t>
-            </a:fld>
-            <a:endParaRPr lang="en-US"/>
-          </a:p>
-        </p:txBody>
-      </p:sp>
     </p:spTree>
     <p:extLst>
       <p:ext uri="{BB962C8B-B14F-4D97-AF65-F5344CB8AC3E}">
-        <p14:creationId xmlns:p14="http://schemas.microsoft.com/office/powerpoint/2010/main" val="1024086991"/>
+        <p14:creationId xmlns:p14="http://schemas.microsoft.com/office/powerpoint/2010/main" val="3347009956"/>
       </p:ext>
     </p:extLst>
   </p:cSld>
@@ -520,7 +301,6 @@
 Repo reviewed: https://github.com/virtualryder/slg-ai-agents
 Key evidence: repo README states the agent is not the product; governance is. It also states this is a production-shaped accelerator, not an authorized production-ready system.</a:t>
             </a:r>
-            <a:endParaRPr lang="en-US" dirty="0"/>
           </a:p>
         </p:txBody>
       </p:sp>
@@ -611,7 +391,6 @@
 AWS documents InputTokenCount, OutputTokenCount, CacheReadInputTokens, CacheWriteInputTokens for quota and token monitoring: https://docs.aws.amazon.com/bedrock/latest/userguide/quotas-token-burndown.html
 Bedrock model invocation logging can deliver logs to CloudWatch or S3: https://docs.aws.amazon.com/bedrock/latest/userguide/model-invocation-logging.html</a:t>
             </a:r>
-            <a:endParaRPr lang="en-US" dirty="0"/>
           </a:p>
         </p:txBody>
       </p:sp>
@@ -703,7 +482,6 @@
 FBI CJIS Security Policy v6.0 is dated Dec. 27, 2024: https://le.fbi.gov/file-repository/cjis_security_policy_v6-0_20241227.pdf
 IRS Pub 1075 defines safeguards for Federal Tax Information: https://www.irs.gov/pub/irs-pdf/p1075.pdf</a:t>
             </a:r>
-            <a:endParaRPr lang="en-US" dirty="0"/>
           </a:p>
         </p:txBody>
       </p:sp>
@@ -725,6 +503,94 @@
             <a:fld id="{F7021451-1387-4CA6-816F-3879F97B5CBC}" type="slidenum">
               <a:rPr lang="en-US"/>
               <a:t>11</a:t>
+            </a:fld>
+            <a:endParaRPr lang="en-US"/>
+          </a:p>
+        </p:txBody>
+      </p:sp>
+    </p:spTree>
+    <p:extLst>
+      <p:ext uri="{BB962C8B-B14F-4D97-AF65-F5344CB8AC3E}">
+        <p14:creationId xmlns:p14="http://schemas.microsoft.com/office/powerpoint/2010/main" val="1024086991"/>
+      </p:ext>
+    </p:extLst>
+  </p:cSld>
+  <p:clrMapOvr>
+    <a:masterClrMapping/>
+  </p:clrMapOvr>
+</p:notes>
+</file>
+
+<file path=ppt/notesSlides/notesSlide12.xml><?xml version="1.0" encoding="utf-8"?>
+<p:notes xmlns:a="http://schemas.openxmlformats.org/drawingml/2006/main" xmlns:r="http://schemas.openxmlformats.org/officeDocument/2006/relationships" xmlns:p="http://schemas.openxmlformats.org/presentationml/2006/main">
+  <p:cSld>
+    <p:spTree>
+      <p:nvGrpSpPr>
+        <p:cNvPr id="1" name=""/>
+        <p:cNvGrpSpPr/>
+        <p:nvPr/>
+      </p:nvGrpSpPr>
+      <p:grpSpPr>
+        <a:xfrm>
+          <a:off x="0" y="0"/>
+          <a:ext cx="0" cy="0"/>
+          <a:chOff x="0" y="0"/>
+          <a:chExt cx="0" cy="0"/>
+        </a:xfrm>
+      </p:grpSpPr>
+      <p:sp>
+        <p:nvSpPr>
+          <p:cNvPr id="2" name="Slide Image Placeholder 1"/>
+          <p:cNvSpPr>
+            <a:spLocks noGrp="1" noRot="1" noChangeAspect="1"/>
+          </p:cNvSpPr>
+          <p:nvPr>
+            <p:ph type="sldImg"/>
+          </p:nvPr>
+        </p:nvSpPr>
+        <p:spPr/>
+      </p:sp>
+      <p:sp>
+        <p:nvSpPr>
+          <p:cNvPr id="3" name="Notes Placeholder 2"/>
+          <p:cNvSpPr>
+            <a:spLocks noGrp="1"/>
+          </p:cNvSpPr>
+          <p:nvPr>
+            <p:ph type="body" idx="1"/>
+          </p:nvPr>
+        </p:nvSpPr>
+        <p:spPr/>
+        <p:txBody>
+          <a:bodyPr/>
+          <a:lstStyle/>
+          <a:p>
+            <a:r>
+              <a:rPr lang="en-US" dirty="0"/>
+              <a:t>The phased plan is intentionally biased toward a low-blast-radius first agent. The existing SLG production-readiness document recommends Resident Services/311 or IT service desk before benefits/public safety.
+The first pilot must produce measurable value and evidence, not just a demo.</a:t>
+            </a:r>
+          </a:p>
+        </p:txBody>
+      </p:sp>
+      <p:sp>
+        <p:nvSpPr>
+          <p:cNvPr id="4" name="Slide Number Placeholder 3"/>
+          <p:cNvSpPr>
+            <a:spLocks noGrp="1"/>
+          </p:cNvSpPr>
+          <p:nvPr>
+            <p:ph type="sldNum" sz="quarter" idx="10"/>
+          </p:nvPr>
+        </p:nvSpPr>
+        <p:spPr/>
+        <p:txBody>
+          <a:bodyPr/>
+          <a:lstStyle/>
+          <a:p>
+            <a:fld id="{F7021451-1387-4CA6-816F-3879F97B5CBC}" type="slidenum">
+              <a:rPr lang="en-US"/>
+              <a:t>12</a:t>
             </a:fld>
             <a:endParaRPr lang="en-US"/>
           </a:p>
@@ -789,10 +655,9 @@
           <a:p>
             <a:r>
               <a:rPr lang="en-US" dirty="0"/>
-              <a:t>The phased plan is intentionally biased toward a low-blast-radius first agent. The existing SLG production-readiness document recommends Resident Services/311 or IT service desk before benefits/public safety.
-The first pilot must produce measurable value and evidence, not just a demo.</a:t>
-            </a:r>
-            <a:endParaRPr lang="en-US" dirty="0"/>
+              <a:t>This maps to the existing slg-ai-agents WOG GTM story, but broadens it from SLG to whole-of-enterprise governance.
+The key is to avoid overclaiming turnkey production readiness. Sell a governed pilot with a clear hardening path.</a:t>
+            </a:r>
           </a:p>
         </p:txBody>
       </p:sp>
@@ -878,10 +743,13 @@
           <a:p>
             <a:r>
               <a:rPr lang="en-US" dirty="0"/>
-              <a:t>This maps to the existing slg-ai-agents WOG GTM story, but broadens it from SLG to whole-of-enterprise governance.
-The key is to avoid overclaiming turnkey production readiness. Sell a governed pilot with a clear hardening path.</a:t>
-            </a:r>
-            <a:endParaRPr lang="en-US" dirty="0"/>
+              <a:t>AgentCore Gateway docs: https://docs.aws.amazon.com/bedrock-agentcore/latest/devguide/gateway.html
+AgentCore Identity docs: https://docs.aws.amazon.com/bedrock-agentcore/latest/devguide/identity.html
+Bedrock Guardrails docs: https://docs.aws.amazon.com/bedrock/latest/userguide/guardrails.html
+Bedrock PrivateLink docs: https://docs.aws.amazon.com/bedrock/latest/userguide/vpc-interface-endpoints.html
+AWS GovRAMP page: https://aws.amazon.com/compliance/govramp/
+Amazon Bedrock GovCloud FedRAMP High / DoD IL-4/5 announcement: https://aws.amazon.com/about-aws/whats-new/2025/05/amazon-bedrock-models-fedramp-high-dod-il-4-5-govcloud/</a:t>
+            </a:r>
           </a:p>
         </p:txBody>
       </p:sp>
@@ -903,99 +771,6 @@
             <a:fld id="{F7021451-1387-4CA6-816F-3879F97B5CBC}" type="slidenum">
               <a:rPr lang="en-US"/>
               <a:t>14</a:t>
-            </a:fld>
-            <a:endParaRPr lang="en-US"/>
-          </a:p>
-        </p:txBody>
-      </p:sp>
-    </p:spTree>
-    <p:extLst>
-      <p:ext uri="{BB962C8B-B14F-4D97-AF65-F5344CB8AC3E}">
-        <p14:creationId xmlns:p14="http://schemas.microsoft.com/office/powerpoint/2010/main" val="1024086991"/>
-      </p:ext>
-    </p:extLst>
-  </p:cSld>
-  <p:clrMapOvr>
-    <a:masterClrMapping/>
-  </p:clrMapOvr>
-</p:notes>
-</file>
-
-<file path=ppt/notesSlides/notesSlide15.xml><?xml version="1.0" encoding="utf-8"?>
-<p:notes xmlns:a="http://schemas.openxmlformats.org/drawingml/2006/main" xmlns:r="http://schemas.openxmlformats.org/officeDocument/2006/relationships" xmlns:p="http://schemas.openxmlformats.org/presentationml/2006/main">
-  <p:cSld>
-    <p:spTree>
-      <p:nvGrpSpPr>
-        <p:cNvPr id="1" name=""/>
-        <p:cNvGrpSpPr/>
-        <p:nvPr/>
-      </p:nvGrpSpPr>
-      <p:grpSpPr>
-        <a:xfrm>
-          <a:off x="0" y="0"/>
-          <a:ext cx="0" cy="0"/>
-          <a:chOff x="0" y="0"/>
-          <a:chExt cx="0" cy="0"/>
-        </a:xfrm>
-      </p:grpSpPr>
-      <p:sp>
-        <p:nvSpPr>
-          <p:cNvPr id="2" name="Slide Image Placeholder 1"/>
-          <p:cNvSpPr>
-            <a:spLocks noGrp="1" noRot="1" noChangeAspect="1"/>
-          </p:cNvSpPr>
-          <p:nvPr>
-            <p:ph type="sldImg"/>
-          </p:nvPr>
-        </p:nvSpPr>
-        <p:spPr/>
-      </p:sp>
-      <p:sp>
-        <p:nvSpPr>
-          <p:cNvPr id="3" name="Notes Placeholder 2"/>
-          <p:cNvSpPr>
-            <a:spLocks noGrp="1"/>
-          </p:cNvSpPr>
-          <p:nvPr>
-            <p:ph type="body" idx="1"/>
-          </p:nvPr>
-        </p:nvSpPr>
-        <p:spPr/>
-        <p:txBody>
-          <a:bodyPr/>
-          <a:lstStyle/>
-          <a:p>
-            <a:r>
-              <a:rPr lang="en-US" dirty="0"/>
-              <a:t>AgentCore Gateway docs: https://docs.aws.amazon.com/bedrock-agentcore/latest/devguide/gateway.html
-AgentCore Identity docs: https://docs.aws.amazon.com/bedrock-agentcore/latest/devguide/identity.html
-Bedrock Guardrails docs: https://docs.aws.amazon.com/bedrock/latest/userguide/guardrails.html
-Bedrock PrivateLink docs: https://docs.aws.amazon.com/bedrock/latest/userguide/vpc-interface-endpoints.html
-AWS GovRAMP page: https://aws.amazon.com/compliance/govramp/
-Amazon Bedrock GovCloud FedRAMP High / DoD IL-4/5 announcement: https://aws.amazon.com/about-aws/whats-new/2025/05/amazon-bedrock-models-fedramp-high-dod-il-4-5-govcloud/</a:t>
-            </a:r>
-            <a:endParaRPr lang="en-US" dirty="0"/>
-          </a:p>
-        </p:txBody>
-      </p:sp>
-      <p:sp>
-        <p:nvSpPr>
-          <p:cNvPr id="4" name="Slide Number Placeholder 3"/>
-          <p:cNvSpPr>
-            <a:spLocks noGrp="1"/>
-          </p:cNvSpPr>
-          <p:nvPr>
-            <p:ph type="sldNum" sz="quarter" idx="10"/>
-          </p:nvPr>
-        </p:nvSpPr>
-        <p:spPr/>
-        <p:txBody>
-          <a:bodyPr/>
-          <a:lstStyle/>
-          <a:p>
-            <a:fld id="{F7021451-1387-4CA6-816F-3879F97B5CBC}" type="slidenum">
-              <a:rPr lang="en-US"/>
-              <a:t>15</a:t>
             </a:fld>
             <a:endParaRPr lang="en-US"/>
           </a:p>
@@ -1063,7 +838,6 @@
               <a:t>The current slg-ai-agents repository explicitly frames governance as the product and agents as configurations; README and ENTERPRISE-PLATFORM.md support this direction.
 NASCIO 2026 ranks AI as a top state CIO priority; the repository cites NASCIO pilot/funding constraints in its current README and sources.</a:t>
             </a:r>
-            <a:endParaRPr lang="en-US" dirty="0"/>
           </a:p>
         </p:txBody>
       </p:sp>
@@ -1152,7 +926,6 @@
               <a:t>Talk track: a point solution gives the customer another AI app. The platform gives them a standard operating model for every agent.
 This maps to the SLG repo GTM story: one identity, one authorization model, one audit trail across agencies.</a:t>
             </a:r>
-            <a:endParaRPr lang="en-US" dirty="0"/>
           </a:p>
         </p:txBody>
       </p:sp>
@@ -1242,7 +1015,6 @@
 AWS Security Lake can collect CloudTrail, EKS audit, Route 53 resolver, Security Hub, VPC Flow Logs, and WAF logs: https://docs.aws.amazon.com/security-lake/latest/userguide/internal-sources.html
 S3 Object Lock provides WORM-style protection for retention/legal hold: https://docs.aws.amazon.com/AmazonS3/latest/userguide/object-lock.html</a:t>
             </a:r>
-            <a:endParaRPr lang="en-US" dirty="0"/>
           </a:p>
         </p:txBody>
       </p:sp>
@@ -1332,7 +1104,6 @@
 AgentCore Identity supports scoped on-behalf-of token exchange: https://docs.aws.amazon.com/bedrock-agentcore/latest/devguide/on-behalf-of-token-exchange.html
 Amazon Verified Permissions externalizes fine-grained authorization using Cedar: https://docs.aws.amazon.com/verifiedpermissions/latest/userguide/what-is-avp.html</a:t>
             </a:r>
-            <a:endParaRPr lang="en-US" dirty="0"/>
           </a:p>
         </p:txBody>
       </p:sp>
@@ -1421,7 +1192,6 @@
               <a:t>Improvement from slg-ai-agents: extract gov_platform and governance into a platform repo with strict contracts, then refactor current agents into add-on packages.
 The existing repo already includes governance, control mappings, a WoG platform, and production-readiness documents; those should become formal product modules, not just repo folders.</a:t>
             </a:r>
-            <a:endParaRPr lang="en-US" dirty="0"/>
           </a:p>
         </p:txBody>
       </p:sp>
@@ -1510,7 +1280,6 @@
               <a:t>This is the contract Claude Code should build toward. The current SLG repo has similar concepts but needs a formal package spec and CI gate for each new agent.
 Agent YAML should compile to infrastructure, policy, dashboards, and compliance evidence.</a:t>
             </a:r>
-            <a:endParaRPr lang="en-US" dirty="0"/>
           </a:p>
         </p:txBody>
       </p:sp>
@@ -1600,7 +1369,6 @@
 AgentCore Gateway provides governed tool access and supports MCP-compatible tools: https://docs.aws.amazon.com/bedrock-agentcore/latest/devguide/gateway.html
 AgentCore Identity supports scoped OBO tokens: https://docs.aws.amazon.com/bedrock-agentcore/latest/devguide/on-behalf-of-token-exchange.html</a:t>
             </a:r>
-            <a:endParaRPr lang="en-US" dirty="0"/>
           </a:p>
         </p:txBody>
       </p:sp>
@@ -1690,7 +1458,6 @@
 Bedrock Guardrails contextual grounding checks can detect hallucinations for summarization, paraphrasing, and QA when reference source and query are provided: https://docs.aws.amazon.com/bedrock/latest/userguide/guardrails-contextual-grounding-check.html
 Bedrock sensitive information filters can detect PII in prompts or responses, but documentation notes limitations for tool_use output parameters, so deterministic DLP must still run around tool calls: https://docs.aws.amazon.com/bedrock/latest/userguide/guardrails-sensitive-filters.html</a:t>
             </a:r>
-            <a:endParaRPr lang="en-US" dirty="0"/>
           </a:p>
         </p:txBody>
       </p:sp>
@@ -1763,6 +1530,11 @@
 <file path=ppt/slideMasters/slideMaster1.xml><?xml version="1.0" encoding="utf-8"?>
 <p:sldMaster xmlns:a="http://schemas.openxmlformats.org/drawingml/2006/main" xmlns:r="http://schemas.openxmlformats.org/officeDocument/2006/relationships" xmlns:p="http://schemas.openxmlformats.org/presentationml/2006/main">
   <p:cSld>
+    <p:bg>
+      <p:bgRef idx="1001">
+        <a:schemeClr val="bg1"/>
+      </p:bgRef>
+    </p:bg>
     <p:spTree>
       <p:nvGrpSpPr>
         <p:cNvPr id="1" name=""/>
@@ -2045,6 +1817,7 @@
         <a:solidFill>
           <a:srgbClr val="232F3E"/>
         </a:solidFill>
+        <a:effectLst/>
       </p:bgPr>
     </p:bg>
     <p:spTree>
@@ -2085,6 +1858,13 @@
             <a:prstDash val="solid"/>
           </a:ln>
         </p:spPr>
+        <p:txBody>
+          <a:bodyPr/>
+          <a:lstStyle/>
+          <a:p>
+            <a:endParaRPr lang="en-US"/>
+          </a:p>
+        </p:txBody>
       </p:sp>
       <p:sp>
         <p:nvSpPr>
@@ -2114,6 +1894,13 @@
             <a:prstDash val="solid"/>
           </a:ln>
         </p:spPr>
+        <p:txBody>
+          <a:bodyPr/>
+          <a:lstStyle/>
+          <a:p>
+            <a:endParaRPr lang="en-US"/>
+          </a:p>
+        </p:txBody>
       </p:sp>
       <p:sp>
         <p:nvSpPr>
@@ -2143,6 +1930,13 @@
             <a:prstDash val="solid"/>
           </a:ln>
         </p:spPr>
+        <p:txBody>
+          <a:bodyPr/>
+          <a:lstStyle/>
+          <a:p>
+            <a:endParaRPr lang="en-US"/>
+          </a:p>
+        </p:txBody>
       </p:sp>
       <p:sp>
         <p:nvSpPr>
@@ -2165,7 +1959,7 @@
           <a:bodyPr wrap="square" lIns="0" tIns="0" rIns="0" bIns="0" rtlCol="0" anchor="ctr"/>
           <a:lstStyle/>
           <a:p>
-            <a:pPr indent="0" marL="0">
+            <a:pPr marL="0" indent="0">
               <a:buNone/>
             </a:pPr>
             <a:r>
@@ -2182,7 +1976,7 @@
             <a:endParaRPr lang="en-US" sz="4200" dirty="0"/>
           </a:p>
           <a:p>
-            <a:pPr indent="0" marL="0">
+            <a:pPr marL="0" indent="0">
               <a:buNone/>
             </a:pPr>
             <a:r>
@@ -2221,7 +2015,7 @@
           <a:bodyPr wrap="square" lIns="0" tIns="0" rIns="0" bIns="0" rtlCol="0" anchor="ctr"/>
           <a:lstStyle/>
           <a:p>
-            <a:pPr indent="0" marL="0">
+            <a:pPr marL="0" indent="0">
               <a:buNone/>
             </a:pPr>
             <a:r>
@@ -2263,7 +2057,7 @@
           <a:bodyPr wrap="square" lIns="0" tIns="0" rIns="0" bIns="0" rtlCol="0" anchor="ctr"/>
           <a:lstStyle/>
           <a:p>
-            <a:pPr algn="ctr" indent="0" marL="0">
+            <a:pPr marL="0" indent="0" algn="ctr">
               <a:buNone/>
             </a:pPr>
             <a:r>
@@ -2305,7 +2099,7 @@
           <a:bodyPr wrap="square" lIns="0" tIns="0" rIns="0" bIns="0" rtlCol="0" anchor="ctr"/>
           <a:lstStyle/>
           <a:p>
-            <a:pPr algn="ctr" indent="0" marL="0">
+            <a:pPr marL="0" indent="0" algn="ctr">
               <a:buNone/>
             </a:pPr>
             <a:r>
@@ -2347,7 +2141,7 @@
           <a:bodyPr wrap="square" lIns="0" tIns="0" rIns="0" bIns="0" rtlCol="0" anchor="ctr"/>
           <a:lstStyle/>
           <a:p>
-            <a:pPr algn="ctr" indent="0" marL="0">
+            <a:pPr marL="0" indent="0" algn="ctr">
               <a:buNone/>
             </a:pPr>
             <a:r>
@@ -2370,7 +2164,7 @@
         </p:nvSpPr>
         <p:spPr>
           <a:xfrm>
-            <a:off x="731520" y="6172200"/>
+            <a:off x="455475" y="6057900"/>
             <a:ext cx="5486400" cy="228600"/>
           </a:xfrm>
           <a:prstGeom prst="rect">
@@ -2383,7 +2177,7 @@
           <a:bodyPr wrap="square" lIns="0" tIns="0" rIns="0" bIns="0" rtlCol="0" anchor="ctr"/>
           <a:lstStyle/>
           <a:p>
-            <a:pPr indent="0" marL="0">
+            <a:pPr marL="0" indent="0">
               <a:buNone/>
             </a:pPr>
             <a:r>
@@ -2448,6 +2242,7 @@
         <a:solidFill>
           <a:srgbClr val="F8FAFC"/>
         </a:solidFill>
+        <a:effectLst/>
       </p:bgPr>
     </p:bg>
     <p:spTree>
@@ -2488,6 +2283,13 @@
             <a:prstDash val="solid"/>
           </a:ln>
         </p:spPr>
+        <p:txBody>
+          <a:bodyPr/>
+          <a:lstStyle/>
+          <a:p>
+            <a:endParaRPr lang="en-US"/>
+          </a:p>
+        </p:txBody>
       </p:sp>
       <p:sp>
         <p:nvSpPr>
@@ -2510,7 +2312,7 @@
           <a:bodyPr wrap="square" rtlCol="0" anchor="ctr"/>
           <a:lstStyle/>
           <a:p>
-            <a:pPr indent="0" marL="0">
+            <a:pPr marL="0" indent="0">
               <a:buNone/>
             </a:pPr>
             <a:r>
@@ -2549,7 +2351,7 @@
           <a:bodyPr wrap="square" lIns="0" tIns="0" rIns="0" bIns="0" rtlCol="0" anchor="ctr"/>
           <a:lstStyle/>
           <a:p>
-            <a:pPr indent="0" marL="0">
+            <a:pPr marL="0" indent="0">
               <a:buNone/>
             </a:pPr>
             <a:r>
@@ -2596,7 +2398,7 @@
           </a:bodyPr>
           <a:lstStyle/>
           <a:p>
-            <a:pPr algn="l" indent="0" marL="0">
+            <a:pPr marL="0" indent="0" algn="l">
               <a:buNone/>
             </a:pPr>
             <a:r>
@@ -2640,7 +2442,7 @@
           </a:bodyPr>
           <a:lstStyle/>
           <a:p>
-            <a:pPr algn="l" indent="0" marL="0">
+            <a:pPr marL="0" indent="0" algn="l">
               <a:buNone/>
             </a:pPr>
             <a:r>
@@ -2679,6 +2481,13 @@
             <a:tailEnd type="triangle"/>
           </a:ln>
         </p:spPr>
+        <p:txBody>
+          <a:bodyPr/>
+          <a:lstStyle/>
+          <a:p>
+            <a:endParaRPr lang="en-US"/>
+          </a:p>
+        </p:txBody>
       </p:sp>
       <p:sp>
         <p:nvSpPr>
@@ -2709,7 +2518,7 @@
           </a:bodyPr>
           <a:lstStyle/>
           <a:p>
-            <a:pPr algn="l" indent="0" marL="0">
+            <a:pPr marL="0" indent="0" algn="l">
               <a:buNone/>
             </a:pPr>
             <a:r>
@@ -2753,7 +2562,7 @@
           </a:bodyPr>
           <a:lstStyle/>
           <a:p>
-            <a:pPr algn="l" indent="0" marL="0">
+            <a:pPr marL="0" indent="0" algn="l">
               <a:buNone/>
             </a:pPr>
             <a:r>
@@ -2792,6 +2601,13 @@
             <a:tailEnd type="triangle"/>
           </a:ln>
         </p:spPr>
+        <p:txBody>
+          <a:bodyPr/>
+          <a:lstStyle/>
+          <a:p>
+            <a:endParaRPr lang="en-US"/>
+          </a:p>
+        </p:txBody>
       </p:sp>
       <p:sp>
         <p:nvSpPr>
@@ -2822,7 +2638,7 @@
           </a:bodyPr>
           <a:lstStyle/>
           <a:p>
-            <a:pPr algn="l" indent="0" marL="0">
+            <a:pPr marL="0" indent="0" algn="l">
               <a:buNone/>
             </a:pPr>
             <a:r>
@@ -2866,7 +2682,7 @@
           </a:bodyPr>
           <a:lstStyle/>
           <a:p>
-            <a:pPr algn="l" indent="0" marL="0">
+            <a:pPr marL="0" indent="0" algn="l">
               <a:buNone/>
             </a:pPr>
             <a:r>
@@ -2905,6 +2721,13 @@
             <a:tailEnd type="triangle"/>
           </a:ln>
         </p:spPr>
+        <p:txBody>
+          <a:bodyPr/>
+          <a:lstStyle/>
+          <a:p>
+            <a:endParaRPr lang="en-US"/>
+          </a:p>
+        </p:txBody>
       </p:sp>
       <p:sp>
         <p:nvSpPr>
@@ -2935,7 +2758,7 @@
           </a:bodyPr>
           <a:lstStyle/>
           <a:p>
-            <a:pPr algn="l" indent="0" marL="0">
+            <a:pPr marL="0" indent="0" algn="l">
               <a:buNone/>
             </a:pPr>
             <a:r>
@@ -2979,7 +2802,7 @@
           </a:bodyPr>
           <a:lstStyle/>
           <a:p>
-            <a:pPr algn="l" indent="0" marL="0">
+            <a:pPr marL="0" indent="0" algn="l">
               <a:buNone/>
             </a:pPr>
             <a:r>
@@ -3015,7 +2838,7 @@
           <a:bodyPr wrap="square" lIns="0" tIns="0" rIns="0" bIns="0" rtlCol="0" anchor="ctr"/>
           <a:lstStyle/>
           <a:p>
-            <a:pPr indent="0" marL="0">
+            <a:pPr marL="0" indent="0">
               <a:buNone/>
             </a:pPr>
             <a:r>
@@ -3053,7 +2876,7 @@
           </a:bodyPr>
           <a:lstStyle/>
           <a:p>
-            <a:pPr indent="0" marL="0">
+            <a:pPr marL="0" indent="0">
               <a:buNone/>
             </a:pPr>
             <a:r>
@@ -3089,7 +2912,7 @@
           <a:bodyPr wrap="square" lIns="0" tIns="0" rIns="0" bIns="0" rtlCol="0" anchor="ctr"/>
           <a:lstStyle/>
           <a:p>
-            <a:pPr algn="ctr" indent="0" marL="0">
+            <a:pPr marL="0" indent="0" algn="ctr">
               <a:buNone/>
             </a:pPr>
             <a:r>
@@ -3125,7 +2948,7 @@
           <a:bodyPr wrap="square" lIns="0" tIns="0" rIns="0" bIns="0" rtlCol="0" anchor="ctr"/>
           <a:lstStyle/>
           <a:p>
-            <a:pPr indent="0" marL="0">
+            <a:pPr marL="0" indent="0">
               <a:buNone/>
             </a:pPr>
             <a:r>
@@ -3161,7 +2984,7 @@
           <a:bodyPr wrap="square" lIns="0" tIns="0" rIns="0" bIns="0" rtlCol="0" anchor="ctr"/>
           <a:lstStyle/>
           <a:p>
-            <a:pPr algn="r" indent="0" marL="0">
+            <a:pPr marL="0" indent="0" algn="r">
               <a:buNone/>
             </a:pPr>
             <a:r>
@@ -3192,6 +3015,7 @@
         <a:solidFill>
           <a:srgbClr val="F8FAFC"/>
         </a:solidFill>
+        <a:effectLst/>
       </p:bgPr>
     </p:bg>
     <p:spTree>
@@ -3232,6 +3056,13 @@
             <a:prstDash val="solid"/>
           </a:ln>
         </p:spPr>
+        <p:txBody>
+          <a:bodyPr/>
+          <a:lstStyle/>
+          <a:p>
+            <a:endParaRPr lang="en-US"/>
+          </a:p>
+        </p:txBody>
       </p:sp>
       <p:sp>
         <p:nvSpPr>
@@ -3254,7 +3085,7 @@
           <a:bodyPr wrap="square" rtlCol="0" anchor="ctr"/>
           <a:lstStyle/>
           <a:p>
-            <a:pPr indent="0" marL="0">
+            <a:pPr marL="0" indent="0">
               <a:buNone/>
             </a:pPr>
             <a:r>
@@ -3293,7 +3124,7 @@
           <a:bodyPr wrap="square" lIns="0" tIns="0" rIns="0" bIns="0" rtlCol="0" anchor="ctr"/>
           <a:lstStyle/>
           <a:p>
-            <a:pPr indent="0" marL="0">
+            <a:pPr marL="0" indent="0">
               <a:buNone/>
             </a:pPr>
             <a:r>
@@ -3337,6 +3168,13 @@
             <a:prstDash val="solid"/>
           </a:ln>
         </p:spPr>
+        <p:txBody>
+          <a:bodyPr/>
+          <a:lstStyle/>
+          <a:p>
+            <a:endParaRPr lang="en-US"/>
+          </a:p>
+        </p:txBody>
       </p:sp>
       <p:sp>
         <p:nvSpPr>
@@ -3359,7 +3197,7 @@
           <a:bodyPr wrap="square" lIns="0" tIns="0" rIns="0" bIns="0" rtlCol="0" anchor="ctr"/>
           <a:lstStyle/>
           <a:p>
-            <a:pPr algn="ctr" indent="0" marL="0">
+            <a:pPr marL="0" indent="0" algn="ctr">
               <a:buNone/>
             </a:pPr>
             <a:r>
@@ -3397,7 +3235,7 @@
           </a:bodyPr>
           <a:lstStyle/>
           <a:p>
-            <a:pPr algn="ctr" indent="0" marL="0">
+            <a:pPr marL="0" indent="0" algn="ctr">
               <a:buNone/>
             </a:pPr>
             <a:r>
@@ -3411,7 +3249,7 @@
             <a:endParaRPr lang="en-US" sz="950" dirty="0"/>
           </a:p>
           <a:p>
-            <a:pPr algn="ctr" indent="0" marL="0">
+            <a:pPr marL="0" indent="0" algn="ctr">
               <a:buNone/>
             </a:pPr>
             <a:r>
@@ -3425,7 +3263,7 @@
             <a:endParaRPr lang="en-US" sz="950" dirty="0"/>
           </a:p>
           <a:p>
-            <a:pPr algn="ctr" indent="0" marL="0">
+            <a:pPr marL="0" indent="0" algn="ctr">
               <a:buNone/>
             </a:pPr>
             <a:r>
@@ -3466,6 +3304,13 @@
             <a:prstDash val="solid"/>
           </a:ln>
         </p:spPr>
+        <p:txBody>
+          <a:bodyPr/>
+          <a:lstStyle/>
+          <a:p>
+            <a:endParaRPr lang="en-US"/>
+          </a:p>
+        </p:txBody>
       </p:sp>
       <p:sp>
         <p:nvSpPr>
@@ -3488,7 +3333,7 @@
           <a:bodyPr wrap="square" lIns="0" tIns="0" rIns="0" bIns="0" rtlCol="0" anchor="ctr"/>
           <a:lstStyle/>
           <a:p>
-            <a:pPr algn="ctr" indent="0" marL="0">
+            <a:pPr marL="0" indent="0" algn="ctr">
               <a:buNone/>
             </a:pPr>
             <a:r>
@@ -3526,7 +3371,7 @@
           </a:bodyPr>
           <a:lstStyle/>
           <a:p>
-            <a:pPr algn="ctr" indent="0" marL="0">
+            <a:pPr marL="0" indent="0" algn="ctr">
               <a:buNone/>
             </a:pPr>
             <a:r>
@@ -3540,7 +3385,7 @@
             <a:endParaRPr lang="en-US" sz="950" dirty="0"/>
           </a:p>
           <a:p>
-            <a:pPr algn="ctr" indent="0" marL="0">
+            <a:pPr marL="0" indent="0" algn="ctr">
               <a:buNone/>
             </a:pPr>
             <a:r>
@@ -3554,7 +3399,7 @@
             <a:endParaRPr lang="en-US" sz="950" dirty="0"/>
           </a:p>
           <a:p>
-            <a:pPr algn="ctr" indent="0" marL="0">
+            <a:pPr marL="0" indent="0" algn="ctr">
               <a:buNone/>
             </a:pPr>
             <a:r>
@@ -3595,6 +3440,13 @@
             <a:prstDash val="solid"/>
           </a:ln>
         </p:spPr>
+        <p:txBody>
+          <a:bodyPr/>
+          <a:lstStyle/>
+          <a:p>
+            <a:endParaRPr lang="en-US"/>
+          </a:p>
+        </p:txBody>
       </p:sp>
       <p:sp>
         <p:nvSpPr>
@@ -3617,7 +3469,7 @@
           <a:bodyPr wrap="square" lIns="0" tIns="0" rIns="0" bIns="0" rtlCol="0" anchor="ctr"/>
           <a:lstStyle/>
           <a:p>
-            <a:pPr algn="ctr" indent="0" marL="0">
+            <a:pPr marL="0" indent="0" algn="ctr">
               <a:buNone/>
             </a:pPr>
             <a:r>
@@ -3655,7 +3507,7 @@
           </a:bodyPr>
           <a:lstStyle/>
           <a:p>
-            <a:pPr algn="ctr" indent="0" marL="0">
+            <a:pPr marL="0" indent="0" algn="ctr">
               <a:buNone/>
             </a:pPr>
             <a:r>
@@ -3669,7 +3521,7 @@
             <a:endParaRPr lang="en-US" sz="950" dirty="0"/>
           </a:p>
           <a:p>
-            <a:pPr algn="ctr" indent="0" marL="0">
+            <a:pPr marL="0" indent="0" algn="ctr">
               <a:buNone/>
             </a:pPr>
             <a:r>
@@ -3683,7 +3535,7 @@
             <a:endParaRPr lang="en-US" sz="950" dirty="0"/>
           </a:p>
           <a:p>
-            <a:pPr algn="ctr" indent="0" marL="0">
+            <a:pPr marL="0" indent="0" algn="ctr">
               <a:buNone/>
             </a:pPr>
             <a:r>
@@ -3724,6 +3576,13 @@
             <a:prstDash val="solid"/>
           </a:ln>
         </p:spPr>
+        <p:txBody>
+          <a:bodyPr/>
+          <a:lstStyle/>
+          <a:p>
+            <a:endParaRPr lang="en-US"/>
+          </a:p>
+        </p:txBody>
       </p:sp>
       <p:sp>
         <p:nvSpPr>
@@ -3746,7 +3605,7 @@
           <a:bodyPr wrap="square" lIns="0" tIns="0" rIns="0" bIns="0" rtlCol="0" anchor="ctr"/>
           <a:lstStyle/>
           <a:p>
-            <a:pPr algn="ctr" indent="0" marL="0">
+            <a:pPr marL="0" indent="0" algn="ctr">
               <a:buNone/>
             </a:pPr>
             <a:r>
@@ -3784,7 +3643,7 @@
           </a:bodyPr>
           <a:lstStyle/>
           <a:p>
-            <a:pPr algn="ctr" indent="0" marL="0">
+            <a:pPr marL="0" indent="0" algn="ctr">
               <a:buNone/>
             </a:pPr>
             <a:r>
@@ -3798,7 +3657,7 @@
             <a:endParaRPr lang="en-US" sz="950" dirty="0"/>
           </a:p>
           <a:p>
-            <a:pPr algn="ctr" indent="0" marL="0">
+            <a:pPr marL="0" indent="0" algn="ctr">
               <a:buNone/>
             </a:pPr>
             <a:r>
@@ -3812,7 +3671,7 @@
             <a:endParaRPr lang="en-US" sz="950" dirty="0"/>
           </a:p>
           <a:p>
-            <a:pPr algn="ctr" indent="0" marL="0">
+            <a:pPr marL="0" indent="0" algn="ctr">
               <a:buNone/>
             </a:pPr>
             <a:r>
@@ -3853,6 +3712,13 @@
             <a:prstDash val="solid"/>
           </a:ln>
         </p:spPr>
+        <p:txBody>
+          <a:bodyPr/>
+          <a:lstStyle/>
+          <a:p>
+            <a:endParaRPr lang="en-US"/>
+          </a:p>
+        </p:txBody>
       </p:sp>
       <p:sp>
         <p:nvSpPr>
@@ -3875,7 +3741,7 @@
           <a:bodyPr wrap="square" lIns="0" tIns="0" rIns="0" bIns="0" rtlCol="0" anchor="ctr"/>
           <a:lstStyle/>
           <a:p>
-            <a:pPr algn="ctr" indent="0" marL="0">
+            <a:pPr marL="0" indent="0" algn="ctr">
               <a:buNone/>
             </a:pPr>
             <a:r>
@@ -3913,7 +3779,7 @@
           </a:bodyPr>
           <a:lstStyle/>
           <a:p>
-            <a:pPr algn="ctr" indent="0" marL="0">
+            <a:pPr marL="0" indent="0" algn="ctr">
               <a:buNone/>
             </a:pPr>
             <a:r>
@@ -3927,7 +3793,7 @@
             <a:endParaRPr lang="en-US" sz="950" dirty="0"/>
           </a:p>
           <a:p>
-            <a:pPr algn="ctr" indent="0" marL="0">
+            <a:pPr marL="0" indent="0" algn="ctr">
               <a:buNone/>
             </a:pPr>
             <a:r>
@@ -3941,7 +3807,7 @@
             <a:endParaRPr lang="en-US" sz="950" dirty="0"/>
           </a:p>
           <a:p>
-            <a:pPr algn="ctr" indent="0" marL="0">
+            <a:pPr marL="0" indent="0" algn="ctr">
               <a:buNone/>
             </a:pPr>
             <a:r>
@@ -3985,7 +3851,7 @@
           </a:bodyPr>
           <a:lstStyle/>
           <a:p>
-            <a:pPr algn="ctr" indent="0" marL="0">
+            <a:pPr marL="0" indent="0" algn="ctr">
               <a:buNone/>
             </a:pPr>
             <a:r>
@@ -4021,7 +3887,7 @@
           <a:bodyPr wrap="square" lIns="0" tIns="0" rIns="0" bIns="0" rtlCol="0" anchor="ctr"/>
           <a:lstStyle/>
           <a:p>
-            <a:pPr algn="ctr" indent="0" marL="0">
+            <a:pPr marL="0" indent="0" algn="ctr">
               <a:buNone/>
             </a:pPr>
             <a:r>
@@ -4057,7 +3923,7 @@
           <a:bodyPr wrap="square" lIns="0" tIns="0" rIns="0" bIns="0" rtlCol="0" anchor="ctr"/>
           <a:lstStyle/>
           <a:p>
-            <a:pPr indent="0" marL="0">
+            <a:pPr marL="0" indent="0">
               <a:buNone/>
             </a:pPr>
             <a:r>
@@ -4093,7 +3959,7 @@
           <a:bodyPr wrap="square" lIns="0" tIns="0" rIns="0" bIns="0" rtlCol="0" anchor="ctr"/>
           <a:lstStyle/>
           <a:p>
-            <a:pPr algn="r" indent="0" marL="0">
+            <a:pPr marL="0" indent="0" algn="r">
               <a:buNone/>
             </a:pPr>
             <a:r>
@@ -4124,6 +3990,7 @@
         <a:solidFill>
           <a:srgbClr val="F8FAFC"/>
         </a:solidFill>
+        <a:effectLst/>
       </p:bgPr>
     </p:bg>
     <p:spTree>
@@ -4164,6 +4031,13 @@
             <a:prstDash val="solid"/>
           </a:ln>
         </p:spPr>
+        <p:txBody>
+          <a:bodyPr/>
+          <a:lstStyle/>
+          <a:p>
+            <a:endParaRPr lang="en-US"/>
+          </a:p>
+        </p:txBody>
       </p:sp>
       <p:sp>
         <p:nvSpPr>
@@ -4186,7 +4060,7 @@
           <a:bodyPr wrap="square" rtlCol="0" anchor="ctr"/>
           <a:lstStyle/>
           <a:p>
-            <a:pPr indent="0" marL="0">
+            <a:pPr marL="0" indent="0">
               <a:buNone/>
             </a:pPr>
             <a:r>
@@ -4225,7 +4099,7 @@
           <a:bodyPr wrap="square" lIns="0" tIns="0" rIns="0" bIns="0" rtlCol="0" anchor="ctr"/>
           <a:lstStyle/>
           <a:p>
-            <a:pPr indent="0" marL="0">
+            <a:pPr marL="0" indent="0">
               <a:buNone/>
             </a:pPr>
             <a:r>
@@ -4267,6 +4141,13 @@
             <a:prstDash val="solid"/>
           </a:ln>
         </p:spPr>
+        <p:txBody>
+          <a:bodyPr/>
+          <a:lstStyle/>
+          <a:p>
+            <a:endParaRPr lang="en-US"/>
+          </a:p>
+        </p:txBody>
       </p:sp>
       <p:sp>
         <p:nvSpPr>
@@ -4289,7 +4170,7 @@
           <a:bodyPr wrap="square" lIns="0" tIns="0" rIns="0" bIns="0" rtlCol="0" anchor="ctr"/>
           <a:lstStyle/>
           <a:p>
-            <a:pPr algn="ctr" indent="0" marL="0">
+            <a:pPr marL="0" indent="0" algn="ctr">
               <a:buNone/>
             </a:pPr>
             <a:r>
@@ -4328,6 +4209,13 @@
             <a:tailEnd type="triangle"/>
           </a:ln>
         </p:spPr>
+        <p:txBody>
+          <a:bodyPr/>
+          <a:lstStyle/>
+          <a:p>
+            <a:endParaRPr lang="en-US"/>
+          </a:p>
+        </p:txBody>
       </p:sp>
       <p:sp>
         <p:nvSpPr>
@@ -4350,7 +4238,7 @@
           <a:bodyPr wrap="square" lIns="0" tIns="0" rIns="0" bIns="0" rtlCol="0" anchor="ctr"/>
           <a:lstStyle/>
           <a:p>
-            <a:pPr algn="ctr" indent="0" marL="0">
+            <a:pPr marL="0" indent="0" algn="ctr">
               <a:buNone/>
             </a:pPr>
             <a:r>
@@ -4388,7 +4276,7 @@
           </a:bodyPr>
           <a:lstStyle/>
           <a:p>
-            <a:pPr algn="ctr" indent="0" marL="0">
+            <a:pPr marL="0" indent="0" algn="ctr">
               <a:buNone/>
             </a:pPr>
             <a:r>
@@ -4427,6 +4315,13 @@
             <a:prstDash val="solid"/>
           </a:ln>
         </p:spPr>
+        <p:txBody>
+          <a:bodyPr/>
+          <a:lstStyle/>
+          <a:p>
+            <a:endParaRPr lang="en-US"/>
+          </a:p>
+        </p:txBody>
       </p:sp>
       <p:sp>
         <p:nvSpPr>
@@ -4449,7 +4344,7 @@
           <a:bodyPr wrap="square" lIns="0" tIns="0" rIns="0" bIns="0" rtlCol="0" anchor="ctr"/>
           <a:lstStyle/>
           <a:p>
-            <a:pPr algn="ctr" indent="0" marL="0">
+            <a:pPr marL="0" indent="0" algn="ctr">
               <a:buNone/>
             </a:pPr>
             <a:r>
@@ -4488,6 +4383,13 @@
             <a:tailEnd type="triangle"/>
           </a:ln>
         </p:spPr>
+        <p:txBody>
+          <a:bodyPr/>
+          <a:lstStyle/>
+          <a:p>
+            <a:endParaRPr lang="en-US"/>
+          </a:p>
+        </p:txBody>
       </p:sp>
       <p:sp>
         <p:nvSpPr>
@@ -4510,7 +4412,7 @@
           <a:bodyPr wrap="square" lIns="0" tIns="0" rIns="0" bIns="0" rtlCol="0" anchor="ctr"/>
           <a:lstStyle/>
           <a:p>
-            <a:pPr algn="ctr" indent="0" marL="0">
+            <a:pPr marL="0" indent="0" algn="ctr">
               <a:buNone/>
             </a:pPr>
             <a:r>
@@ -4548,7 +4450,7 @@
           </a:bodyPr>
           <a:lstStyle/>
           <a:p>
-            <a:pPr algn="ctr" indent="0" marL="0">
+            <a:pPr marL="0" indent="0" algn="ctr">
               <a:buNone/>
             </a:pPr>
             <a:r>
@@ -4587,6 +4489,13 @@
             <a:prstDash val="solid"/>
           </a:ln>
         </p:spPr>
+        <p:txBody>
+          <a:bodyPr/>
+          <a:lstStyle/>
+          <a:p>
+            <a:endParaRPr lang="en-US"/>
+          </a:p>
+        </p:txBody>
       </p:sp>
       <p:sp>
         <p:nvSpPr>
@@ -4609,7 +4518,7 @@
           <a:bodyPr wrap="square" lIns="0" tIns="0" rIns="0" bIns="0" rtlCol="0" anchor="ctr"/>
           <a:lstStyle/>
           <a:p>
-            <a:pPr algn="ctr" indent="0" marL="0">
+            <a:pPr marL="0" indent="0" algn="ctr">
               <a:buNone/>
             </a:pPr>
             <a:r>
@@ -4648,6 +4557,13 @@
             <a:tailEnd type="triangle"/>
           </a:ln>
         </p:spPr>
+        <p:txBody>
+          <a:bodyPr/>
+          <a:lstStyle/>
+          <a:p>
+            <a:endParaRPr lang="en-US"/>
+          </a:p>
+        </p:txBody>
       </p:sp>
       <p:sp>
         <p:nvSpPr>
@@ -4670,7 +4586,7 @@
           <a:bodyPr wrap="square" lIns="0" tIns="0" rIns="0" bIns="0" rtlCol="0" anchor="ctr"/>
           <a:lstStyle/>
           <a:p>
-            <a:pPr algn="ctr" indent="0" marL="0">
+            <a:pPr marL="0" indent="0" algn="ctr">
               <a:buNone/>
             </a:pPr>
             <a:r>
@@ -4708,7 +4624,7 @@
           </a:bodyPr>
           <a:lstStyle/>
           <a:p>
-            <a:pPr algn="ctr" indent="0" marL="0">
+            <a:pPr marL="0" indent="0" algn="ctr">
               <a:buNone/>
             </a:pPr>
             <a:r>
@@ -4747,6 +4663,13 @@
             <a:prstDash val="solid"/>
           </a:ln>
         </p:spPr>
+        <p:txBody>
+          <a:bodyPr/>
+          <a:lstStyle/>
+          <a:p>
+            <a:endParaRPr lang="en-US"/>
+          </a:p>
+        </p:txBody>
       </p:sp>
       <p:sp>
         <p:nvSpPr>
@@ -4769,7 +4692,7 @@
           <a:bodyPr wrap="square" lIns="0" tIns="0" rIns="0" bIns="0" rtlCol="0" anchor="ctr"/>
           <a:lstStyle/>
           <a:p>
-            <a:pPr algn="ctr" indent="0" marL="0">
+            <a:pPr marL="0" indent="0" algn="ctr">
               <a:buNone/>
             </a:pPr>
             <a:r>
@@ -4808,6 +4731,13 @@
             <a:tailEnd type="triangle"/>
           </a:ln>
         </p:spPr>
+        <p:txBody>
+          <a:bodyPr/>
+          <a:lstStyle/>
+          <a:p>
+            <a:endParaRPr lang="en-US"/>
+          </a:p>
+        </p:txBody>
       </p:sp>
       <p:sp>
         <p:nvSpPr>
@@ -4830,7 +4760,7 @@
           <a:bodyPr wrap="square" lIns="0" tIns="0" rIns="0" bIns="0" rtlCol="0" anchor="ctr"/>
           <a:lstStyle/>
           <a:p>
-            <a:pPr algn="ctr" indent="0" marL="0">
+            <a:pPr marL="0" indent="0" algn="ctr">
               <a:buNone/>
             </a:pPr>
             <a:r>
@@ -4868,7 +4798,7 @@
           </a:bodyPr>
           <a:lstStyle/>
           <a:p>
-            <a:pPr algn="ctr" indent="0" marL="0">
+            <a:pPr marL="0" indent="0" algn="ctr">
               <a:buNone/>
             </a:pPr>
             <a:r>
@@ -4907,6 +4837,13 @@
             <a:prstDash val="solid"/>
           </a:ln>
         </p:spPr>
+        <p:txBody>
+          <a:bodyPr/>
+          <a:lstStyle/>
+          <a:p>
+            <a:endParaRPr lang="en-US"/>
+          </a:p>
+        </p:txBody>
       </p:sp>
       <p:sp>
         <p:nvSpPr>
@@ -4929,7 +4866,7 @@
           <a:bodyPr wrap="square" lIns="0" tIns="0" rIns="0" bIns="0" rtlCol="0" anchor="ctr"/>
           <a:lstStyle/>
           <a:p>
-            <a:pPr algn="ctr" indent="0" marL="0">
+            <a:pPr marL="0" indent="0" algn="ctr">
               <a:buNone/>
             </a:pPr>
             <a:r>
@@ -4968,6 +4905,13 @@
             <a:tailEnd type="triangle"/>
           </a:ln>
         </p:spPr>
+        <p:txBody>
+          <a:bodyPr/>
+          <a:lstStyle/>
+          <a:p>
+            <a:endParaRPr lang="en-US"/>
+          </a:p>
+        </p:txBody>
       </p:sp>
       <p:sp>
         <p:nvSpPr>
@@ -4990,7 +4934,7 @@
           <a:bodyPr wrap="square" lIns="0" tIns="0" rIns="0" bIns="0" rtlCol="0" anchor="ctr"/>
           <a:lstStyle/>
           <a:p>
-            <a:pPr algn="ctr" indent="0" marL="0">
+            <a:pPr marL="0" indent="0" algn="ctr">
               <a:buNone/>
             </a:pPr>
             <a:r>
@@ -5028,7 +4972,7 @@
           </a:bodyPr>
           <a:lstStyle/>
           <a:p>
-            <a:pPr algn="ctr" indent="0" marL="0">
+            <a:pPr marL="0" indent="0" algn="ctr">
               <a:buNone/>
             </a:pPr>
             <a:r>
@@ -5067,6 +5011,13 @@
             <a:prstDash val="solid"/>
           </a:ln>
         </p:spPr>
+        <p:txBody>
+          <a:bodyPr/>
+          <a:lstStyle/>
+          <a:p>
+            <a:endParaRPr lang="en-US"/>
+          </a:p>
+        </p:txBody>
       </p:sp>
       <p:sp>
         <p:nvSpPr>
@@ -5089,7 +5040,7 @@
           <a:bodyPr wrap="square" lIns="0" tIns="0" rIns="0" bIns="0" rtlCol="0" anchor="ctr"/>
           <a:lstStyle/>
           <a:p>
-            <a:pPr algn="ctr" indent="0" marL="0">
+            <a:pPr marL="0" indent="0" algn="ctr">
               <a:buNone/>
             </a:pPr>
             <a:r>
@@ -5125,7 +5076,7 @@
           <a:bodyPr wrap="square" lIns="0" tIns="0" rIns="0" bIns="0" rtlCol="0" anchor="ctr"/>
           <a:lstStyle/>
           <a:p>
-            <a:pPr algn="ctr" indent="0" marL="0">
+            <a:pPr marL="0" indent="0" algn="ctr">
               <a:buNone/>
             </a:pPr>
             <a:r>
@@ -5163,7 +5114,7 @@
           </a:bodyPr>
           <a:lstStyle/>
           <a:p>
-            <a:pPr algn="ctr" indent="0" marL="0">
+            <a:pPr marL="0" indent="0" algn="ctr">
               <a:buNone/>
             </a:pPr>
             <a:r>
@@ -5207,7 +5158,7 @@
           </a:bodyPr>
           <a:lstStyle/>
           <a:p>
-            <a:pPr algn="ctr" indent="0" marL="0">
+            <a:pPr marL="0" indent="0" algn="ctr">
               <a:buNone/>
             </a:pPr>
             <a:r>
@@ -5221,7 +5172,7 @@
             <a:endParaRPr lang="en-US" sz="1300" dirty="0"/>
           </a:p>
           <a:p>
-            <a:pPr algn="ctr" indent="0" marL="0">
+            <a:pPr marL="0" indent="0" algn="ctr">
               <a:buNone/>
             </a:pPr>
             <a:r>
@@ -5257,7 +5208,7 @@
           <a:bodyPr wrap="square" lIns="0" tIns="0" rIns="0" bIns="0" rtlCol="0" anchor="ctr"/>
           <a:lstStyle/>
           <a:p>
-            <a:pPr indent="0" marL="0">
+            <a:pPr marL="0" indent="0">
               <a:buNone/>
             </a:pPr>
             <a:r>
@@ -5293,7 +5244,7 @@
           <a:bodyPr wrap="square" lIns="0" tIns="0" rIns="0" bIns="0" rtlCol="0" anchor="ctr"/>
           <a:lstStyle/>
           <a:p>
-            <a:pPr algn="r" indent="0" marL="0">
+            <a:pPr marL="0" indent="0" algn="r">
               <a:buNone/>
             </a:pPr>
             <a:r>
@@ -5324,6 +5275,7 @@
         <a:solidFill>
           <a:srgbClr val="F8FAFC"/>
         </a:solidFill>
+        <a:effectLst/>
       </p:bgPr>
     </p:bg>
     <p:spTree>
@@ -5364,6 +5316,13 @@
             <a:prstDash val="solid"/>
           </a:ln>
         </p:spPr>
+        <p:txBody>
+          <a:bodyPr/>
+          <a:lstStyle/>
+          <a:p>
+            <a:endParaRPr lang="en-US"/>
+          </a:p>
+        </p:txBody>
       </p:sp>
       <p:sp>
         <p:nvSpPr>
@@ -5386,7 +5345,7 @@
           <a:bodyPr wrap="square" rtlCol="0" anchor="ctr"/>
           <a:lstStyle/>
           <a:p>
-            <a:pPr indent="0" marL="0">
+            <a:pPr marL="0" indent="0">
               <a:buNone/>
             </a:pPr>
             <a:r>
@@ -5425,7 +5384,7 @@
           <a:bodyPr wrap="square" lIns="0" tIns="0" rIns="0" bIns="0" rtlCol="0" anchor="ctr"/>
           <a:lstStyle/>
           <a:p>
-            <a:pPr indent="0" marL="0">
+            <a:pPr marL="0" indent="0">
               <a:buNone/>
             </a:pPr>
             <a:r>
@@ -5472,7 +5431,7 @@
           </a:bodyPr>
           <a:lstStyle/>
           <a:p>
-            <a:pPr algn="l" indent="0" marL="0">
+            <a:pPr marL="0" indent="0" algn="l">
               <a:buNone/>
             </a:pPr>
             <a:r>
@@ -5516,7 +5475,7 @@
           </a:bodyPr>
           <a:lstStyle/>
           <a:p>
-            <a:pPr algn="l" indent="0" marL="0">
+            <a:pPr marL="0" indent="0" algn="l">
               <a:buNone/>
             </a:pPr>
             <a:r>
@@ -5555,6 +5514,13 @@
             <a:tailEnd type="triangle"/>
           </a:ln>
         </p:spPr>
+        <p:txBody>
+          <a:bodyPr/>
+          <a:lstStyle/>
+          <a:p>
+            <a:endParaRPr lang="en-US"/>
+          </a:p>
+        </p:txBody>
       </p:sp>
       <p:sp>
         <p:nvSpPr>
@@ -5585,7 +5551,7 @@
           </a:bodyPr>
           <a:lstStyle/>
           <a:p>
-            <a:pPr algn="l" indent="0" marL="0">
+            <a:pPr marL="0" indent="0" algn="l">
               <a:buNone/>
             </a:pPr>
             <a:r>
@@ -5629,7 +5595,7 @@
           </a:bodyPr>
           <a:lstStyle/>
           <a:p>
-            <a:pPr algn="l" indent="0" marL="0">
+            <a:pPr marL="0" indent="0" algn="l">
               <a:buNone/>
             </a:pPr>
             <a:r>
@@ -5668,6 +5634,13 @@
             <a:tailEnd type="triangle"/>
           </a:ln>
         </p:spPr>
+        <p:txBody>
+          <a:bodyPr/>
+          <a:lstStyle/>
+          <a:p>
+            <a:endParaRPr lang="en-US"/>
+          </a:p>
+        </p:txBody>
       </p:sp>
       <p:sp>
         <p:nvSpPr>
@@ -5698,7 +5671,7 @@
           </a:bodyPr>
           <a:lstStyle/>
           <a:p>
-            <a:pPr algn="l" indent="0" marL="0">
+            <a:pPr marL="0" indent="0" algn="l">
               <a:buNone/>
             </a:pPr>
             <a:r>
@@ -5742,7 +5715,7 @@
           </a:bodyPr>
           <a:lstStyle/>
           <a:p>
-            <a:pPr algn="l" indent="0" marL="0">
+            <a:pPr marL="0" indent="0" algn="l">
               <a:buNone/>
             </a:pPr>
             <a:r>
@@ -5781,6 +5754,13 @@
             <a:tailEnd type="triangle"/>
           </a:ln>
         </p:spPr>
+        <p:txBody>
+          <a:bodyPr/>
+          <a:lstStyle/>
+          <a:p>
+            <a:endParaRPr lang="en-US"/>
+          </a:p>
+        </p:txBody>
       </p:sp>
       <p:sp>
         <p:nvSpPr>
@@ -5811,7 +5791,7 @@
           </a:bodyPr>
           <a:lstStyle/>
           <a:p>
-            <a:pPr algn="l" indent="0" marL="0">
+            <a:pPr marL="0" indent="0" algn="l">
               <a:buNone/>
             </a:pPr>
             <a:r>
@@ -5855,7 +5835,7 @@
           </a:bodyPr>
           <a:lstStyle/>
           <a:p>
-            <a:pPr algn="l" indent="0" marL="0">
+            <a:pPr marL="0" indent="0" algn="l">
               <a:buNone/>
             </a:pPr>
             <a:r>
@@ -5899,7 +5879,7 @@
           </a:bodyPr>
           <a:lstStyle/>
           <a:p>
-            <a:pPr algn="ctr" indent="0" marL="0">
+            <a:pPr marL="0" indent="0" algn="ctr">
               <a:buNone/>
             </a:pPr>
             <a:r>
@@ -5913,7 +5893,7 @@
             <a:endParaRPr lang="en-US" sz="1160" dirty="0"/>
           </a:p>
           <a:p>
-            <a:pPr algn="ctr" indent="0" marL="0">
+            <a:pPr marL="0" indent="0" algn="ctr">
               <a:buNone/>
             </a:pPr>
             <a:r>
@@ -5949,7 +5929,7 @@
           <a:bodyPr wrap="square" lIns="0" tIns="0" rIns="0" bIns="0" rtlCol="0" anchor="ctr"/>
           <a:lstStyle/>
           <a:p>
-            <a:pPr algn="ctr" indent="0" marL="0">
+            <a:pPr marL="0" indent="0" algn="ctr">
               <a:buNone/>
             </a:pPr>
             <a:r>
@@ -5985,7 +5965,7 @@
           <a:bodyPr wrap="square" lIns="0" tIns="0" rIns="0" bIns="0" rtlCol="0" anchor="ctr"/>
           <a:lstStyle/>
           <a:p>
-            <a:pPr indent="0" marL="0">
+            <a:pPr marL="0" indent="0">
               <a:buNone/>
             </a:pPr>
             <a:r>
@@ -6021,7 +6001,7 @@
           <a:bodyPr wrap="square" lIns="0" tIns="0" rIns="0" bIns="0" rtlCol="0" anchor="ctr"/>
           <a:lstStyle/>
           <a:p>
-            <a:pPr algn="r" indent="0" marL="0">
+            <a:pPr marL="0" indent="0" algn="r">
               <a:buNone/>
             </a:pPr>
             <a:r>
@@ -6052,6 +6032,7 @@
         <a:solidFill>
           <a:srgbClr val="F8FAFC"/>
         </a:solidFill>
+        <a:effectLst/>
       </p:bgPr>
     </p:bg>
     <p:spTree>
@@ -6092,6 +6073,13 @@
             <a:prstDash val="solid"/>
           </a:ln>
         </p:spPr>
+        <p:txBody>
+          <a:bodyPr/>
+          <a:lstStyle/>
+          <a:p>
+            <a:endParaRPr lang="en-US"/>
+          </a:p>
+        </p:txBody>
       </p:sp>
       <p:sp>
         <p:nvSpPr>
@@ -6114,7 +6102,7 @@
           <a:bodyPr wrap="square" rtlCol="0" anchor="ctr"/>
           <a:lstStyle/>
           <a:p>
-            <a:pPr indent="0" marL="0">
+            <a:pPr marL="0" indent="0">
               <a:buNone/>
             </a:pPr>
             <a:r>
@@ -6153,7 +6141,7 @@
           <a:bodyPr wrap="square" lIns="0" tIns="0" rIns="0" bIns="0" rtlCol="0" anchor="ctr"/>
           <a:lstStyle/>
           <a:p>
-            <a:pPr indent="0" marL="0">
+            <a:pPr marL="0" indent="0">
               <a:buNone/>
             </a:pPr>
             <a:r>
@@ -6200,7 +6188,7 @@
           </a:bodyPr>
           <a:lstStyle/>
           <a:p>
-            <a:pPr algn="l" indent="0" marL="0">
+            <a:pPr marL="0" indent="0" algn="l">
               <a:buNone/>
             </a:pPr>
             <a:r>
@@ -6244,7 +6232,7 @@
           </a:bodyPr>
           <a:lstStyle/>
           <a:p>
-            <a:pPr algn="l" indent="0" marL="0">
+            <a:pPr marL="0" indent="0" algn="l">
               <a:buNone/>
             </a:pPr>
             <a:r>
@@ -6288,7 +6276,7 @@
           </a:bodyPr>
           <a:lstStyle/>
           <a:p>
-            <a:pPr algn="l" indent="0" marL="0">
+            <a:pPr marL="0" indent="0" algn="l">
               <a:buNone/>
             </a:pPr>
             <a:r>
@@ -6332,7 +6320,7 @@
           </a:bodyPr>
           <a:lstStyle/>
           <a:p>
-            <a:pPr algn="l" indent="0" marL="0">
+            <a:pPr marL="0" indent="0" algn="l">
               <a:buNone/>
             </a:pPr>
             <a:r>
@@ -6376,7 +6364,7 @@
           </a:bodyPr>
           <a:lstStyle/>
           <a:p>
-            <a:pPr algn="l" indent="0" marL="0">
+            <a:pPr marL="0" indent="0" algn="l">
               <a:buNone/>
             </a:pPr>
             <a:r>
@@ -6420,7 +6408,7 @@
           </a:bodyPr>
           <a:lstStyle/>
           <a:p>
-            <a:pPr algn="l" indent="0" marL="0">
+            <a:pPr marL="0" indent="0" algn="l">
               <a:buNone/>
             </a:pPr>
             <a:r>
@@ -6464,7 +6452,7 @@
           </a:bodyPr>
           <a:lstStyle/>
           <a:p>
-            <a:pPr algn="l" indent="0" marL="0">
+            <a:pPr marL="0" indent="0" algn="l">
               <a:buNone/>
             </a:pPr>
             <a:r>
@@ -6508,7 +6496,7 @@
           </a:bodyPr>
           <a:lstStyle/>
           <a:p>
-            <a:pPr algn="l" indent="0" marL="0">
+            <a:pPr marL="0" indent="0" algn="l">
               <a:buNone/>
             </a:pPr>
             <a:r>
@@ -6552,7 +6540,7 @@
           </a:bodyPr>
           <a:lstStyle/>
           <a:p>
-            <a:pPr algn="l" indent="0" marL="0">
+            <a:pPr marL="0" indent="0" algn="l">
               <a:buNone/>
             </a:pPr>
             <a:r>
@@ -6596,7 +6584,7 @@
           </a:bodyPr>
           <a:lstStyle/>
           <a:p>
-            <a:pPr algn="l" indent="0" marL="0">
+            <a:pPr marL="0" indent="0" algn="l">
               <a:buNone/>
             </a:pPr>
             <a:r>
@@ -6640,7 +6628,7 @@
           </a:bodyPr>
           <a:lstStyle/>
           <a:p>
-            <a:pPr algn="l" indent="0" marL="0">
+            <a:pPr marL="0" indent="0" algn="l">
               <a:buNone/>
             </a:pPr>
             <a:r>
@@ -6684,7 +6672,7 @@
           </a:bodyPr>
           <a:lstStyle/>
           <a:p>
-            <a:pPr algn="l" indent="0" marL="0">
+            <a:pPr marL="0" indent="0" algn="l">
               <a:buNone/>
             </a:pPr>
             <a:r>
@@ -6720,7 +6708,7 @@
           <a:bodyPr wrap="square" lIns="0" tIns="0" rIns="0" bIns="0" rtlCol="0" anchor="ctr"/>
           <a:lstStyle/>
           <a:p>
-            <a:pPr algn="ctr" indent="0" marL="0">
+            <a:pPr marL="0" indent="0" algn="ctr">
               <a:buNone/>
             </a:pPr>
             <a:r>
@@ -6756,7 +6744,7 @@
           <a:bodyPr wrap="square" lIns="0" tIns="0" rIns="0" bIns="0" rtlCol="0" anchor="ctr"/>
           <a:lstStyle/>
           <a:p>
-            <a:pPr indent="0" marL="0">
+            <a:pPr marL="0" indent="0">
               <a:buNone/>
             </a:pPr>
             <a:r>
@@ -6792,7 +6780,7 @@
           <a:bodyPr wrap="square" lIns="0" tIns="0" rIns="0" bIns="0" rtlCol="0" anchor="ctr"/>
           <a:lstStyle/>
           <a:p>
-            <a:pPr algn="r" indent="0" marL="0">
+            <a:pPr marL="0" indent="0" algn="r">
               <a:buNone/>
             </a:pPr>
             <a:r>
@@ -6816,7 +6804,7 @@
 </file>
 
 <file path=ppt/slides/slide15.xml><?xml version="1.0" encoding="utf-8"?>
-<p:sld xmlns:a="http://schemas.openxmlformats.org/drawingml/2006/main" xmlns:p="http://schemas.openxmlformats.org/presentationml/2006/main" xmlns:r="http://schemas.openxmlformats.org/officeDocument/2006/relationships">
+<p:sld xmlns:a="http://schemas.openxmlformats.org/drawingml/2006/main" xmlns:r="http://schemas.openxmlformats.org/officeDocument/2006/relationships" xmlns:p="http://schemas.openxmlformats.org/presentationml/2006/main">
   <p:cSld>
     <p:spTree>
       <p:nvGrpSpPr>
@@ -6824,7 +6812,14 @@
         <p:cNvGrpSpPr/>
         <p:nvPr/>
       </p:nvGrpSpPr>
-      <p:grpSpPr/>
+      <p:grpSpPr>
+        <a:xfrm>
+          <a:off x="0" y="0"/>
+          <a:ext cx="0" cy="0"/>
+          <a:chOff x="0" y="0"/>
+          <a:chExt cx="0" cy="0"/>
+        </a:xfrm>
+      </p:grpSpPr>
       <p:sp>
         <p:nvSpPr>
           <p:cNvPr id="2" name="Rectangle 1"/>
@@ -6866,6 +6861,7 @@
           <a:lstStyle/>
           <a:p>
             <a:pPr algn="ctr"/>
+            <a:endParaRPr/>
           </a:p>
         </p:txBody>
       </p:sp>
@@ -6910,6 +6906,7 @@
           <a:lstStyle/>
           <a:p>
             <a:pPr algn="ctr"/>
+            <a:endParaRPr/>
           </a:p>
         </p:txBody>
       </p:sp>
@@ -7015,6 +7012,7 @@
         <a:solidFill>
           <a:srgbClr val="F8FAFC"/>
         </a:solidFill>
+        <a:effectLst/>
       </p:bgPr>
     </p:bg>
     <p:spTree>
@@ -7055,6 +7053,13 @@
             <a:prstDash val="solid"/>
           </a:ln>
         </p:spPr>
+        <p:txBody>
+          <a:bodyPr/>
+          <a:lstStyle/>
+          <a:p>
+            <a:endParaRPr lang="en-US"/>
+          </a:p>
+        </p:txBody>
       </p:sp>
       <p:sp>
         <p:nvSpPr>
@@ -7077,7 +7082,7 @@
           <a:bodyPr wrap="square" rtlCol="0" anchor="ctr"/>
           <a:lstStyle/>
           <a:p>
-            <a:pPr indent="0" marL="0">
+            <a:pPr marL="0" indent="0">
               <a:buNone/>
             </a:pPr>
             <a:r>
@@ -7116,7 +7121,7 @@
           <a:bodyPr wrap="square" lIns="0" tIns="0" rIns="0" bIns="0" rtlCol="0" anchor="ctr"/>
           <a:lstStyle/>
           <a:p>
-            <a:pPr indent="0" marL="0">
+            <a:pPr marL="0" indent="0">
               <a:buNone/>
             </a:pPr>
             <a:r>
@@ -7163,7 +7168,7 @@
           </a:bodyPr>
           <a:lstStyle/>
           <a:p>
-            <a:pPr algn="l" indent="0" marL="0">
+            <a:pPr marL="0" indent="0" algn="l">
               <a:buNone/>
             </a:pPr>
             <a:r>
@@ -7207,7 +7212,7 @@
           </a:bodyPr>
           <a:lstStyle/>
           <a:p>
-            <a:pPr algn="l" indent="0" marL="0">
+            <a:pPr marL="0" indent="0" algn="l">
               <a:buNone/>
             </a:pPr>
             <a:r>
@@ -7251,7 +7256,7 @@
           </a:bodyPr>
           <a:lstStyle/>
           <a:p>
-            <a:pPr algn="l" indent="0" marL="0">
+            <a:pPr marL="0" indent="0" algn="l">
               <a:buNone/>
             </a:pPr>
             <a:r>
@@ -7295,7 +7300,7 @@
           </a:bodyPr>
           <a:lstStyle/>
           <a:p>
-            <a:pPr algn="l" indent="0" marL="0">
+            <a:pPr marL="0" indent="0" algn="l">
               <a:buNone/>
             </a:pPr>
             <a:r>
@@ -7339,7 +7344,7 @@
           </a:bodyPr>
           <a:lstStyle/>
           <a:p>
-            <a:pPr algn="l" indent="0" marL="0">
+            <a:pPr marL="0" indent="0" algn="l">
               <a:buNone/>
             </a:pPr>
             <a:r>
@@ -7383,7 +7388,7 @@
           </a:bodyPr>
           <a:lstStyle/>
           <a:p>
-            <a:pPr algn="l" indent="0" marL="0">
+            <a:pPr marL="0" indent="0" algn="l">
               <a:buNone/>
             </a:pPr>
             <a:r>
@@ -7427,7 +7432,7 @@
           </a:bodyPr>
           <a:lstStyle/>
           <a:p>
-            <a:pPr algn="l" indent="0" marL="0">
+            <a:pPr marL="0" indent="0" algn="l">
               <a:buNone/>
             </a:pPr>
             <a:r>
@@ -7471,7 +7476,7 @@
           </a:bodyPr>
           <a:lstStyle/>
           <a:p>
-            <a:pPr algn="l" indent="0" marL="0">
+            <a:pPr marL="0" indent="0" algn="l">
               <a:buNone/>
             </a:pPr>
             <a:r>
@@ -7513,7 +7518,7 @@
           <a:bodyPr wrap="square" lIns="0" tIns="0" rIns="0" bIns="0" rtlCol="0" anchor="ctr"/>
           <a:lstStyle/>
           <a:p>
-            <a:pPr algn="ctr" indent="0" marL="0">
+            <a:pPr marL="0" indent="0" algn="ctr">
               <a:buNone/>
             </a:pPr>
             <a:r>
@@ -7549,7 +7554,7 @@
           <a:bodyPr wrap="square" lIns="0" tIns="0" rIns="0" bIns="0" rtlCol="0" anchor="ctr"/>
           <a:lstStyle/>
           <a:p>
-            <a:pPr algn="ctr" indent="0" marL="0">
+            <a:pPr marL="0" indent="0" algn="ctr">
               <a:buNone/>
             </a:pPr>
             <a:r>
@@ -7585,7 +7590,7 @@
           <a:bodyPr wrap="square" lIns="0" tIns="0" rIns="0" bIns="0" rtlCol="0" anchor="ctr"/>
           <a:lstStyle/>
           <a:p>
-            <a:pPr indent="0" marL="0">
+            <a:pPr marL="0" indent="0">
               <a:buNone/>
             </a:pPr>
             <a:r>
@@ -7621,7 +7626,7 @@
           <a:bodyPr wrap="square" lIns="0" tIns="0" rIns="0" bIns="0" rtlCol="0" anchor="ctr"/>
           <a:lstStyle/>
           <a:p>
-            <a:pPr algn="r" indent="0" marL="0">
+            <a:pPr marL="0" indent="0" algn="r">
               <a:buNone/>
             </a:pPr>
             <a:r>
@@ -7652,6 +7657,7 @@
         <a:solidFill>
           <a:srgbClr val="F8FAFC"/>
         </a:solidFill>
+        <a:effectLst/>
       </p:bgPr>
     </p:bg>
     <p:spTree>
@@ -7692,6 +7698,13 @@
             <a:prstDash val="solid"/>
           </a:ln>
         </p:spPr>
+        <p:txBody>
+          <a:bodyPr/>
+          <a:lstStyle/>
+          <a:p>
+            <a:endParaRPr lang="en-US"/>
+          </a:p>
+        </p:txBody>
       </p:sp>
       <p:sp>
         <p:nvSpPr>
@@ -7714,7 +7727,7 @@
           <a:bodyPr wrap="square" rtlCol="0" anchor="ctr"/>
           <a:lstStyle/>
           <a:p>
-            <a:pPr indent="0" marL="0">
+            <a:pPr marL="0" indent="0">
               <a:buNone/>
             </a:pPr>
             <a:r>
@@ -7753,7 +7766,7 @@
           <a:bodyPr wrap="square" lIns="0" tIns="0" rIns="0" bIns="0" rtlCol="0" anchor="ctr"/>
           <a:lstStyle/>
           <a:p>
-            <a:pPr indent="0" marL="0">
+            <a:pPr marL="0" indent="0">
               <a:buNone/>
             </a:pPr>
             <a:r>
@@ -7795,6 +7808,13 @@
             <a:prstDash val="solid"/>
           </a:ln>
         </p:spPr>
+        <p:txBody>
+          <a:bodyPr/>
+          <a:lstStyle/>
+          <a:p>
+            <a:endParaRPr lang="en-US"/>
+          </a:p>
+        </p:txBody>
       </p:sp>
       <p:sp>
         <p:nvSpPr>
@@ -7817,7 +7837,7 @@
           <a:bodyPr wrap="square" lIns="0" tIns="0" rIns="0" bIns="0" rtlCol="0" anchor="ctr"/>
           <a:lstStyle/>
           <a:p>
-            <a:pPr algn="ctr" indent="0" marL="0">
+            <a:pPr marL="0" indent="0" algn="ctr">
               <a:buNone/>
             </a:pPr>
             <a:r>
@@ -7861,7 +7881,7 @@
           </a:bodyPr>
           <a:lstStyle/>
           <a:p>
-            <a:pPr algn="l" indent="0" marL="0">
+            <a:pPr marL="0" indent="0" algn="l">
               <a:buNone/>
             </a:pPr>
             <a:r>
@@ -7905,7 +7925,7 @@
           </a:bodyPr>
           <a:lstStyle/>
           <a:p>
-            <a:pPr algn="l" indent="0" marL="0">
+            <a:pPr marL="0" indent="0" algn="l">
               <a:buNone/>
             </a:pPr>
             <a:r>
@@ -7949,7 +7969,7 @@
           </a:bodyPr>
           <a:lstStyle/>
           <a:p>
-            <a:pPr algn="l" indent="0" marL="0">
+            <a:pPr marL="0" indent="0" algn="l">
               <a:buNone/>
             </a:pPr>
             <a:r>
@@ -7993,7 +8013,7 @@
           </a:bodyPr>
           <a:lstStyle/>
           <a:p>
-            <a:pPr algn="l" indent="0" marL="0">
+            <a:pPr marL="0" indent="0" algn="l">
               <a:buNone/>
             </a:pPr>
             <a:r>
@@ -8037,7 +8057,7 @@
           </a:bodyPr>
           <a:lstStyle/>
           <a:p>
-            <a:pPr algn="l" indent="0" marL="0">
+            <a:pPr marL="0" indent="0" algn="l">
               <a:buNone/>
             </a:pPr>
             <a:r>
@@ -8076,6 +8096,13 @@
             <a:prstDash val="solid"/>
           </a:ln>
         </p:spPr>
+        <p:txBody>
+          <a:bodyPr/>
+          <a:lstStyle/>
+          <a:p>
+            <a:endParaRPr lang="en-US"/>
+          </a:p>
+        </p:txBody>
       </p:sp>
       <p:sp>
         <p:nvSpPr>
@@ -8098,7 +8125,7 @@
           <a:bodyPr wrap="square" lIns="0" tIns="0" rIns="0" bIns="0" rtlCol="0" anchor="ctr"/>
           <a:lstStyle/>
           <a:p>
-            <a:pPr algn="ctr" indent="0" marL="0">
+            <a:pPr marL="0" indent="0" algn="ctr">
               <a:buNone/>
             </a:pPr>
             <a:r>
@@ -8142,7 +8169,7 @@
           </a:bodyPr>
           <a:lstStyle/>
           <a:p>
-            <a:pPr algn="l" indent="0" marL="0">
+            <a:pPr marL="0" indent="0" algn="l">
               <a:buNone/>
             </a:pPr>
             <a:r>
@@ -8186,7 +8213,7 @@
           </a:bodyPr>
           <a:lstStyle/>
           <a:p>
-            <a:pPr algn="l" indent="0" marL="0">
+            <a:pPr marL="0" indent="0" algn="l">
               <a:buNone/>
             </a:pPr>
             <a:r>
@@ -8230,7 +8257,7 @@
           </a:bodyPr>
           <a:lstStyle/>
           <a:p>
-            <a:pPr algn="l" indent="0" marL="0">
+            <a:pPr marL="0" indent="0" algn="l">
               <a:buNone/>
             </a:pPr>
             <a:r>
@@ -8274,7 +8301,7 @@
           </a:bodyPr>
           <a:lstStyle/>
           <a:p>
-            <a:pPr algn="l" indent="0" marL="0">
+            <a:pPr marL="0" indent="0" algn="l">
               <a:buNone/>
             </a:pPr>
             <a:r>
@@ -8318,7 +8345,7 @@
           </a:bodyPr>
           <a:lstStyle/>
           <a:p>
-            <a:pPr algn="l" indent="0" marL="0">
+            <a:pPr marL="0" indent="0" algn="l">
               <a:buNone/>
             </a:pPr>
             <a:r>
@@ -8357,6 +8384,13 @@
             <a:tailEnd type="triangle"/>
           </a:ln>
         </p:spPr>
+        <p:txBody>
+          <a:bodyPr/>
+          <a:lstStyle/>
+          <a:p>
+            <a:endParaRPr lang="en-US"/>
+          </a:p>
+        </p:txBody>
       </p:sp>
       <p:sp>
         <p:nvSpPr>
@@ -8379,7 +8413,7 @@
           <a:bodyPr wrap="square" lIns="0" tIns="0" rIns="0" bIns="0" rtlCol="0" anchor="ctr"/>
           <a:lstStyle/>
           <a:p>
-            <a:pPr algn="ctr" indent="0" marL="0">
+            <a:pPr marL="0" indent="0" algn="ctr">
               <a:buNone/>
             </a:pPr>
             <a:r>
@@ -8415,7 +8449,7 @@
           <a:bodyPr wrap="square" lIns="0" tIns="0" rIns="0" bIns="0" rtlCol="0" anchor="ctr"/>
           <a:lstStyle/>
           <a:p>
-            <a:pPr indent="0" marL="0">
+            <a:pPr marL="0" indent="0">
               <a:buNone/>
             </a:pPr>
             <a:r>
@@ -8451,7 +8485,7 @@
           <a:bodyPr wrap="square" lIns="0" tIns="0" rIns="0" bIns="0" rtlCol="0" anchor="ctr"/>
           <a:lstStyle/>
           <a:p>
-            <a:pPr algn="r" indent="0" marL="0">
+            <a:pPr marL="0" indent="0" algn="r">
               <a:buNone/>
             </a:pPr>
             <a:r>
@@ -8482,6 +8516,7 @@
         <a:solidFill>
           <a:srgbClr val="F8FAFC"/>
         </a:solidFill>
+        <a:effectLst/>
       </p:bgPr>
     </p:bg>
     <p:spTree>
@@ -8522,6 +8557,13 @@
             <a:prstDash val="solid"/>
           </a:ln>
         </p:spPr>
+        <p:txBody>
+          <a:bodyPr/>
+          <a:lstStyle/>
+          <a:p>
+            <a:endParaRPr lang="en-US"/>
+          </a:p>
+        </p:txBody>
       </p:sp>
       <p:sp>
         <p:nvSpPr>
@@ -8544,7 +8586,7 @@
           <a:bodyPr wrap="square" rtlCol="0" anchor="ctr"/>
           <a:lstStyle/>
           <a:p>
-            <a:pPr indent="0" marL="0">
+            <a:pPr marL="0" indent="0">
               <a:buNone/>
             </a:pPr>
             <a:r>
@@ -8583,7 +8625,7 @@
           <a:bodyPr wrap="square" lIns="0" tIns="0" rIns="0" bIns="0" rtlCol="0" anchor="ctr"/>
           <a:lstStyle/>
           <a:p>
-            <a:pPr indent="0" marL="0">
+            <a:pPr marL="0" indent="0">
               <a:buNone/>
             </a:pPr>
             <a:r>
@@ -8627,6 +8669,13 @@
             <a:prstDash val="solid"/>
           </a:ln>
         </p:spPr>
+        <p:txBody>
+          <a:bodyPr/>
+          <a:lstStyle/>
+          <a:p>
+            <a:endParaRPr lang="en-US"/>
+          </a:p>
+        </p:txBody>
       </p:sp>
       <p:sp>
         <p:nvSpPr>
@@ -8649,7 +8698,7 @@
           <a:bodyPr wrap="square" lIns="0" tIns="0" rIns="0" bIns="0" rtlCol="0" anchor="ctr"/>
           <a:lstStyle/>
           <a:p>
-            <a:pPr indent="0" marL="0">
+            <a:pPr marL="0" indent="0">
               <a:buNone/>
             </a:pPr>
             <a:r>
@@ -8693,7 +8742,7 @@
           </a:bodyPr>
           <a:lstStyle/>
           <a:p>
-            <a:pPr algn="l" indent="0" marL="0">
+            <a:pPr marL="0" indent="0" algn="l">
               <a:buNone/>
             </a:pPr>
             <a:r>
@@ -8707,7 +8756,7 @@
             <a:endParaRPr lang="en-US" sz="1050" dirty="0"/>
           </a:p>
           <a:p>
-            <a:pPr algn="l" indent="0" marL="0">
+            <a:pPr marL="0" indent="0" algn="l">
               <a:buNone/>
             </a:pPr>
             <a:r>
@@ -8721,7 +8770,7 @@
             <a:endParaRPr lang="en-US" sz="1050" dirty="0"/>
           </a:p>
           <a:p>
-            <a:pPr algn="l" indent="0" marL="0">
+            <a:pPr marL="0" indent="0" algn="l">
               <a:buNone/>
             </a:pPr>
             <a:r>
@@ -8735,7 +8784,7 @@
             <a:endParaRPr lang="en-US" sz="1050" dirty="0"/>
           </a:p>
           <a:p>
-            <a:pPr algn="l" indent="0" marL="0">
+            <a:pPr marL="0" indent="0" algn="l">
               <a:buNone/>
             </a:pPr>
             <a:r>
@@ -8779,7 +8828,7 @@
           </a:bodyPr>
           <a:lstStyle/>
           <a:p>
-            <a:pPr algn="l" indent="0" marL="0">
+            <a:pPr marL="0" indent="0" algn="l">
               <a:buNone/>
             </a:pPr>
             <a:r>
@@ -8793,7 +8842,7 @@
             <a:endParaRPr lang="en-US" sz="1050" dirty="0"/>
           </a:p>
           <a:p>
-            <a:pPr algn="l" indent="0" marL="0">
+            <a:pPr marL="0" indent="0" algn="l">
               <a:buNone/>
             </a:pPr>
             <a:r>
@@ -8807,7 +8856,7 @@
             <a:endParaRPr lang="en-US" sz="1050" dirty="0"/>
           </a:p>
           <a:p>
-            <a:pPr algn="l" indent="0" marL="0">
+            <a:pPr marL="0" indent="0" algn="l">
               <a:buNone/>
             </a:pPr>
             <a:r>
@@ -8821,7 +8870,7 @@
             <a:endParaRPr lang="en-US" sz="1050" dirty="0"/>
           </a:p>
           <a:p>
-            <a:pPr algn="l" indent="0" marL="0">
+            <a:pPr marL="0" indent="0" algn="l">
               <a:buNone/>
             </a:pPr>
             <a:r>
@@ -8865,7 +8914,7 @@
           </a:bodyPr>
           <a:lstStyle/>
           <a:p>
-            <a:pPr algn="l" indent="0" marL="0">
+            <a:pPr marL="0" indent="0" algn="l">
               <a:buNone/>
             </a:pPr>
             <a:r>
@@ -8879,7 +8928,7 @@
             <a:endParaRPr lang="en-US" sz="1050" dirty="0"/>
           </a:p>
           <a:p>
-            <a:pPr algn="l" indent="0" marL="0">
+            <a:pPr marL="0" indent="0" algn="l">
               <a:buNone/>
             </a:pPr>
             <a:r>
@@ -8893,7 +8942,7 @@
             <a:endParaRPr lang="en-US" sz="1050" dirty="0"/>
           </a:p>
           <a:p>
-            <a:pPr algn="l" indent="0" marL="0">
+            <a:pPr marL="0" indent="0" algn="l">
               <a:buNone/>
             </a:pPr>
             <a:r>
@@ -8907,7 +8956,7 @@
             <a:endParaRPr lang="en-US" sz="1050" dirty="0"/>
           </a:p>
           <a:p>
-            <a:pPr algn="l" indent="0" marL="0">
+            <a:pPr marL="0" indent="0" algn="l">
               <a:buNone/>
             </a:pPr>
             <a:r>
@@ -8951,7 +9000,7 @@
           </a:bodyPr>
           <a:lstStyle/>
           <a:p>
-            <a:pPr algn="l" indent="0" marL="0">
+            <a:pPr marL="0" indent="0" algn="l">
               <a:buNone/>
             </a:pPr>
             <a:r>
@@ -8965,7 +9014,7 @@
             <a:endParaRPr lang="en-US" sz="1050" dirty="0"/>
           </a:p>
           <a:p>
-            <a:pPr algn="l" indent="0" marL="0">
+            <a:pPr marL="0" indent="0" algn="l">
               <a:buNone/>
             </a:pPr>
             <a:r>
@@ -8979,7 +9028,7 @@
             <a:endParaRPr lang="en-US" sz="1050" dirty="0"/>
           </a:p>
           <a:p>
-            <a:pPr algn="l" indent="0" marL="0">
+            <a:pPr marL="0" indent="0" algn="l">
               <a:buNone/>
             </a:pPr>
             <a:r>
@@ -8993,7 +9042,7 @@
             <a:endParaRPr lang="en-US" sz="1050" dirty="0"/>
           </a:p>
           <a:p>
-            <a:pPr algn="l" indent="0" marL="0">
+            <a:pPr marL="0" indent="0" algn="l">
               <a:buNone/>
             </a:pPr>
             <a:r>
@@ -9007,7 +9056,7 @@
             <a:endParaRPr lang="en-US" sz="1050" dirty="0"/>
           </a:p>
           <a:p>
-            <a:pPr algn="l" indent="0" marL="0">
+            <a:pPr marL="0" indent="0" algn="l">
               <a:buNone/>
             </a:pPr>
             <a:r>
@@ -9048,6 +9097,13 @@
             <a:prstDash val="solid"/>
           </a:ln>
         </p:spPr>
+        <p:txBody>
+          <a:bodyPr/>
+          <a:lstStyle/>
+          <a:p>
+            <a:endParaRPr lang="en-US"/>
+          </a:p>
+        </p:txBody>
       </p:sp>
       <p:sp>
         <p:nvSpPr>
@@ -9070,7 +9126,7 @@
           <a:bodyPr wrap="square" lIns="0" tIns="0" rIns="0" bIns="0" rtlCol="0" anchor="ctr"/>
           <a:lstStyle/>
           <a:p>
-            <a:pPr algn="ctr" indent="0" marL="0">
+            <a:pPr marL="0" indent="0" algn="ctr">
               <a:buNone/>
             </a:pPr>
             <a:r>
@@ -9106,7 +9162,7 @@
           <a:bodyPr wrap="square" lIns="0" tIns="0" rIns="0" bIns="0" rtlCol="0" anchor="ctr"/>
           <a:lstStyle/>
           <a:p>
-            <a:pPr algn="ctr" indent="0" marL="0">
+            <a:pPr marL="0" indent="0" algn="ctr">
               <a:buNone/>
             </a:pPr>
             <a:r>
@@ -9147,6 +9203,13 @@
             <a:prstDash val="solid"/>
           </a:ln>
         </p:spPr>
+        <p:txBody>
+          <a:bodyPr/>
+          <a:lstStyle/>
+          <a:p>
+            <a:endParaRPr lang="en-US"/>
+          </a:p>
+        </p:txBody>
       </p:sp>
       <p:sp>
         <p:nvSpPr>
@@ -9169,7 +9232,7 @@
           <a:bodyPr wrap="square" lIns="0" tIns="0" rIns="0" bIns="0" rtlCol="0" anchor="ctr"/>
           <a:lstStyle/>
           <a:p>
-            <a:pPr algn="ctr" indent="0" marL="0">
+            <a:pPr marL="0" indent="0" algn="ctr">
               <a:buNone/>
             </a:pPr>
             <a:r>
@@ -9205,7 +9268,7 @@
           <a:bodyPr wrap="square" lIns="0" tIns="0" rIns="0" bIns="0" rtlCol="0" anchor="ctr"/>
           <a:lstStyle/>
           <a:p>
-            <a:pPr algn="ctr" indent="0" marL="0">
+            <a:pPr marL="0" indent="0" algn="ctr">
               <a:buNone/>
             </a:pPr>
             <a:r>
@@ -9246,6 +9309,13 @@
             <a:prstDash val="solid"/>
           </a:ln>
         </p:spPr>
+        <p:txBody>
+          <a:bodyPr/>
+          <a:lstStyle/>
+          <a:p>
+            <a:endParaRPr lang="en-US"/>
+          </a:p>
+        </p:txBody>
       </p:sp>
       <p:sp>
         <p:nvSpPr>
@@ -9268,7 +9338,7 @@
           <a:bodyPr wrap="square" lIns="0" tIns="0" rIns="0" bIns="0" rtlCol="0" anchor="ctr"/>
           <a:lstStyle/>
           <a:p>
-            <a:pPr algn="ctr" indent="0" marL="0">
+            <a:pPr marL="0" indent="0" algn="ctr">
               <a:buNone/>
             </a:pPr>
             <a:r>
@@ -9304,7 +9374,7 @@
           <a:bodyPr wrap="square" lIns="0" tIns="0" rIns="0" bIns="0" rtlCol="0" anchor="ctr"/>
           <a:lstStyle/>
           <a:p>
-            <a:pPr algn="ctr" indent="0" marL="0">
+            <a:pPr marL="0" indent="0" algn="ctr">
               <a:buNone/>
             </a:pPr>
             <a:r>
@@ -9345,6 +9415,13 @@
             <a:prstDash val="solid"/>
           </a:ln>
         </p:spPr>
+        <p:txBody>
+          <a:bodyPr/>
+          <a:lstStyle/>
+          <a:p>
+            <a:endParaRPr lang="en-US"/>
+          </a:p>
+        </p:txBody>
       </p:sp>
       <p:sp>
         <p:nvSpPr>
@@ -9367,7 +9444,7 @@
           <a:bodyPr wrap="square" lIns="0" tIns="0" rIns="0" bIns="0" rtlCol="0" anchor="ctr"/>
           <a:lstStyle/>
           <a:p>
-            <a:pPr algn="ctr" indent="0" marL="0">
+            <a:pPr marL="0" indent="0" algn="ctr">
               <a:buNone/>
             </a:pPr>
             <a:r>
@@ -9403,7 +9480,7 @@
           <a:bodyPr wrap="square" lIns="0" tIns="0" rIns="0" bIns="0" rtlCol="0" anchor="ctr"/>
           <a:lstStyle/>
           <a:p>
-            <a:pPr algn="ctr" indent="0" marL="0">
+            <a:pPr marL="0" indent="0" algn="ctr">
               <a:buNone/>
             </a:pPr>
             <a:r>
@@ -9444,6 +9521,13 @@
             <a:prstDash val="solid"/>
           </a:ln>
         </p:spPr>
+        <p:txBody>
+          <a:bodyPr/>
+          <a:lstStyle/>
+          <a:p>
+            <a:endParaRPr lang="en-US"/>
+          </a:p>
+        </p:txBody>
       </p:sp>
       <p:sp>
         <p:nvSpPr>
@@ -9466,7 +9550,7 @@
           <a:bodyPr wrap="square" lIns="0" tIns="0" rIns="0" bIns="0" rtlCol="0" anchor="ctr"/>
           <a:lstStyle/>
           <a:p>
-            <a:pPr algn="ctr" indent="0" marL="0">
+            <a:pPr marL="0" indent="0" algn="ctr">
               <a:buNone/>
             </a:pPr>
             <a:r>
@@ -9502,7 +9586,7 @@
           <a:bodyPr wrap="square" lIns="0" tIns="0" rIns="0" bIns="0" rtlCol="0" anchor="ctr"/>
           <a:lstStyle/>
           <a:p>
-            <a:pPr algn="ctr" indent="0" marL="0">
+            <a:pPr marL="0" indent="0" algn="ctr">
               <a:buNone/>
             </a:pPr>
             <a:r>
@@ -9543,6 +9627,13 @@
             <a:prstDash val="solid"/>
           </a:ln>
         </p:spPr>
+        <p:txBody>
+          <a:bodyPr/>
+          <a:lstStyle/>
+          <a:p>
+            <a:endParaRPr lang="en-US"/>
+          </a:p>
+        </p:txBody>
       </p:sp>
       <p:sp>
         <p:nvSpPr>
@@ -9565,7 +9656,7 @@
           <a:bodyPr wrap="square" lIns="0" tIns="0" rIns="0" bIns="0" rtlCol="0" anchor="ctr"/>
           <a:lstStyle/>
           <a:p>
-            <a:pPr algn="ctr" indent="0" marL="0">
+            <a:pPr marL="0" indent="0" algn="ctr">
               <a:buNone/>
             </a:pPr>
             <a:r>
@@ -9601,7 +9692,7 @@
           <a:bodyPr wrap="square" lIns="0" tIns="0" rIns="0" bIns="0" rtlCol="0" anchor="ctr"/>
           <a:lstStyle/>
           <a:p>
-            <a:pPr algn="ctr" indent="0" marL="0">
+            <a:pPr marL="0" indent="0" algn="ctr">
               <a:buNone/>
             </a:pPr>
             <a:r>
@@ -9637,7 +9728,7 @@
           <a:bodyPr wrap="square" lIns="0" tIns="0" rIns="0" bIns="0" rtlCol="0" anchor="ctr"/>
           <a:lstStyle/>
           <a:p>
-            <a:pPr algn="ctr" indent="0" marL="0">
+            <a:pPr marL="0" indent="0" algn="ctr">
               <a:buNone/>
             </a:pPr>
             <a:r>
@@ -9673,7 +9764,7 @@
           <a:bodyPr wrap="square" lIns="0" tIns="0" rIns="0" bIns="0" rtlCol="0" anchor="ctr"/>
           <a:lstStyle/>
           <a:p>
-            <a:pPr indent="0" marL="0">
+            <a:pPr marL="0" indent="0">
               <a:buNone/>
             </a:pPr>
             <a:r>
@@ -9709,7 +9800,7 @@
           <a:bodyPr wrap="square" lIns="0" tIns="0" rIns="0" bIns="0" rtlCol="0" anchor="ctr"/>
           <a:lstStyle/>
           <a:p>
-            <a:pPr algn="r" indent="0" marL="0">
+            <a:pPr marL="0" indent="0" algn="r">
               <a:buNone/>
             </a:pPr>
             <a:r>
@@ -9740,6 +9831,7 @@
         <a:solidFill>
           <a:srgbClr val="F8FAFC"/>
         </a:solidFill>
+        <a:effectLst/>
       </p:bgPr>
     </p:bg>
     <p:spTree>
@@ -9780,6 +9872,13 @@
             <a:prstDash val="solid"/>
           </a:ln>
         </p:spPr>
+        <p:txBody>
+          <a:bodyPr/>
+          <a:lstStyle/>
+          <a:p>
+            <a:endParaRPr lang="en-US"/>
+          </a:p>
+        </p:txBody>
       </p:sp>
       <p:sp>
         <p:nvSpPr>
@@ -9802,7 +9901,7 @@
           <a:bodyPr wrap="square" rtlCol="0" anchor="ctr"/>
           <a:lstStyle/>
           <a:p>
-            <a:pPr indent="0" marL="0">
+            <a:pPr marL="0" indent="0">
               <a:buNone/>
             </a:pPr>
             <a:r>
@@ -9841,7 +9940,7 @@
           <a:bodyPr wrap="square" lIns="0" tIns="0" rIns="0" bIns="0" rtlCol="0" anchor="ctr"/>
           <a:lstStyle/>
           <a:p>
-            <a:pPr indent="0" marL="0">
+            <a:pPr marL="0" indent="0">
               <a:buNone/>
             </a:pPr>
             <a:r>
@@ -9888,7 +9987,7 @@
           </a:bodyPr>
           <a:lstStyle/>
           <a:p>
-            <a:pPr algn="l" indent="0" marL="0">
+            <a:pPr marL="0" indent="0" algn="l">
               <a:buNone/>
             </a:pPr>
             <a:r>
@@ -9902,7 +10001,7 @@
             <a:endParaRPr lang="en-US" sz="1020" dirty="0"/>
           </a:p>
           <a:p>
-            <a:pPr algn="l" indent="0" marL="0">
+            <a:pPr marL="0" indent="0" algn="l">
               <a:buNone/>
             </a:pPr>
             <a:r>
@@ -9916,7 +10015,7 @@
             <a:endParaRPr lang="en-US" sz="1020" dirty="0"/>
           </a:p>
           <a:p>
-            <a:pPr algn="l" indent="0" marL="0">
+            <a:pPr marL="0" indent="0" algn="l">
               <a:buNone/>
             </a:pPr>
             <a:r>
@@ -9955,6 +10054,13 @@
             <a:tailEnd type="triangle"/>
           </a:ln>
         </p:spPr>
+        <p:txBody>
+          <a:bodyPr/>
+          <a:lstStyle/>
+          <a:p>
+            <a:endParaRPr lang="en-US"/>
+          </a:p>
+        </p:txBody>
       </p:sp>
       <p:sp>
         <p:nvSpPr>
@@ -9985,7 +10091,7 @@
           </a:bodyPr>
           <a:lstStyle/>
           <a:p>
-            <a:pPr algn="l" indent="0" marL="0">
+            <a:pPr marL="0" indent="0" algn="l">
               <a:buNone/>
             </a:pPr>
             <a:r>
@@ -9999,7 +10105,7 @@
             <a:endParaRPr lang="en-US" sz="1020" dirty="0"/>
           </a:p>
           <a:p>
-            <a:pPr algn="l" indent="0" marL="0">
+            <a:pPr marL="0" indent="0" algn="l">
               <a:buNone/>
             </a:pPr>
             <a:r>
@@ -10013,7 +10119,7 @@
             <a:endParaRPr lang="en-US" sz="1020" dirty="0"/>
           </a:p>
           <a:p>
-            <a:pPr algn="l" indent="0" marL="0">
+            <a:pPr marL="0" indent="0" algn="l">
               <a:buNone/>
             </a:pPr>
             <a:r>
@@ -10052,6 +10158,13 @@
             <a:tailEnd type="triangle"/>
           </a:ln>
         </p:spPr>
+        <p:txBody>
+          <a:bodyPr/>
+          <a:lstStyle/>
+          <a:p>
+            <a:endParaRPr lang="en-US"/>
+          </a:p>
+        </p:txBody>
       </p:sp>
       <p:sp>
         <p:nvSpPr>
@@ -10082,7 +10195,7 @@
           </a:bodyPr>
           <a:lstStyle/>
           <a:p>
-            <a:pPr algn="l" indent="0" marL="0">
+            <a:pPr marL="0" indent="0" algn="l">
               <a:buNone/>
             </a:pPr>
             <a:r>
@@ -10096,7 +10209,7 @@
             <a:endParaRPr lang="en-US" sz="1020" dirty="0"/>
           </a:p>
           <a:p>
-            <a:pPr algn="l" indent="0" marL="0">
+            <a:pPr marL="0" indent="0" algn="l">
               <a:buNone/>
             </a:pPr>
             <a:r>
@@ -10110,7 +10223,7 @@
             <a:endParaRPr lang="en-US" sz="1020" dirty="0"/>
           </a:p>
           <a:p>
-            <a:pPr algn="l" indent="0" marL="0">
+            <a:pPr marL="0" indent="0" algn="l">
               <a:buNone/>
             </a:pPr>
             <a:r>
@@ -10149,6 +10262,13 @@
             <a:tailEnd type="triangle"/>
           </a:ln>
         </p:spPr>
+        <p:txBody>
+          <a:bodyPr/>
+          <a:lstStyle/>
+          <a:p>
+            <a:endParaRPr lang="en-US"/>
+          </a:p>
+        </p:txBody>
       </p:sp>
       <p:sp>
         <p:nvSpPr>
@@ -10179,7 +10299,7 @@
           </a:bodyPr>
           <a:lstStyle/>
           <a:p>
-            <a:pPr algn="l" indent="0" marL="0">
+            <a:pPr marL="0" indent="0" algn="l">
               <a:buNone/>
             </a:pPr>
             <a:r>
@@ -10193,7 +10313,7 @@
             <a:endParaRPr lang="en-US" sz="1020" dirty="0"/>
           </a:p>
           <a:p>
-            <a:pPr algn="l" indent="0" marL="0">
+            <a:pPr marL="0" indent="0" algn="l">
               <a:buNone/>
             </a:pPr>
             <a:r>
@@ -10207,7 +10327,7 @@
             <a:endParaRPr lang="en-US" sz="1020" dirty="0"/>
           </a:p>
           <a:p>
-            <a:pPr algn="l" indent="0" marL="0">
+            <a:pPr marL="0" indent="0" algn="l">
               <a:buNone/>
             </a:pPr>
             <a:r>
@@ -10246,6 +10366,13 @@
             <a:tailEnd type="triangle"/>
           </a:ln>
         </p:spPr>
+        <p:txBody>
+          <a:bodyPr/>
+          <a:lstStyle/>
+          <a:p>
+            <a:endParaRPr lang="en-US"/>
+          </a:p>
+        </p:txBody>
       </p:sp>
       <p:sp>
         <p:nvSpPr>
@@ -10276,7 +10403,7 @@
           </a:bodyPr>
           <a:lstStyle/>
           <a:p>
-            <a:pPr algn="l" indent="0" marL="0">
+            <a:pPr marL="0" indent="0" algn="l">
               <a:buNone/>
             </a:pPr>
             <a:r>
@@ -10290,7 +10417,7 @@
             <a:endParaRPr lang="en-US" sz="1020" dirty="0"/>
           </a:p>
           <a:p>
-            <a:pPr algn="l" indent="0" marL="0">
+            <a:pPr marL="0" indent="0" algn="l">
               <a:buNone/>
             </a:pPr>
             <a:r>
@@ -10304,7 +10431,7 @@
             <a:endParaRPr lang="en-US" sz="1020" dirty="0"/>
           </a:p>
           <a:p>
-            <a:pPr algn="l" indent="0" marL="0">
+            <a:pPr marL="0" indent="0" algn="l">
               <a:buNone/>
             </a:pPr>
             <a:r>
@@ -10343,6 +10470,13 @@
             <a:tailEnd type="triangle"/>
           </a:ln>
         </p:spPr>
+        <p:txBody>
+          <a:bodyPr/>
+          <a:lstStyle/>
+          <a:p>
+            <a:endParaRPr lang="en-US"/>
+          </a:p>
+        </p:txBody>
       </p:sp>
       <p:sp>
         <p:nvSpPr>
@@ -10373,7 +10507,7 @@
           </a:bodyPr>
           <a:lstStyle/>
           <a:p>
-            <a:pPr algn="l" indent="0" marL="0">
+            <a:pPr marL="0" indent="0" algn="l">
               <a:buNone/>
             </a:pPr>
             <a:r>
@@ -10387,7 +10521,7 @@
             <a:endParaRPr lang="en-US" sz="1020" dirty="0"/>
           </a:p>
           <a:p>
-            <a:pPr algn="l" indent="0" marL="0">
+            <a:pPr marL="0" indent="0" algn="l">
               <a:buNone/>
             </a:pPr>
             <a:r>
@@ -10401,7 +10535,7 @@
             <a:endParaRPr lang="en-US" sz="1020" dirty="0"/>
           </a:p>
           <a:p>
-            <a:pPr algn="l" indent="0" marL="0">
+            <a:pPr marL="0" indent="0" algn="l">
               <a:buNone/>
             </a:pPr>
             <a:r>
@@ -10443,7 +10577,7 @@
           <a:bodyPr wrap="square" lIns="1016" tIns="1016" rIns="1016" bIns="1016" rtlCol="0" anchor="ctr"/>
           <a:lstStyle/>
           <a:p>
-            <a:pPr algn="ctr" indent="0" marL="0">
+            <a:pPr marL="0" indent="0" algn="ctr">
               <a:buNone/>
             </a:pPr>
             <a:r>
@@ -10479,7 +10613,7 @@
           <a:bodyPr wrap="square" lIns="0" tIns="0" rIns="0" bIns="0" rtlCol="0" anchor="ctr"/>
           <a:lstStyle/>
           <a:p>
-            <a:pPr algn="ctr" indent="0" marL="0">
+            <a:pPr marL="0" indent="0" algn="ctr">
               <a:buNone/>
             </a:pPr>
             <a:r>
@@ -10515,7 +10649,7 @@
           <a:bodyPr wrap="square" lIns="0" tIns="0" rIns="0" bIns="0" rtlCol="0" anchor="ctr"/>
           <a:lstStyle/>
           <a:p>
-            <a:pPr indent="0" marL="0">
+            <a:pPr marL="0" indent="0">
               <a:buNone/>
             </a:pPr>
             <a:r>
@@ -10551,7 +10685,7 @@
           <a:bodyPr wrap="square" lIns="0" tIns="0" rIns="0" bIns="0" rtlCol="0" anchor="ctr"/>
           <a:lstStyle/>
           <a:p>
-            <a:pPr algn="r" indent="0" marL="0">
+            <a:pPr marL="0" indent="0" algn="r">
               <a:buNone/>
             </a:pPr>
             <a:r>
@@ -10582,6 +10716,7 @@
         <a:solidFill>
           <a:srgbClr val="F8FAFC"/>
         </a:solidFill>
+        <a:effectLst/>
       </p:bgPr>
     </p:bg>
     <p:spTree>
@@ -10622,6 +10757,13 @@
             <a:prstDash val="solid"/>
           </a:ln>
         </p:spPr>
+        <p:txBody>
+          <a:bodyPr/>
+          <a:lstStyle/>
+          <a:p>
+            <a:endParaRPr lang="en-US"/>
+          </a:p>
+        </p:txBody>
       </p:sp>
       <p:sp>
         <p:nvSpPr>
@@ -10644,7 +10786,7 @@
           <a:bodyPr wrap="square" rtlCol="0" anchor="ctr"/>
           <a:lstStyle/>
           <a:p>
-            <a:pPr indent="0" marL="0">
+            <a:pPr marL="0" indent="0">
               <a:buNone/>
             </a:pPr>
             <a:r>
@@ -10683,7 +10825,7 @@
           <a:bodyPr wrap="square" lIns="0" tIns="0" rIns="0" bIns="0" rtlCol="0" anchor="ctr"/>
           <a:lstStyle/>
           <a:p>
-            <a:pPr indent="0" marL="0">
+            <a:pPr marL="0" indent="0">
               <a:buNone/>
             </a:pPr>
             <a:r>
@@ -10730,7 +10872,7 @@
           </a:bodyPr>
           <a:lstStyle/>
           <a:p>
-            <a:pPr algn="l" indent="0" marL="0">
+            <a:pPr marL="0" indent="0" algn="l">
               <a:buNone/>
             </a:pPr>
             <a:r>
@@ -10774,7 +10916,7 @@
           </a:bodyPr>
           <a:lstStyle/>
           <a:p>
-            <a:pPr algn="l" indent="0" marL="0">
+            <a:pPr marL="0" indent="0" algn="l">
               <a:buNone/>
             </a:pPr>
             <a:r>
@@ -10818,7 +10960,7 @@
           </a:bodyPr>
           <a:lstStyle/>
           <a:p>
-            <a:pPr algn="l" indent="0" marL="0">
+            <a:pPr marL="0" indent="0" algn="l">
               <a:buNone/>
             </a:pPr>
             <a:r>
@@ -10862,7 +11004,7 @@
           </a:bodyPr>
           <a:lstStyle/>
           <a:p>
-            <a:pPr algn="l" indent="0" marL="0">
+            <a:pPr marL="0" indent="0" algn="l">
               <a:buNone/>
             </a:pPr>
             <a:r>
@@ -10906,7 +11048,7 @@
           </a:bodyPr>
           <a:lstStyle/>
           <a:p>
-            <a:pPr algn="l" indent="0" marL="0">
+            <a:pPr marL="0" indent="0" algn="l">
               <a:buNone/>
             </a:pPr>
             <a:r>
@@ -10950,7 +11092,7 @@
           </a:bodyPr>
           <a:lstStyle/>
           <a:p>
-            <a:pPr algn="l" indent="0" marL="0">
+            <a:pPr marL="0" indent="0" algn="l">
               <a:buNone/>
             </a:pPr>
             <a:r>
@@ -10994,7 +11136,7 @@
           </a:bodyPr>
           <a:lstStyle/>
           <a:p>
-            <a:pPr algn="l" indent="0" marL="0">
+            <a:pPr marL="0" indent="0" algn="l">
               <a:buNone/>
             </a:pPr>
             <a:r>
@@ -11038,7 +11180,7 @@
           </a:bodyPr>
           <a:lstStyle/>
           <a:p>
-            <a:pPr algn="l" indent="0" marL="0">
+            <a:pPr marL="0" indent="0" algn="l">
               <a:buNone/>
             </a:pPr>
             <a:r>
@@ -11082,7 +11224,7 @@
           </a:bodyPr>
           <a:lstStyle/>
           <a:p>
-            <a:pPr algn="l" indent="0" marL="0">
+            <a:pPr marL="0" indent="0" algn="l">
               <a:buNone/>
             </a:pPr>
             <a:r>
@@ -11126,7 +11268,7 @@
           </a:bodyPr>
           <a:lstStyle/>
           <a:p>
-            <a:pPr algn="l" indent="0" marL="0">
+            <a:pPr marL="0" indent="0" algn="l">
               <a:buNone/>
             </a:pPr>
             <a:r>
@@ -11170,7 +11312,7 @@
           </a:bodyPr>
           <a:lstStyle/>
           <a:p>
-            <a:pPr algn="l" indent="0" marL="0">
+            <a:pPr marL="0" indent="0" algn="l">
               <a:buNone/>
             </a:pPr>
             <a:r>
@@ -11214,7 +11356,7 @@
           </a:bodyPr>
           <a:lstStyle/>
           <a:p>
-            <a:pPr algn="l" indent="0" marL="0">
+            <a:pPr marL="0" indent="0" algn="l">
               <a:buNone/>
             </a:pPr>
             <a:r>
@@ -11258,7 +11400,7 @@
           </a:bodyPr>
           <a:lstStyle/>
           <a:p>
-            <a:pPr algn="l" indent="0" marL="0">
+            <a:pPr marL="0" indent="0" algn="l">
               <a:buNone/>
             </a:pPr>
             <a:r>
@@ -11302,7 +11444,7 @@
           </a:bodyPr>
           <a:lstStyle/>
           <a:p>
-            <a:pPr algn="l" indent="0" marL="0">
+            <a:pPr marL="0" indent="0" algn="l">
               <a:buNone/>
             </a:pPr>
             <a:r>
@@ -11346,7 +11488,7 @@
           </a:bodyPr>
           <a:lstStyle/>
           <a:p>
-            <a:pPr algn="l" indent="0" marL="0">
+            <a:pPr marL="0" indent="0" algn="l">
               <a:buNone/>
             </a:pPr>
             <a:r>
@@ -11390,7 +11532,7 @@
           </a:bodyPr>
           <a:lstStyle/>
           <a:p>
-            <a:pPr algn="l" indent="0" marL="0">
+            <a:pPr marL="0" indent="0" algn="l">
               <a:buNone/>
             </a:pPr>
             <a:r>
@@ -11426,7 +11568,7 @@
           <a:bodyPr wrap="square" lIns="0" tIns="0" rIns="0" bIns="0" rtlCol="0" anchor="ctr"/>
           <a:lstStyle/>
           <a:p>
-            <a:pPr algn="ctr" indent="0" marL="0">
+            <a:pPr marL="0" indent="0" algn="ctr">
               <a:buNone/>
             </a:pPr>
             <a:r>
@@ -11462,7 +11604,7 @@
           <a:bodyPr wrap="square" lIns="0" tIns="0" rIns="0" bIns="0" rtlCol="0" anchor="ctr"/>
           <a:lstStyle/>
           <a:p>
-            <a:pPr indent="0" marL="0">
+            <a:pPr marL="0" indent="0">
               <a:buNone/>
             </a:pPr>
             <a:r>
@@ -11498,7 +11640,7 @@
           <a:bodyPr wrap="square" lIns="0" tIns="0" rIns="0" bIns="0" rtlCol="0" anchor="ctr"/>
           <a:lstStyle/>
           <a:p>
-            <a:pPr algn="r" indent="0" marL="0">
+            <a:pPr marL="0" indent="0" algn="r">
               <a:buNone/>
             </a:pPr>
             <a:r>
@@ -11529,6 +11671,7 @@
         <a:solidFill>
           <a:srgbClr val="F8FAFC"/>
         </a:solidFill>
+        <a:effectLst/>
       </p:bgPr>
     </p:bg>
     <p:spTree>
@@ -11569,6 +11712,13 @@
             <a:prstDash val="solid"/>
           </a:ln>
         </p:spPr>
+        <p:txBody>
+          <a:bodyPr/>
+          <a:lstStyle/>
+          <a:p>
+            <a:endParaRPr lang="en-US"/>
+          </a:p>
+        </p:txBody>
       </p:sp>
       <p:sp>
         <p:nvSpPr>
@@ -11591,7 +11741,7 @@
           <a:bodyPr wrap="square" rtlCol="0" anchor="ctr"/>
           <a:lstStyle/>
           <a:p>
-            <a:pPr indent="0" marL="0">
+            <a:pPr marL="0" indent="0">
               <a:buNone/>
             </a:pPr>
             <a:r>
@@ -11630,7 +11780,7 @@
           <a:bodyPr wrap="square" lIns="0" tIns="0" rIns="0" bIns="0" rtlCol="0" anchor="ctr"/>
           <a:lstStyle/>
           <a:p>
-            <a:pPr indent="0" marL="0">
+            <a:pPr marL="0" indent="0">
               <a:buNone/>
             </a:pPr>
             <a:r>
@@ -11672,6 +11822,13 @@
             <a:prstDash val="solid"/>
           </a:ln>
         </p:spPr>
+        <p:txBody>
+          <a:bodyPr/>
+          <a:lstStyle/>
+          <a:p>
+            <a:endParaRPr lang="en-US"/>
+          </a:p>
+        </p:txBody>
       </p:sp>
       <p:sp>
         <p:nvSpPr>
@@ -11694,7 +11851,7 @@
           <a:bodyPr wrap="square" lIns="0" tIns="0" rIns="0" bIns="0" rtlCol="0" anchor="ctr"/>
           <a:lstStyle/>
           <a:p>
-            <a:pPr algn="ctr" indent="0" marL="0">
+            <a:pPr marL="0" indent="0" algn="ctr">
               <a:buNone/>
             </a:pPr>
             <a:r>
@@ -11730,7 +11887,7 @@
           <a:bodyPr wrap="square" lIns="0" tIns="0" rIns="0" bIns="0" rtlCol="0" anchor="ctr"/>
           <a:lstStyle/>
           <a:p>
-            <a:pPr algn="ctr" indent="0" marL="0">
+            <a:pPr marL="0" indent="0" algn="ctr">
               <a:buNone/>
             </a:pPr>
             <a:r>
@@ -11744,7 +11901,7 @@
             <a:endParaRPr lang="en-US" sz="900" dirty="0"/>
           </a:p>
           <a:p>
-            <a:pPr algn="ctr" indent="0" marL="0">
+            <a:pPr marL="0" indent="0" algn="ctr">
               <a:buNone/>
             </a:pPr>
             <a:r>
@@ -11783,6 +11940,13 @@
             <a:tailEnd type="triangle"/>
           </a:ln>
         </p:spPr>
+        <p:txBody>
+          <a:bodyPr/>
+          <a:lstStyle/>
+          <a:p>
+            <a:endParaRPr lang="en-US"/>
+          </a:p>
+        </p:txBody>
       </p:sp>
       <p:sp>
         <p:nvSpPr>
@@ -11808,6 +11972,13 @@
             <a:prstDash val="solid"/>
           </a:ln>
         </p:spPr>
+        <p:txBody>
+          <a:bodyPr/>
+          <a:lstStyle/>
+          <a:p>
+            <a:endParaRPr lang="en-US"/>
+          </a:p>
+        </p:txBody>
       </p:sp>
       <p:sp>
         <p:nvSpPr>
@@ -11830,7 +12001,7 @@
           <a:bodyPr wrap="square" lIns="0" tIns="0" rIns="0" bIns="0" rtlCol="0" anchor="ctr"/>
           <a:lstStyle/>
           <a:p>
-            <a:pPr algn="ctr" indent="0" marL="0">
+            <a:pPr marL="0" indent="0" algn="ctr">
               <a:buNone/>
             </a:pPr>
             <a:r>
@@ -11866,7 +12037,7 @@
           <a:bodyPr wrap="square" lIns="0" tIns="0" rIns="0" bIns="0" rtlCol="0" anchor="ctr"/>
           <a:lstStyle/>
           <a:p>
-            <a:pPr algn="ctr" indent="0" marL="0">
+            <a:pPr marL="0" indent="0" algn="ctr">
               <a:buNone/>
             </a:pPr>
             <a:r>
@@ -11880,7 +12051,7 @@
             <a:endParaRPr lang="en-US" sz="900" dirty="0"/>
           </a:p>
           <a:p>
-            <a:pPr algn="ctr" indent="0" marL="0">
+            <a:pPr marL="0" indent="0" algn="ctr">
               <a:buNone/>
             </a:pPr>
             <a:r>
@@ -11919,6 +12090,13 @@
             <a:tailEnd type="triangle"/>
           </a:ln>
         </p:spPr>
+        <p:txBody>
+          <a:bodyPr/>
+          <a:lstStyle/>
+          <a:p>
+            <a:endParaRPr lang="en-US"/>
+          </a:p>
+        </p:txBody>
       </p:sp>
       <p:sp>
         <p:nvSpPr>
@@ -11944,6 +12122,13 @@
             <a:prstDash val="solid"/>
           </a:ln>
         </p:spPr>
+        <p:txBody>
+          <a:bodyPr/>
+          <a:lstStyle/>
+          <a:p>
+            <a:endParaRPr lang="en-US"/>
+          </a:p>
+        </p:txBody>
       </p:sp>
       <p:sp>
         <p:nvSpPr>
@@ -11966,7 +12151,7 @@
           <a:bodyPr wrap="square" lIns="0" tIns="0" rIns="0" bIns="0" rtlCol="0" anchor="ctr"/>
           <a:lstStyle/>
           <a:p>
-            <a:pPr algn="ctr" indent="0" marL="0">
+            <a:pPr marL="0" indent="0" algn="ctr">
               <a:buNone/>
             </a:pPr>
             <a:r>
@@ -12002,7 +12187,7 @@
           <a:bodyPr wrap="square" lIns="0" tIns="0" rIns="0" bIns="0" rtlCol="0" anchor="ctr"/>
           <a:lstStyle/>
           <a:p>
-            <a:pPr algn="ctr" indent="0" marL="0">
+            <a:pPr marL="0" indent="0" algn="ctr">
               <a:buNone/>
             </a:pPr>
             <a:r>
@@ -12016,7 +12201,7 @@
             <a:endParaRPr lang="en-US" sz="900" dirty="0"/>
           </a:p>
           <a:p>
-            <a:pPr algn="ctr" indent="0" marL="0">
+            <a:pPr marL="0" indent="0" algn="ctr">
               <a:buNone/>
             </a:pPr>
             <a:r>
@@ -12055,6 +12240,13 @@
             <a:tailEnd type="triangle"/>
           </a:ln>
         </p:spPr>
+        <p:txBody>
+          <a:bodyPr/>
+          <a:lstStyle/>
+          <a:p>
+            <a:endParaRPr lang="en-US"/>
+          </a:p>
+        </p:txBody>
       </p:sp>
       <p:sp>
         <p:nvSpPr>
@@ -12080,6 +12272,13 @@
             <a:prstDash val="solid"/>
           </a:ln>
         </p:spPr>
+        <p:txBody>
+          <a:bodyPr/>
+          <a:lstStyle/>
+          <a:p>
+            <a:endParaRPr lang="en-US"/>
+          </a:p>
+        </p:txBody>
       </p:sp>
       <p:sp>
         <p:nvSpPr>
@@ -12102,7 +12301,7 @@
           <a:bodyPr wrap="square" lIns="0" tIns="0" rIns="0" bIns="0" rtlCol="0" anchor="ctr"/>
           <a:lstStyle/>
           <a:p>
-            <a:pPr algn="ctr" indent="0" marL="0">
+            <a:pPr marL="0" indent="0" algn="ctr">
               <a:buNone/>
             </a:pPr>
             <a:r>
@@ -12138,7 +12337,7 @@
           <a:bodyPr wrap="square" lIns="0" tIns="0" rIns="0" bIns="0" rtlCol="0" anchor="ctr"/>
           <a:lstStyle/>
           <a:p>
-            <a:pPr algn="ctr" indent="0" marL="0">
+            <a:pPr marL="0" indent="0" algn="ctr">
               <a:buNone/>
             </a:pPr>
             <a:r>
@@ -12152,7 +12351,7 @@
             <a:endParaRPr lang="en-US" sz="900" dirty="0"/>
           </a:p>
           <a:p>
-            <a:pPr algn="ctr" indent="0" marL="0">
+            <a:pPr marL="0" indent="0" algn="ctr">
               <a:buNone/>
             </a:pPr>
             <a:r>
@@ -12191,6 +12390,13 @@
             <a:tailEnd type="triangle"/>
           </a:ln>
         </p:spPr>
+        <p:txBody>
+          <a:bodyPr/>
+          <a:lstStyle/>
+          <a:p>
+            <a:endParaRPr lang="en-US"/>
+          </a:p>
+        </p:txBody>
       </p:sp>
       <p:sp>
         <p:nvSpPr>
@@ -12216,6 +12422,13 @@
             <a:prstDash val="solid"/>
           </a:ln>
         </p:spPr>
+        <p:txBody>
+          <a:bodyPr/>
+          <a:lstStyle/>
+          <a:p>
+            <a:endParaRPr lang="en-US"/>
+          </a:p>
+        </p:txBody>
       </p:sp>
       <p:sp>
         <p:nvSpPr>
@@ -12238,7 +12451,7 @@
           <a:bodyPr wrap="square" lIns="0" tIns="0" rIns="0" bIns="0" rtlCol="0" anchor="ctr"/>
           <a:lstStyle/>
           <a:p>
-            <a:pPr algn="ctr" indent="0" marL="0">
+            <a:pPr marL="0" indent="0" algn="ctr">
               <a:buNone/>
             </a:pPr>
             <a:r>
@@ -12274,7 +12487,7 @@
           <a:bodyPr wrap="square" lIns="0" tIns="0" rIns="0" bIns="0" rtlCol="0" anchor="ctr"/>
           <a:lstStyle/>
           <a:p>
-            <a:pPr algn="ctr" indent="0" marL="0">
+            <a:pPr marL="0" indent="0" algn="ctr">
               <a:buNone/>
             </a:pPr>
             <a:r>
@@ -12288,7 +12501,7 @@
             <a:endParaRPr lang="en-US" sz="900" dirty="0"/>
           </a:p>
           <a:p>
-            <a:pPr algn="ctr" indent="0" marL="0">
+            <a:pPr marL="0" indent="0" algn="ctr">
               <a:buNone/>
             </a:pPr>
             <a:r>
@@ -12327,6 +12540,13 @@
             <a:tailEnd type="triangle"/>
           </a:ln>
         </p:spPr>
+        <p:txBody>
+          <a:bodyPr/>
+          <a:lstStyle/>
+          <a:p>
+            <a:endParaRPr lang="en-US"/>
+          </a:p>
+        </p:txBody>
       </p:sp>
       <p:sp>
         <p:nvSpPr>
@@ -12352,6 +12572,13 @@
             <a:prstDash val="solid"/>
           </a:ln>
         </p:spPr>
+        <p:txBody>
+          <a:bodyPr/>
+          <a:lstStyle/>
+          <a:p>
+            <a:endParaRPr lang="en-US"/>
+          </a:p>
+        </p:txBody>
       </p:sp>
       <p:sp>
         <p:nvSpPr>
@@ -12374,7 +12601,7 @@
           <a:bodyPr wrap="square" lIns="0" tIns="0" rIns="0" bIns="0" rtlCol="0" anchor="ctr"/>
           <a:lstStyle/>
           <a:p>
-            <a:pPr algn="ctr" indent="0" marL="0">
+            <a:pPr marL="0" indent="0" algn="ctr">
               <a:buNone/>
             </a:pPr>
             <a:r>
@@ -12410,7 +12637,7 @@
           <a:bodyPr wrap="square" lIns="0" tIns="0" rIns="0" bIns="0" rtlCol="0" anchor="ctr"/>
           <a:lstStyle/>
           <a:p>
-            <a:pPr algn="ctr" indent="0" marL="0">
+            <a:pPr marL="0" indent="0" algn="ctr">
               <a:buNone/>
             </a:pPr>
             <a:r>
@@ -12424,7 +12651,7 @@
             <a:endParaRPr lang="en-US" sz="900" dirty="0"/>
           </a:p>
           <a:p>
-            <a:pPr algn="ctr" indent="0" marL="0">
+            <a:pPr marL="0" indent="0" algn="ctr">
               <a:buNone/>
             </a:pPr>
             <a:r>
@@ -12460,7 +12687,7 @@
           <a:bodyPr wrap="square" lIns="0" tIns="0" rIns="0" bIns="0" rtlCol="0" anchor="ctr"/>
           <a:lstStyle/>
           <a:p>
-            <a:pPr indent="0" marL="0">
+            <a:pPr marL="0" indent="0">
               <a:buNone/>
             </a:pPr>
             <a:r>
@@ -12498,7 +12725,7 @@
           </a:bodyPr>
           <a:lstStyle/>
           <a:p>
-            <a:pPr indent="0" marL="0">
+            <a:pPr marL="0" indent="0">
               <a:buNone/>
             </a:pPr>
             <a:r>
@@ -12537,6 +12764,13 @@
             <a:prstDash val="solid"/>
           </a:ln>
         </p:spPr>
+        <p:txBody>
+          <a:bodyPr/>
+          <a:lstStyle/>
+          <a:p>
+            <a:endParaRPr lang="en-US"/>
+          </a:p>
+        </p:txBody>
       </p:sp>
       <p:sp>
         <p:nvSpPr>
@@ -12559,7 +12793,7 @@
           <a:bodyPr wrap="square" lIns="0" tIns="0" rIns="0" bIns="0" rtlCol="0" anchor="ctr"/>
           <a:lstStyle/>
           <a:p>
-            <a:pPr algn="ctr" indent="0" marL="0">
+            <a:pPr marL="0" indent="0" algn="ctr">
               <a:buNone/>
             </a:pPr>
             <a:r>
@@ -12595,7 +12829,7 @@
           <a:bodyPr wrap="square" lIns="0" tIns="0" rIns="0" bIns="0" rtlCol="0" anchor="ctr"/>
           <a:lstStyle/>
           <a:p>
-            <a:pPr indent="0" marL="0">
+            <a:pPr marL="0" indent="0">
               <a:buNone/>
             </a:pPr>
             <a:r>
@@ -12631,7 +12865,7 @@
           <a:bodyPr wrap="square" lIns="0" tIns="0" rIns="0" bIns="0" rtlCol="0" anchor="ctr"/>
           <a:lstStyle/>
           <a:p>
-            <a:pPr algn="r" indent="0" marL="0">
+            <a:pPr marL="0" indent="0" algn="r">
               <a:buNone/>
             </a:pPr>
             <a:r>
@@ -12662,6 +12896,7 @@
         <a:solidFill>
           <a:srgbClr val="F8FAFC"/>
         </a:solidFill>
+        <a:effectLst/>
       </p:bgPr>
     </p:bg>
     <p:spTree>
@@ -12702,6 +12937,13 @@
             <a:prstDash val="solid"/>
           </a:ln>
         </p:spPr>
+        <p:txBody>
+          <a:bodyPr/>
+          <a:lstStyle/>
+          <a:p>
+            <a:endParaRPr lang="en-US"/>
+          </a:p>
+        </p:txBody>
       </p:sp>
       <p:sp>
         <p:nvSpPr>
@@ -12724,7 +12966,7 @@
           <a:bodyPr wrap="square" rtlCol="0" anchor="ctr"/>
           <a:lstStyle/>
           <a:p>
-            <a:pPr indent="0" marL="0">
+            <a:pPr marL="0" indent="0">
               <a:buNone/>
             </a:pPr>
             <a:r>
@@ -12763,7 +13005,7 @@
           <a:bodyPr wrap="square" lIns="0" tIns="0" rIns="0" bIns="0" rtlCol="0" anchor="ctr"/>
           <a:lstStyle/>
           <a:p>
-            <a:pPr indent="0" marL="0">
+            <a:pPr marL="0" indent="0">
               <a:buNone/>
             </a:pPr>
             <a:r>
@@ -12802,7 +13044,7 @@
           <a:bodyPr wrap="square" lIns="0" tIns="0" rIns="0" bIns="0" rtlCol="0" anchor="ctr"/>
           <a:lstStyle/>
           <a:p>
-            <a:pPr indent="0" marL="0">
+            <a:pPr marL="0" indent="0">
               <a:buNone/>
             </a:pPr>
             <a:r>
@@ -12846,7 +13088,7 @@
           </a:bodyPr>
           <a:lstStyle/>
           <a:p>
-            <a:pPr algn="l" indent="0" marL="0">
+            <a:pPr marL="0" indent="0" algn="l">
               <a:buNone/>
             </a:pPr>
             <a:r>
@@ -12890,7 +13132,7 @@
           </a:bodyPr>
           <a:lstStyle/>
           <a:p>
-            <a:pPr algn="l" indent="0" marL="0">
+            <a:pPr marL="0" indent="0" algn="l">
               <a:buNone/>
             </a:pPr>
             <a:r>
@@ -12934,7 +13176,7 @@
           </a:bodyPr>
           <a:lstStyle/>
           <a:p>
-            <a:pPr algn="l" indent="0" marL="0">
+            <a:pPr marL="0" indent="0" algn="l">
               <a:buNone/>
             </a:pPr>
             <a:r>
@@ -12978,7 +13220,7 @@
           </a:bodyPr>
           <a:lstStyle/>
           <a:p>
-            <a:pPr algn="l" indent="0" marL="0">
+            <a:pPr marL="0" indent="0" algn="l">
               <a:buNone/>
             </a:pPr>
             <a:r>
@@ -13022,7 +13264,7 @@
           </a:bodyPr>
           <a:lstStyle/>
           <a:p>
-            <a:pPr algn="l" indent="0" marL="0">
+            <a:pPr marL="0" indent="0" algn="l">
               <a:buNone/>
             </a:pPr>
             <a:r>
@@ -13066,7 +13308,7 @@
           </a:bodyPr>
           <a:lstStyle/>
           <a:p>
-            <a:pPr algn="l" indent="0" marL="0">
+            <a:pPr marL="0" indent="0" algn="l">
               <a:buNone/>
             </a:pPr>
             <a:r>
@@ -13110,7 +13352,7 @@
           </a:bodyPr>
           <a:lstStyle/>
           <a:p>
-            <a:pPr algn="l" indent="0" marL="0">
+            <a:pPr marL="0" indent="0" algn="l">
               <a:buNone/>
             </a:pPr>
             <a:r>
@@ -13154,7 +13396,7 @@
           </a:bodyPr>
           <a:lstStyle/>
           <a:p>
-            <a:pPr algn="l" indent="0" marL="0">
+            <a:pPr marL="0" indent="0" algn="l">
               <a:buNone/>
             </a:pPr>
             <a:r>
@@ -13198,7 +13440,7 @@
           </a:bodyPr>
           <a:lstStyle/>
           <a:p>
-            <a:pPr algn="l" indent="0" marL="0">
+            <a:pPr marL="0" indent="0" algn="l">
               <a:buNone/>
             </a:pPr>
             <a:r>
@@ -13242,7 +13484,7 @@
           </a:bodyPr>
           <a:lstStyle/>
           <a:p>
-            <a:pPr algn="l" indent="0" marL="0">
+            <a:pPr marL="0" indent="0" algn="l">
               <a:buNone/>
             </a:pPr>
             <a:r>
@@ -13286,7 +13528,7 @@
           </a:bodyPr>
           <a:lstStyle/>
           <a:p>
-            <a:pPr algn="l" indent="0" marL="0">
+            <a:pPr marL="0" indent="0" algn="l">
               <a:buNone/>
             </a:pPr>
             <a:r>
@@ -13330,7 +13572,7 @@
           </a:bodyPr>
           <a:lstStyle/>
           <a:p>
-            <a:pPr algn="l" indent="0" marL="0">
+            <a:pPr marL="0" indent="0" algn="l">
               <a:buNone/>
             </a:pPr>
             <a:r>
@@ -13369,6 +13611,13 @@
             <a:prstDash val="solid"/>
           </a:ln>
         </p:spPr>
+        <p:txBody>
+          <a:bodyPr/>
+          <a:lstStyle/>
+          <a:p>
+            <a:endParaRPr lang="en-US"/>
+          </a:p>
+        </p:txBody>
       </p:sp>
       <p:sp>
         <p:nvSpPr>
@@ -13391,7 +13640,7 @@
           <a:bodyPr wrap="square" lIns="0" tIns="0" rIns="0" bIns="0" rtlCol="0" anchor="ctr"/>
           <a:lstStyle/>
           <a:p>
-            <a:pPr algn="ctr" indent="0" marL="0">
+            <a:pPr marL="0" indent="0" algn="ctr">
               <a:buNone/>
             </a:pPr>
             <a:r>
@@ -13427,7 +13676,7 @@
           <a:bodyPr wrap="square" lIns="0" tIns="0" rIns="0" bIns="0" rtlCol="0" anchor="ctr"/>
           <a:lstStyle/>
           <a:p>
-            <a:pPr algn="ctr" indent="0" marL="0">
+            <a:pPr marL="0" indent="0" algn="ctr">
               <a:buNone/>
             </a:pPr>
             <a:r>
@@ -13463,7 +13712,7 @@
           <a:bodyPr wrap="square" lIns="0" tIns="0" rIns="0" bIns="0" rtlCol="0" anchor="ctr"/>
           <a:lstStyle/>
           <a:p>
-            <a:pPr algn="ctr" indent="0" marL="0">
+            <a:pPr marL="0" indent="0" algn="ctr">
               <a:buNone/>
             </a:pPr>
             <a:r>
@@ -13499,7 +13748,7 @@
           <a:bodyPr wrap="square" lIns="0" tIns="0" rIns="0" bIns="0" rtlCol="0" anchor="ctr"/>
           <a:lstStyle/>
           <a:p>
-            <a:pPr indent="0" marL="0">
+            <a:pPr marL="0" indent="0">
               <a:buNone/>
             </a:pPr>
             <a:r>
@@ -13535,7 +13784,7 @@
           <a:bodyPr wrap="square" lIns="0" tIns="0" rIns="0" bIns="0" rtlCol="0" anchor="ctr"/>
           <a:lstStyle/>
           <a:p>
-            <a:pPr algn="r" indent="0" marL="0">
+            <a:pPr marL="0" indent="0" algn="r">
               <a:buNone/>
             </a:pPr>
             <a:r>
@@ -13566,6 +13815,7 @@
         <a:solidFill>
           <a:srgbClr val="F8FAFC"/>
         </a:solidFill>
+        <a:effectLst/>
       </p:bgPr>
     </p:bg>
     <p:spTree>
@@ -13606,6 +13856,13 @@
             <a:prstDash val="solid"/>
           </a:ln>
         </p:spPr>
+        <p:txBody>
+          <a:bodyPr/>
+          <a:lstStyle/>
+          <a:p>
+            <a:endParaRPr lang="en-US"/>
+          </a:p>
+        </p:txBody>
       </p:sp>
       <p:sp>
         <p:nvSpPr>
@@ -13628,7 +13885,7 @@
           <a:bodyPr wrap="square" rtlCol="0" anchor="ctr"/>
           <a:lstStyle/>
           <a:p>
-            <a:pPr indent="0" marL="0">
+            <a:pPr marL="0" indent="0">
               <a:buNone/>
             </a:pPr>
             <a:r>
@@ -13667,7 +13924,7 @@
           <a:bodyPr wrap="square" lIns="0" tIns="0" rIns="0" bIns="0" rtlCol="0" anchor="ctr"/>
           <a:lstStyle/>
           <a:p>
-            <a:pPr indent="0" marL="0">
+            <a:pPr marL="0" indent="0">
               <a:buNone/>
             </a:pPr>
             <a:r>
@@ -13711,6 +13968,13 @@
             <a:prstDash val="solid"/>
           </a:ln>
         </p:spPr>
+        <p:txBody>
+          <a:bodyPr/>
+          <a:lstStyle/>
+          <a:p>
+            <a:endParaRPr lang="en-US"/>
+          </a:p>
+        </p:txBody>
       </p:sp>
       <p:sp>
         <p:nvSpPr>
@@ -13733,7 +13997,7 @@
           <a:bodyPr wrap="square" lIns="0" tIns="0" rIns="0" bIns="0" rtlCol="0" anchor="ctr"/>
           <a:lstStyle/>
           <a:p>
-            <a:pPr indent="0" marL="0">
+            <a:pPr marL="0" indent="0">
               <a:buNone/>
             </a:pPr>
             <a:r>
@@ -13769,7 +14033,7 @@
           <a:bodyPr wrap="square" lIns="0" tIns="0" rIns="0" bIns="0" rtlCol="0" anchor="ctr"/>
           <a:lstStyle/>
           <a:p>
-            <a:pPr indent="0" marL="0">
+            <a:pPr marL="0" indent="0">
               <a:buNone/>
             </a:pPr>
             <a:r>
@@ -13810,6 +14074,13 @@
             <a:prstDash val="solid"/>
           </a:ln>
         </p:spPr>
+        <p:txBody>
+          <a:bodyPr/>
+          <a:lstStyle/>
+          <a:p>
+            <a:endParaRPr lang="en-US"/>
+          </a:p>
+        </p:txBody>
       </p:sp>
       <p:sp>
         <p:nvSpPr>
@@ -13832,7 +14103,7 @@
           <a:bodyPr wrap="square" lIns="0" tIns="0" rIns="0" bIns="0" rtlCol="0" anchor="ctr"/>
           <a:lstStyle/>
           <a:p>
-            <a:pPr indent="0" marL="0">
+            <a:pPr marL="0" indent="0">
               <a:buNone/>
             </a:pPr>
             <a:r>
@@ -13868,7 +14139,7 @@
           <a:bodyPr wrap="square" lIns="0" tIns="0" rIns="0" bIns="0" rtlCol="0" anchor="ctr"/>
           <a:lstStyle/>
           <a:p>
-            <a:pPr indent="0" marL="0">
+            <a:pPr marL="0" indent="0">
               <a:buNone/>
             </a:pPr>
             <a:r>
@@ -13909,6 +14180,13 @@
             <a:prstDash val="solid"/>
           </a:ln>
         </p:spPr>
+        <p:txBody>
+          <a:bodyPr/>
+          <a:lstStyle/>
+          <a:p>
+            <a:endParaRPr lang="en-US"/>
+          </a:p>
+        </p:txBody>
       </p:sp>
       <p:sp>
         <p:nvSpPr>
@@ -13931,7 +14209,7 @@
           <a:bodyPr wrap="square" lIns="0" tIns="0" rIns="0" bIns="0" rtlCol="0" anchor="ctr"/>
           <a:lstStyle/>
           <a:p>
-            <a:pPr indent="0" marL="0">
+            <a:pPr marL="0" indent="0">
               <a:buNone/>
             </a:pPr>
             <a:r>
@@ -13967,7 +14245,7 @@
           <a:bodyPr wrap="square" lIns="0" tIns="0" rIns="0" bIns="0" rtlCol="0" anchor="ctr"/>
           <a:lstStyle/>
           <a:p>
-            <a:pPr indent="0" marL="0">
+            <a:pPr marL="0" indent="0">
               <a:buNone/>
             </a:pPr>
             <a:r>
@@ -14008,6 +14286,13 @@
             <a:prstDash val="solid"/>
           </a:ln>
         </p:spPr>
+        <p:txBody>
+          <a:bodyPr/>
+          <a:lstStyle/>
+          <a:p>
+            <a:endParaRPr lang="en-US"/>
+          </a:p>
+        </p:txBody>
       </p:sp>
       <p:sp>
         <p:nvSpPr>
@@ -14030,7 +14315,7 @@
           <a:bodyPr wrap="square" lIns="0" tIns="0" rIns="0" bIns="0" rtlCol="0" anchor="ctr"/>
           <a:lstStyle/>
           <a:p>
-            <a:pPr indent="0" marL="0">
+            <a:pPr marL="0" indent="0">
               <a:buNone/>
             </a:pPr>
             <a:r>
@@ -14066,7 +14351,7 @@
           <a:bodyPr wrap="square" lIns="0" tIns="0" rIns="0" bIns="0" rtlCol="0" anchor="ctr"/>
           <a:lstStyle/>
           <a:p>
-            <a:pPr indent="0" marL="0">
+            <a:pPr marL="0" indent="0">
               <a:buNone/>
             </a:pPr>
             <a:r>
@@ -14107,6 +14392,13 @@
             <a:prstDash val="solid"/>
           </a:ln>
         </p:spPr>
+        <p:txBody>
+          <a:bodyPr/>
+          <a:lstStyle/>
+          <a:p>
+            <a:endParaRPr lang="en-US"/>
+          </a:p>
+        </p:txBody>
       </p:sp>
       <p:sp>
         <p:nvSpPr>
@@ -14129,7 +14421,7 @@
           <a:bodyPr wrap="square" lIns="0" tIns="0" rIns="0" bIns="0" rtlCol="0" anchor="ctr"/>
           <a:lstStyle/>
           <a:p>
-            <a:pPr indent="0" marL="0">
+            <a:pPr marL="0" indent="0">
               <a:buNone/>
             </a:pPr>
             <a:r>
@@ -14165,7 +14457,7 @@
           <a:bodyPr wrap="square" lIns="0" tIns="0" rIns="0" bIns="0" rtlCol="0" anchor="ctr"/>
           <a:lstStyle/>
           <a:p>
-            <a:pPr indent="0" marL="0">
+            <a:pPr marL="0" indent="0">
               <a:buNone/>
             </a:pPr>
             <a:r>
@@ -14206,6 +14498,13 @@
             <a:prstDash val="solid"/>
           </a:ln>
         </p:spPr>
+        <p:txBody>
+          <a:bodyPr/>
+          <a:lstStyle/>
+          <a:p>
+            <a:endParaRPr lang="en-US"/>
+          </a:p>
+        </p:txBody>
       </p:sp>
       <p:sp>
         <p:nvSpPr>
@@ -14228,7 +14527,7 @@
           <a:bodyPr wrap="square" lIns="0" tIns="0" rIns="0" bIns="0" rtlCol="0" anchor="ctr"/>
           <a:lstStyle/>
           <a:p>
-            <a:pPr indent="0" marL="0">
+            <a:pPr marL="0" indent="0">
               <a:buNone/>
             </a:pPr>
             <a:r>
@@ -14264,7 +14563,7 @@
           <a:bodyPr wrap="square" lIns="0" tIns="0" rIns="0" bIns="0" rtlCol="0" anchor="ctr"/>
           <a:lstStyle/>
           <a:p>
-            <a:pPr indent="0" marL="0">
+            <a:pPr marL="0" indent="0">
               <a:buNone/>
             </a:pPr>
             <a:r>
@@ -14306,7 +14605,7 @@
           <a:bodyPr wrap="square" lIns="0" tIns="0" rIns="0" bIns="0" rtlCol="0" anchor="ctr"/>
           <a:lstStyle/>
           <a:p>
-            <a:pPr algn="ctr" indent="0" marL="0">
+            <a:pPr marL="0" indent="0" algn="ctr">
               <a:buNone/>
             </a:pPr>
             <a:r>
@@ -14342,7 +14641,7 @@
           <a:bodyPr wrap="square" lIns="0" tIns="0" rIns="0" bIns="0" rtlCol="0" anchor="ctr"/>
           <a:lstStyle/>
           <a:p>
-            <a:pPr indent="0" marL="0">
+            <a:pPr marL="0" indent="0">
               <a:buNone/>
             </a:pPr>
             <a:r>
@@ -14378,7 +14677,7 @@
           <a:bodyPr wrap="square" lIns="0" tIns="0" rIns="0" bIns="0" rtlCol="0" anchor="ctr"/>
           <a:lstStyle/>
           <a:p>
-            <a:pPr algn="r" indent="0" marL="0">
+            <a:pPr marL="0" indent="0" algn="r">
               <a:buNone/>
             </a:pPr>
             <a:r>
@@ -14694,4 +14993,319 @@
     </a:ext>
   </a:extLst>
 </a:theme>
+</file>
+
+<file path=ppt/theme/theme2.xml><?xml version="1.0" encoding="utf-8"?>
+<a:theme xmlns:a="http://schemas.openxmlformats.org/drawingml/2006/main" name="Office Theme">
+  <a:themeElements>
+    <a:clrScheme name="Office">
+      <a:dk1>
+        <a:sysClr val="windowText" lastClr="000000"/>
+      </a:dk1>
+      <a:lt1>
+        <a:sysClr val="window" lastClr="FFFFFF"/>
+      </a:lt1>
+      <a:dk2>
+        <a:srgbClr val="0E2841"/>
+      </a:dk2>
+      <a:lt2>
+        <a:srgbClr val="E8E8E8"/>
+      </a:lt2>
+      <a:accent1>
+        <a:srgbClr val="156082"/>
+      </a:accent1>
+      <a:accent2>
+        <a:srgbClr val="E97132"/>
+      </a:accent2>
+      <a:accent3>
+        <a:srgbClr val="196B24"/>
+      </a:accent3>
+      <a:accent4>
+        <a:srgbClr val="0F9ED5"/>
+      </a:accent4>
+      <a:accent5>
+        <a:srgbClr val="A02B93"/>
+      </a:accent5>
+      <a:accent6>
+        <a:srgbClr val="4EA72E"/>
+      </a:accent6>
+      <a:hlink>
+        <a:srgbClr val="467886"/>
+      </a:hlink>
+      <a:folHlink>
+        <a:srgbClr val="96607D"/>
+      </a:folHlink>
+    </a:clrScheme>
+    <a:fontScheme name="Office">
+      <a:majorFont>
+        <a:latin typeface="Aptos Display" panose="02110004020202020204"/>
+        <a:ea typeface=""/>
+        <a:cs typeface=""/>
+        <a:font script="Jpan" typeface="游ゴシック Light"/>
+        <a:font script="Hang" typeface="맑은 고딕"/>
+        <a:font script="Hans" typeface="等线 Light"/>
+        <a:font script="Hant" typeface="新細明體"/>
+        <a:font script="Arab" typeface="Times New Roman"/>
+        <a:font script="Hebr" typeface="Times New Roman"/>
+        <a:font script="Thai" typeface="Angsana New"/>
+        <a:font script="Ethi" typeface="Nyala"/>
+        <a:font script="Beng" typeface="Vrinda"/>
+        <a:font script="Gujr" typeface="Shruti"/>
+        <a:font script="Khmr" typeface="MoolBoran"/>
+        <a:font script="Knda" typeface="Tunga"/>
+        <a:font script="Guru" typeface="Raavi"/>
+        <a:font script="Cans" typeface="Euphemia"/>
+        <a:font script="Cher" typeface="Plantagenet Cherokee"/>
+        <a:font script="Yiii" typeface="Microsoft Yi Baiti"/>
+        <a:font script="Tibt" typeface="Microsoft Himalaya"/>
+        <a:font script="Thaa" typeface="MV Boli"/>
+        <a:font script="Deva" typeface="Mangal"/>
+        <a:font script="Telu" typeface="Gautami"/>
+        <a:font script="Taml" typeface="Latha"/>
+        <a:font script="Syrc" typeface="Estrangelo Edessa"/>
+        <a:font script="Orya" typeface="Kalinga"/>
+        <a:font script="Mlym" typeface="Kartika"/>
+        <a:font script="Laoo" typeface="DokChampa"/>
+        <a:font script="Sinh" typeface="Iskoola Pota"/>
+        <a:font script="Mong" typeface="Mongolian Baiti"/>
+        <a:font script="Viet" typeface="Times New Roman"/>
+        <a:font script="Uigh" typeface="Microsoft Uighur"/>
+        <a:font script="Geor" typeface="Sylfaen"/>
+        <a:font script="Armn" typeface="Arial"/>
+        <a:font script="Bugi" typeface="Leelawadee UI"/>
+        <a:font script="Bopo" typeface="Microsoft JhengHei"/>
+        <a:font script="Java" typeface="Javanese Text"/>
+        <a:font script="Lisu" typeface="Segoe UI"/>
+        <a:font script="Mymr" typeface="Myanmar Text"/>
+        <a:font script="Nkoo" typeface="Ebrima"/>
+        <a:font script="Olck" typeface="Nirmala UI"/>
+        <a:font script="Osma" typeface="Ebrima"/>
+        <a:font script="Phag" typeface="Phagspa"/>
+        <a:font script="Syrn" typeface="Estrangelo Edessa"/>
+        <a:font script="Syrj" typeface="Estrangelo Edessa"/>
+        <a:font script="Syre" typeface="Estrangelo Edessa"/>
+        <a:font script="Sora" typeface="Nirmala UI"/>
+        <a:font script="Tale" typeface="Microsoft Tai Le"/>
+        <a:font script="Talu" typeface="Microsoft New Tai Lue"/>
+        <a:font script="Tfng" typeface="Ebrima"/>
+      </a:majorFont>
+      <a:minorFont>
+        <a:latin typeface="Aptos" panose="02110004020202020204"/>
+        <a:ea typeface=""/>
+        <a:cs typeface=""/>
+        <a:font script="Jpan" typeface="游ゴシック"/>
+        <a:font script="Hang" typeface="맑은 고딕"/>
+        <a:font script="Hans" typeface="等线"/>
+        <a:font script="Hant" typeface="新細明體"/>
+        <a:font script="Arab" typeface="Arial"/>
+        <a:font script="Hebr" typeface="Arial"/>
+        <a:font script="Thai" typeface="Cordia New"/>
+        <a:font script="Ethi" typeface="Nyala"/>
+        <a:font script="Beng" typeface="Vrinda"/>
+        <a:font script="Gujr" typeface="Shruti"/>
+        <a:font script="Khmr" typeface="DaunPenh"/>
+        <a:font script="Knda" typeface="Tunga"/>
+        <a:font script="Guru" typeface="Raavi"/>
+        <a:font script="Cans" typeface="Euphemia"/>
+        <a:font script="Cher" typeface="Plantagenet Cherokee"/>
+        <a:font script="Yiii" typeface="Microsoft Yi Baiti"/>
+        <a:font script="Tibt" typeface="Microsoft Himalaya"/>
+        <a:font script="Thaa" typeface="MV Boli"/>
+        <a:font script="Deva" typeface="Mangal"/>
+        <a:font script="Telu" typeface="Gautami"/>
+        <a:font script="Taml" typeface="Latha"/>
+        <a:font script="Syrc" typeface="Estrangelo Edessa"/>
+        <a:font script="Orya" typeface="Kalinga"/>
+        <a:font script="Mlym" typeface="Kartika"/>
+        <a:font script="Laoo" typeface="DokChampa"/>
+        <a:font script="Sinh" typeface="Iskoola Pota"/>
+        <a:font script="Mong" typeface="Mongolian Baiti"/>
+        <a:font script="Viet" typeface="Arial"/>
+        <a:font script="Uigh" typeface="Microsoft Uighur"/>
+        <a:font script="Geor" typeface="Sylfaen"/>
+        <a:font script="Armn" typeface="Arial"/>
+        <a:font script="Bugi" typeface="Leelawadee UI"/>
+        <a:font script="Bopo" typeface="Microsoft JhengHei"/>
+        <a:font script="Java" typeface="Javanese Text"/>
+        <a:font script="Lisu" typeface="Segoe UI"/>
+        <a:font script="Mymr" typeface="Myanmar Text"/>
+        <a:font script="Nkoo" typeface="Ebrima"/>
+        <a:font script="Olck" typeface="Nirmala UI"/>
+        <a:font script="Osma" typeface="Ebrima"/>
+        <a:font script="Phag" typeface="Phagspa"/>
+        <a:font script="Syrn" typeface="Estrangelo Edessa"/>
+        <a:font script="Syrj" typeface="Estrangelo Edessa"/>
+        <a:font script="Syre" typeface="Estrangelo Edessa"/>
+        <a:font script="Sora" typeface="Nirmala UI"/>
+        <a:font script="Tale" typeface="Microsoft Tai Le"/>
+        <a:font script="Talu" typeface="Microsoft New Tai Lue"/>
+        <a:font script="Tfng" typeface="Ebrima"/>
+      </a:minorFont>
+    </a:fontScheme>
+    <a:fmtScheme name="Office">
+      <a:fillStyleLst>
+        <a:solidFill>
+          <a:schemeClr val="phClr"/>
+        </a:solidFill>
+        <a:gradFill rotWithShape="1">
+          <a:gsLst>
+            <a:gs pos="0">
+              <a:schemeClr val="phClr">
+                <a:lumMod val="110000"/>
+                <a:satMod val="105000"/>
+                <a:tint val="67000"/>
+              </a:schemeClr>
+            </a:gs>
+            <a:gs pos="50000">
+              <a:schemeClr val="phClr">
+                <a:lumMod val="105000"/>
+                <a:satMod val="103000"/>
+                <a:tint val="73000"/>
+              </a:schemeClr>
+            </a:gs>
+            <a:gs pos="100000">
+              <a:schemeClr val="phClr">
+                <a:lumMod val="105000"/>
+                <a:satMod val="109000"/>
+                <a:tint val="81000"/>
+              </a:schemeClr>
+            </a:gs>
+          </a:gsLst>
+          <a:lin ang="5400000" scaled="0"/>
+        </a:gradFill>
+        <a:gradFill rotWithShape="1">
+          <a:gsLst>
+            <a:gs pos="0">
+              <a:schemeClr val="phClr">
+                <a:satMod val="103000"/>
+                <a:lumMod val="102000"/>
+                <a:tint val="94000"/>
+              </a:schemeClr>
+            </a:gs>
+            <a:gs pos="50000">
+              <a:schemeClr val="phClr">
+                <a:satMod val="110000"/>
+                <a:lumMod val="100000"/>
+                <a:shade val="100000"/>
+              </a:schemeClr>
+            </a:gs>
+            <a:gs pos="100000">
+              <a:schemeClr val="phClr">
+                <a:lumMod val="99000"/>
+                <a:satMod val="120000"/>
+                <a:shade val="78000"/>
+              </a:schemeClr>
+            </a:gs>
+          </a:gsLst>
+          <a:lin ang="5400000" scaled="0"/>
+        </a:gradFill>
+      </a:fillStyleLst>
+      <a:lnStyleLst>
+        <a:ln w="12700" cap="flat" cmpd="sng" algn="ctr">
+          <a:solidFill>
+            <a:schemeClr val="phClr"/>
+          </a:solidFill>
+          <a:prstDash val="solid"/>
+          <a:miter lim="800000"/>
+        </a:ln>
+        <a:ln w="19050" cap="flat" cmpd="sng" algn="ctr">
+          <a:solidFill>
+            <a:schemeClr val="phClr"/>
+          </a:solidFill>
+          <a:prstDash val="solid"/>
+          <a:miter lim="800000"/>
+        </a:ln>
+        <a:ln w="25400" cap="flat" cmpd="sng" algn="ctr">
+          <a:solidFill>
+            <a:schemeClr val="phClr"/>
+          </a:solidFill>
+          <a:prstDash val="solid"/>
+          <a:miter lim="800000"/>
+        </a:ln>
+      </a:lnStyleLst>
+      <a:effectStyleLst>
+        <a:effectStyle>
+          <a:effectLst/>
+        </a:effectStyle>
+        <a:effectStyle>
+          <a:effectLst/>
+        </a:effectStyle>
+        <a:effectStyle>
+          <a:effectLst>
+            <a:outerShdw blurRad="57150" dist="19050" dir="5400000" algn="ctr" rotWithShape="0">
+              <a:srgbClr val="000000">
+                <a:alpha val="63000"/>
+              </a:srgbClr>
+            </a:outerShdw>
+          </a:effectLst>
+        </a:effectStyle>
+      </a:effectStyleLst>
+      <a:bgFillStyleLst>
+        <a:solidFill>
+          <a:schemeClr val="phClr"/>
+        </a:solidFill>
+        <a:solidFill>
+          <a:schemeClr val="phClr">
+            <a:tint val="95000"/>
+            <a:satMod val="170000"/>
+          </a:schemeClr>
+        </a:solidFill>
+        <a:gradFill rotWithShape="1">
+          <a:gsLst>
+            <a:gs pos="0">
+              <a:schemeClr val="phClr">
+                <a:tint val="93000"/>
+                <a:satMod val="150000"/>
+                <a:shade val="98000"/>
+                <a:lumMod val="102000"/>
+              </a:schemeClr>
+            </a:gs>
+            <a:gs pos="50000">
+              <a:schemeClr val="phClr">
+                <a:tint val="98000"/>
+                <a:satMod val="130000"/>
+                <a:shade val="90000"/>
+                <a:lumMod val="103000"/>
+              </a:schemeClr>
+            </a:gs>
+            <a:gs pos="100000">
+              <a:schemeClr val="phClr">
+                <a:shade val="63000"/>
+                <a:satMod val="120000"/>
+              </a:schemeClr>
+            </a:gs>
+          </a:gsLst>
+          <a:lin ang="5400000" scaled="0"/>
+        </a:gradFill>
+      </a:bgFillStyleLst>
+    </a:fmtScheme>
+  </a:themeElements>
+  <a:objectDefaults>
+    <a:lnDef>
+      <a:spPr/>
+      <a:bodyPr/>
+      <a:lstStyle/>
+      <a:style>
+        <a:lnRef idx="2">
+          <a:schemeClr val="accent1"/>
+        </a:lnRef>
+        <a:fillRef idx="0">
+          <a:schemeClr val="accent1"/>
+        </a:fillRef>
+        <a:effectRef idx="1">
+          <a:schemeClr val="accent1"/>
+        </a:effectRef>
+        <a:fontRef idx="minor">
+          <a:schemeClr val="tx1"/>
+        </a:fontRef>
+      </a:style>
+    </a:lnDef>
+  </a:objectDefaults>
+  <a:extraClrSchemeLst/>
+  <a:extLst>
+    <a:ext uri="{05A4C25C-085E-4340-85A3-A5531E510DB2}">
+      <thm15:themeFamily xmlns:thm15="http://schemas.microsoft.com/office/thememl/2012/main" name="Office Theme" id="{2E142A2C-CD16-42D6-873A-C26D2A0506FA}" vid="{1BDDFF52-6CD6-40A5-AB3C-68EB2F1E4D0A}"/>
+    </a:ext>
+  </a:extLst>
+</a:theme>
 </file>
--- a/aws_ai_governance_platform_gtm_deck.pptx
+++ b/aws_ai_governance_platform_gtm_deck.pptx
@@ -1988,7 +1988,7 @@
                 <a:ea typeface="Aptos Display" pitchFamily="34" charset="-122"/>
                 <a:cs typeface="Aptos Display" pitchFamily="34" charset="-120"/>
               </a:rPr>
-              <a:t>AI Governance Platform</a:t>
+              <a:t>Governed-Agent Reference Architecture for AWS</a:t>
             </a:r>
             <a:endParaRPr lang="en-US" sz="4200" dirty="0"/>
           </a:p>
@@ -2993,7 +2993,7 @@
                   <a:srgbClr val="64748B"/>
                 </a:solidFill>
               </a:rPr>
-              <a:t>AWS AI Governance Platform concept</a:t>
+              <a:t>Governed-Agent Reference Architecture for AWS concept</a:t>
             </a:r>
             <a:endParaRPr lang="en-US" sz="650" dirty="0"/>
           </a:p>
@@ -3968,7 +3968,7 @@
                   <a:srgbClr val="64748B"/>
                 </a:solidFill>
               </a:rPr>
-              <a:t>AWS AI Governance Platform concept</a:t>
+              <a:t>Governed-Agent Reference Architecture for AWS concept</a:t>
             </a:r>
             <a:endParaRPr lang="en-US" sz="650" dirty="0"/>
           </a:p>
@@ -5253,7 +5253,7 @@
                   <a:srgbClr val="64748B"/>
                 </a:solidFill>
               </a:rPr>
-              <a:t>AWS AI Governance Platform concept</a:t>
+              <a:t>Governed-Agent Reference Architecture for AWS concept</a:t>
             </a:r>
             <a:endParaRPr lang="en-US" sz="650" dirty="0"/>
           </a:p>
@@ -6010,7 +6010,7 @@
                   <a:srgbClr val="64748B"/>
                 </a:solidFill>
               </a:rPr>
-              <a:t>AWS AI Governance Platform concept</a:t>
+              <a:t>Governed-Agent Reference Architecture for AWS concept</a:t>
             </a:r>
             <a:endParaRPr lang="en-US" sz="650" dirty="0"/>
           </a:p>
@@ -6789,7 +6789,7 @@
                   <a:srgbClr val="64748B"/>
                 </a:solidFill>
               </a:rPr>
-              <a:t>AWS AI Governance Platform concept</a:t>
+              <a:t>Governed-Agent Reference Architecture for AWS concept</a:t>
             </a:r>
             <a:endParaRPr lang="en-US" sz="650" dirty="0"/>
           </a:p>
@@ -7635,7 +7635,7 @@
                   <a:srgbClr val="64748B"/>
                 </a:solidFill>
               </a:rPr>
-              <a:t>AWS AI Governance Platform concept</a:t>
+              <a:t>Governed-Agent Reference Architecture for AWS concept</a:t>
             </a:r>
             <a:endParaRPr lang="en-US" sz="650" dirty="0"/>
           </a:p>
@@ -8494,7 +8494,7 @@
                   <a:srgbClr val="64748B"/>
                 </a:solidFill>
               </a:rPr>
-              <a:t>AWS AI Governance Platform concept</a:t>
+              <a:t>Governed-Agent Reference Architecture for AWS concept</a:t>
             </a:r>
             <a:endParaRPr lang="en-US" sz="650" dirty="0"/>
           </a:p>
@@ -9809,7 +9809,7 @@
                   <a:srgbClr val="64748B"/>
                 </a:solidFill>
               </a:rPr>
-              <a:t>AWS AI Governance Platform concept</a:t>
+              <a:t>Governed-Agent Reference Architecture for AWS concept</a:t>
             </a:r>
             <a:endParaRPr lang="en-US" sz="650" dirty="0"/>
           </a:p>
@@ -10694,7 +10694,7 @@
                   <a:srgbClr val="64748B"/>
                 </a:solidFill>
               </a:rPr>
-              <a:t>AWS AI Governance Platform concept</a:t>
+              <a:t>Governed-Agent Reference Architecture for AWS concept</a:t>
             </a:r>
             <a:endParaRPr lang="en-US" sz="650" dirty="0"/>
           </a:p>
@@ -11649,7 +11649,7 @@
                   <a:srgbClr val="64748B"/>
                 </a:solidFill>
               </a:rPr>
-              <a:t>AWS AI Governance Platform concept</a:t>
+              <a:t>Governed-Agent Reference Architecture for AWS concept</a:t>
             </a:r>
             <a:endParaRPr lang="en-US" sz="650" dirty="0"/>
           </a:p>
@@ -12874,7 +12874,7 @@
                   <a:srgbClr val="64748B"/>
                 </a:solidFill>
               </a:rPr>
-              <a:t>AWS AI Governance Platform concept</a:t>
+              <a:t>Governed-Agent Reference Architecture for AWS concept</a:t>
             </a:r>
             <a:endParaRPr lang="en-US" sz="650" dirty="0"/>
           </a:p>
@@ -13793,7 +13793,7 @@
                   <a:srgbClr val="64748B"/>
                 </a:solidFill>
               </a:rPr>
-              <a:t>AWS AI Governance Platform concept</a:t>
+              <a:t>Governed-Agent Reference Architecture for AWS concept</a:t>
             </a:r>
             <a:endParaRPr lang="en-US" sz="650" dirty="0"/>
           </a:p>
@@ -14686,7 +14686,7 @@
                   <a:srgbClr val="64748B"/>
                 </a:solidFill>
               </a:rPr>
-              <a:t>AWS AI Governance Platform concept</a:t>
+              <a:t>Governed-Agent Reference Architecture for AWS concept</a:t>
             </a:r>
             <a:endParaRPr lang="en-US" sz="650" dirty="0"/>
           </a:p>
